--- a/presentations/MuleSoft-APIGateway-OnPrem.pptx
+++ b/presentations/MuleSoft-APIGateway-OnPrem.pptx
@@ -15,6 +15,7 @@
     <p:sldId id="263" r:id="rId14"/>
     <p:sldId id="264" r:id="rId15"/>
     <p:sldId id="265" r:id="rId16"/>
+    <p:sldId id="266" r:id="rId17"/>
   </p:sldIdLst>
   <p:sldSz cx="12191695" cy="6858000" type="screen4x3"/>
   <p:notesSz cx="6858000" cy="9144000"/>
@@ -3492,6 +3493,1200 @@
                 </a:solidFill>
                 <a:latin typeface="Calibri"/>
               </a:rPr>
+              <a:t>Config replication — Connected vs Local mode</a:t>
+            </a:r>
+          </a:p>
+        </p:txBody>
+      </p:sp>
+      <p:sp>
+        <p:nvSpPr>
+          <p:cNvPr id="4" name="TextBox 3"/>
+          <p:cNvSpPr txBox="1"/>
+          <p:nvPr/>
+        </p:nvSpPr>
+        <p:spPr>
+          <a:xfrm>
+            <a:off x="457200" y="841248"/>
+            <a:ext cx="11247120" cy="320040"/>
+          </a:xfrm>
+          <a:prstGeom prst="rect">
+            <a:avLst/>
+          </a:prstGeom>
+          <a:noFill/>
+        </p:spPr>
+        <p:txBody>
+          <a:bodyPr wrap="square" lIns="45720" rIns="45720" tIns="18288" bIns="18288" anchor="t">
+            <a:spAutoFit/>
+          </a:bodyPr>
+          <a:lstStyle/>
+          <a:p>
+            <a:pPr algn="l"/>
+            <a:r>
+              <a:rPr sz="1300" b="0">
+                <a:solidFill>
+                  <a:srgbClr val="2E75B6"/>
+                </a:solidFill>
+                <a:latin typeface="Calibri"/>
+              </a:rPr>
+              <a:t>How declarative state stays in lockstep across replicas and DCs in real time</a:t>
+            </a:r>
+          </a:p>
+        </p:txBody>
+      </p:sp>
+      <p:sp>
+        <p:nvSpPr>
+          <p:cNvPr id="5" name="Rectangle 4"/>
+          <p:cNvSpPr/>
+          <p:nvPr/>
+        </p:nvSpPr>
+        <p:spPr>
+          <a:xfrm>
+            <a:off x="365760" y="1417320"/>
+            <a:ext cx="5669280" cy="4937760"/>
+          </a:xfrm>
+          <a:prstGeom prst="rect">
+            <a:avLst/>
+          </a:prstGeom>
+          <a:solidFill>
+            <a:srgbClr val="DEEBF7"/>
+          </a:solidFill>
+          <a:ln>
+            <a:noFill/>
+          </a:ln>
+        </p:spPr>
+        <p:style>
+          <a:lnRef idx="1">
+            <a:schemeClr val="accent1"/>
+          </a:lnRef>
+          <a:fillRef idx="3">
+            <a:schemeClr val="accent1"/>
+          </a:fillRef>
+          <a:effectRef idx="2">
+            <a:schemeClr val="accent1"/>
+          </a:effectRef>
+          <a:fontRef idx="minor">
+            <a:schemeClr val="lt1"/>
+          </a:fontRef>
+        </p:style>
+        <p:txBody>
+          <a:bodyPr rtlCol="0" anchor="ctr"/>
+          <a:lstStyle/>
+          <a:p>
+            <a:pPr algn="ctr"/>
+          </a:p>
+        </p:txBody>
+      </p:sp>
+      <p:sp>
+        <p:nvSpPr>
+          <p:cNvPr id="6" name="TextBox 5"/>
+          <p:cNvSpPr txBox="1"/>
+          <p:nvPr/>
+        </p:nvSpPr>
+        <p:spPr>
+          <a:xfrm>
+            <a:off x="502920" y="1508760"/>
+            <a:ext cx="5486400" cy="365760"/>
+          </a:xfrm>
+          <a:prstGeom prst="rect">
+            <a:avLst/>
+          </a:prstGeom>
+          <a:noFill/>
+        </p:spPr>
+        <p:txBody>
+          <a:bodyPr wrap="square" lIns="45720" rIns="45720" tIns="18288" bIns="18288" anchor="t">
+            <a:spAutoFit/>
+          </a:bodyPr>
+          <a:lstStyle/>
+          <a:p>
+            <a:pPr algn="l"/>
+            <a:r>
+              <a:rPr sz="1500" b="1">
+                <a:solidFill>
+                  <a:srgbClr val="1F4E79"/>
+                </a:solidFill>
+                <a:latin typeface="Calibri"/>
+              </a:rPr>
+              <a:t>Connected mode — Anypoint as source of truth</a:t>
+            </a:r>
+          </a:p>
+        </p:txBody>
+      </p:sp>
+      <p:sp>
+        <p:nvSpPr>
+          <p:cNvPr id="7" name="TextBox 6"/>
+          <p:cNvSpPr txBox="1"/>
+          <p:nvPr/>
+        </p:nvSpPr>
+        <p:spPr>
+          <a:xfrm>
+            <a:off x="502920" y="1920240"/>
+            <a:ext cx="5486400" cy="1463040"/>
+          </a:xfrm>
+          <a:prstGeom prst="rect">
+            <a:avLst/>
+          </a:prstGeom>
+          <a:noFill/>
+        </p:spPr>
+        <p:txBody>
+          <a:bodyPr wrap="square" lIns="45720" rIns="45720" tIns="18288" bIns="18288" anchor="t">
+            <a:spAutoFit/>
+          </a:bodyPr>
+          <a:lstStyle/>
+          <a:p>
+            <a:pPr algn="l"/>
+            <a:r>
+              <a:rPr sz="1100" b="0">
+                <a:solidFill>
+                  <a:srgbClr val="333333"/>
+                </a:solidFill>
+                <a:latin typeface="Calibri"/>
+              </a:rPr>
+              <a:t>Every replica maintains an outbound long-polled HTTPS connection to anypoint.mulesoft.com. Policy changes in API Manager push to all connected replicas globally within seconds. Each replica caches policy locally so brief Anypoint outages don't drop traffic.</a:t>
+            </a:r>
+          </a:p>
+        </p:txBody>
+      </p:sp>
+      <p:graphicFrame>
+        <p:nvGraphicFramePr>
+          <p:cNvPr id="8" name="Table 7"/>
+          <p:cNvGraphicFramePr>
+            <a:graphicFrameLocks noGrp="1"/>
+          </p:cNvGraphicFramePr>
+          <p:nvPr/>
+        </p:nvGraphicFramePr>
+        <p:xfrm>
+          <a:off x="502920" y="3657600"/>
+          <a:ext cx="5394960" cy="2606040"/>
+        </p:xfrm>
+        <a:graphic>
+          <a:graphicData uri="http://schemas.openxmlformats.org/drawingml/2006/table">
+            <a:tbl>
+              <a:tblPr firstRow="1" bandRow="1">
+                <a:tableStyleId>{5C22544A-7EE6-4342-B048-85BDC9FD1C3A}</a:tableStyleId>
+              </a:tblPr>
+              <a:tblGrid>
+                <a:gridCol w="2743200"/>
+                <a:gridCol w="2651760"/>
+              </a:tblGrid>
+              <a:tr h="372291">
+                <a:tc>
+                  <a:txBody>
+                    <a:bodyPr wrap="square"/>
+                    <a:lstStyle/>
+                    <a:p>
+                      <a:pPr algn="l"/>
+                      <a:r>
+                        <a:rPr sz="1100" b="1">
+                          <a:solidFill>
+                            <a:srgbClr val="FFFFFF"/>
+                          </a:solidFill>
+                          <a:latin typeface="Calibri"/>
+                        </a:rPr>
+                        <a:t>Property</a:t>
+                      </a:r>
+                    </a:p>
+                  </a:txBody>
+                  <a:tcPr marL="73152" marR="73152" marT="36576" marB="36576">
+                    <a:solidFill>
+                      <a:srgbClr val="2E75B6"/>
+                    </a:solidFill>
+                  </a:tcPr>
+                </a:tc>
+                <a:tc>
+                  <a:txBody>
+                    <a:bodyPr wrap="square"/>
+                    <a:lstStyle/>
+                    <a:p>
+                      <a:pPr algn="l"/>
+                      <a:r>
+                        <a:rPr sz="1100" b="1">
+                          <a:solidFill>
+                            <a:srgbClr val="FFFFFF"/>
+                          </a:solidFill>
+                          <a:latin typeface="Calibri"/>
+                        </a:rPr>
+                        <a:t>Value</a:t>
+                      </a:r>
+                    </a:p>
+                  </a:txBody>
+                  <a:tcPr marL="73152" marR="73152" marT="36576" marB="36576">
+                    <a:solidFill>
+                      <a:srgbClr val="2E75B6"/>
+                    </a:solidFill>
+                  </a:tcPr>
+                </a:tc>
+              </a:tr>
+              <a:tr h="372291">
+                <a:tc>
+                  <a:txBody>
+                    <a:bodyPr wrap="square"/>
+                    <a:lstStyle/>
+                    <a:p>
+                      <a:pPr algn="l"/>
+                      <a:r>
+                        <a:rPr sz="1000" b="0">
+                          <a:solidFill>
+                            <a:srgbClr val="333333"/>
+                          </a:solidFill>
+                          <a:latin typeface="Calibri"/>
+                        </a:rPr>
+                        <a:t>Replication mechanism</a:t>
+                      </a:r>
+                    </a:p>
+                  </a:txBody>
+                  <a:tcPr marL="73152" marR="73152" marT="36576" marB="36576">
+                    <a:solidFill>
+                      <a:srgbClr val="FFFFFF"/>
+                    </a:solidFill>
+                  </a:tcPr>
+                </a:tc>
+                <a:tc>
+                  <a:txBody>
+                    <a:bodyPr wrap="square"/>
+                    <a:lstStyle/>
+                    <a:p>
+                      <a:pPr algn="l"/>
+                      <a:r>
+                        <a:rPr sz="1000" b="0">
+                          <a:solidFill>
+                            <a:srgbClr val="333333"/>
+                          </a:solidFill>
+                          <a:latin typeface="Calibri"/>
+                        </a:rPr>
+                        <a:t>Anypoint Control Plane push</a:t>
+                      </a:r>
+                    </a:p>
+                  </a:txBody>
+                  <a:tcPr marL="73152" marR="73152" marT="36576" marB="36576">
+                    <a:solidFill>
+                      <a:srgbClr val="FFFFFF"/>
+                    </a:solidFill>
+                  </a:tcPr>
+                </a:tc>
+              </a:tr>
+              <a:tr h="372291">
+                <a:tc>
+                  <a:txBody>
+                    <a:bodyPr wrap="square"/>
+                    <a:lstStyle/>
+                    <a:p>
+                      <a:pPr algn="l"/>
+                      <a:r>
+                        <a:rPr sz="1000" b="0">
+                          <a:solidFill>
+                            <a:srgbClr val="333333"/>
+                          </a:solidFill>
+                          <a:latin typeface="Calibri"/>
+                        </a:rPr>
+                        <a:t>Push latency (change → live)</a:t>
+                      </a:r>
+                    </a:p>
+                  </a:txBody>
+                  <a:tcPr marL="73152" marR="73152" marT="36576" marB="36576">
+                    <a:solidFill>
+                      <a:srgbClr val="F2F2F2"/>
+                    </a:solidFill>
+                  </a:tcPr>
+                </a:tc>
+                <a:tc>
+                  <a:txBody>
+                    <a:bodyPr wrap="square"/>
+                    <a:lstStyle/>
+                    <a:p>
+                      <a:pPr algn="l"/>
+                      <a:r>
+                        <a:rPr sz="1000" b="0">
+                          <a:solidFill>
+                            <a:srgbClr val="333333"/>
+                          </a:solidFill>
+                          <a:latin typeface="Calibri"/>
+                        </a:rPr>
+                        <a:t>2–10 s end-to-end</a:t>
+                      </a:r>
+                    </a:p>
+                  </a:txBody>
+                  <a:tcPr marL="73152" marR="73152" marT="36576" marB="36576">
+                    <a:solidFill>
+                      <a:srgbClr val="F2F2F2"/>
+                    </a:solidFill>
+                  </a:tcPr>
+                </a:tc>
+              </a:tr>
+              <a:tr h="372291">
+                <a:tc>
+                  <a:txBody>
+                    <a:bodyPr wrap="square"/>
+                    <a:lstStyle/>
+                    <a:p>
+                      <a:pPr algn="l"/>
+                      <a:r>
+                        <a:rPr sz="1000" b="0">
+                          <a:solidFill>
+                            <a:srgbClr val="333333"/>
+                          </a:solidFill>
+                          <a:latin typeface="Calibri"/>
+                        </a:rPr>
+                        <a:t>RPO for config</a:t>
+                      </a:r>
+                    </a:p>
+                  </a:txBody>
+                  <a:tcPr marL="73152" marR="73152" marT="36576" marB="36576">
+                    <a:solidFill>
+                      <a:srgbClr val="FFFFFF"/>
+                    </a:solidFill>
+                  </a:tcPr>
+                </a:tc>
+                <a:tc>
+                  <a:txBody>
+                    <a:bodyPr wrap="square"/>
+                    <a:lstStyle/>
+                    <a:p>
+                      <a:pPr algn="l"/>
+                      <a:r>
+                        <a:rPr sz="1000" b="0">
+                          <a:solidFill>
+                            <a:srgbClr val="333333"/>
+                          </a:solidFill>
+                          <a:latin typeface="Calibri"/>
+                        </a:rPr>
+                        <a:t>Zero</a:t>
+                      </a:r>
+                    </a:p>
+                  </a:txBody>
+                  <a:tcPr marL="73152" marR="73152" marT="36576" marB="36576">
+                    <a:solidFill>
+                      <a:srgbClr val="FFFFFF"/>
+                    </a:solidFill>
+                  </a:tcPr>
+                </a:tc>
+              </a:tr>
+              <a:tr h="372291">
+                <a:tc>
+                  <a:txBody>
+                    <a:bodyPr wrap="square"/>
+                    <a:lstStyle/>
+                    <a:p>
+                      <a:pPr algn="l"/>
+                      <a:r>
+                        <a:rPr sz="1000" b="0">
+                          <a:solidFill>
+                            <a:srgbClr val="333333"/>
+                          </a:solidFill>
+                          <a:latin typeface="Calibri"/>
+                        </a:rPr>
+                        <a:t>Customer infrastructure needed</a:t>
+                      </a:r>
+                    </a:p>
+                  </a:txBody>
+                  <a:tcPr marL="73152" marR="73152" marT="36576" marB="36576">
+                    <a:solidFill>
+                      <a:srgbClr val="F2F2F2"/>
+                    </a:solidFill>
+                  </a:tcPr>
+                </a:tc>
+                <a:tc>
+                  <a:txBody>
+                    <a:bodyPr wrap="square"/>
+                    <a:lstStyle/>
+                    <a:p>
+                      <a:pPr algn="l"/>
+                      <a:r>
+                        <a:rPr sz="1000" b="0">
+                          <a:solidFill>
+                            <a:srgbClr val="333333"/>
+                          </a:solidFill>
+                          <a:latin typeface="Calibri"/>
+                        </a:rPr>
+                        <a:t>None</a:t>
+                      </a:r>
+                    </a:p>
+                  </a:txBody>
+                  <a:tcPr marL="73152" marR="73152" marT="36576" marB="36576">
+                    <a:solidFill>
+                      <a:srgbClr val="F2F2F2"/>
+                    </a:solidFill>
+                  </a:tcPr>
+                </a:tc>
+              </a:tr>
+              <a:tr h="372291">
+                <a:tc>
+                  <a:txBody>
+                    <a:bodyPr wrap="square"/>
+                    <a:lstStyle/>
+                    <a:p>
+                      <a:pPr algn="l"/>
+                      <a:r>
+                        <a:rPr sz="1000" b="0">
+                          <a:solidFill>
+                            <a:srgbClr val="333333"/>
+                          </a:solidFill>
+                          <a:latin typeface="Calibri"/>
+                        </a:rPr>
+                        <a:t>Resilience to Anypoint outage</a:t>
+                      </a:r>
+                    </a:p>
+                  </a:txBody>
+                  <a:tcPr marL="73152" marR="73152" marT="36576" marB="36576">
+                    <a:solidFill>
+                      <a:srgbClr val="FFFFFF"/>
+                    </a:solidFill>
+                  </a:tcPr>
+                </a:tc>
+                <a:tc>
+                  <a:txBody>
+                    <a:bodyPr wrap="square"/>
+                    <a:lstStyle/>
+                    <a:p>
+                      <a:pPr algn="l"/>
+                      <a:r>
+                        <a:rPr sz="1000" b="0">
+                          <a:solidFill>
+                            <a:srgbClr val="333333"/>
+                          </a:solidFill>
+                          <a:latin typeface="Calibri"/>
+                        </a:rPr>
+                        <a:t>Local cache ~24 h</a:t>
+                      </a:r>
+                    </a:p>
+                  </a:txBody>
+                  <a:tcPr marL="73152" marR="73152" marT="36576" marB="36576">
+                    <a:solidFill>
+                      <a:srgbClr val="FFFFFF"/>
+                    </a:solidFill>
+                  </a:tcPr>
+                </a:tc>
+              </a:tr>
+              <a:tr h="372294">
+                <a:tc>
+                  <a:txBody>
+                    <a:bodyPr wrap="square"/>
+                    <a:lstStyle/>
+                    <a:p>
+                      <a:pPr algn="l"/>
+                      <a:r>
+                        <a:rPr sz="1000" b="0">
+                          <a:solidFill>
+                            <a:srgbClr val="333333"/>
+                          </a:solidFill>
+                          <a:latin typeface="Calibri"/>
+                        </a:rPr>
+                        <a:t>Network requirement</a:t>
+                      </a:r>
+                    </a:p>
+                  </a:txBody>
+                  <a:tcPr marL="73152" marR="73152" marT="36576" marB="36576">
+                    <a:solidFill>
+                      <a:srgbClr val="F2F2F2"/>
+                    </a:solidFill>
+                  </a:tcPr>
+                </a:tc>
+                <a:tc>
+                  <a:txBody>
+                    <a:bodyPr wrap="square"/>
+                    <a:lstStyle/>
+                    <a:p>
+                      <a:pPr algn="l"/>
+                      <a:r>
+                        <a:rPr sz="1000" b="0">
+                          <a:solidFill>
+                            <a:srgbClr val="333333"/>
+                          </a:solidFill>
+                          <a:latin typeface="Calibri"/>
+                        </a:rPr>
+                        <a:t>Outbound 443 to anypoint.mulesoft.com</a:t>
+                      </a:r>
+                    </a:p>
+                  </a:txBody>
+                  <a:tcPr marL="73152" marR="73152" marT="36576" marB="36576">
+                    <a:solidFill>
+                      <a:srgbClr val="F2F2F2"/>
+                    </a:solidFill>
+                  </a:tcPr>
+                </a:tc>
+              </a:tr>
+            </a:tbl>
+          </a:graphicData>
+        </a:graphic>
+      </p:graphicFrame>
+      <p:sp>
+        <p:nvSpPr>
+          <p:cNvPr id="9" name="Rectangle 8"/>
+          <p:cNvSpPr/>
+          <p:nvPr/>
+        </p:nvSpPr>
+        <p:spPr>
+          <a:xfrm>
+            <a:off x="6263640" y="1417320"/>
+            <a:ext cx="5669280" cy="4937760"/>
+          </a:xfrm>
+          <a:prstGeom prst="rect">
+            <a:avLst/>
+          </a:prstGeom>
+          <a:solidFill>
+            <a:srgbClr val="F2F2F2"/>
+          </a:solidFill>
+          <a:ln>
+            <a:noFill/>
+          </a:ln>
+        </p:spPr>
+        <p:style>
+          <a:lnRef idx="1">
+            <a:schemeClr val="accent1"/>
+          </a:lnRef>
+          <a:fillRef idx="3">
+            <a:schemeClr val="accent1"/>
+          </a:fillRef>
+          <a:effectRef idx="2">
+            <a:schemeClr val="accent1"/>
+          </a:effectRef>
+          <a:fontRef idx="minor">
+            <a:schemeClr val="lt1"/>
+          </a:fontRef>
+        </p:style>
+        <p:txBody>
+          <a:bodyPr rtlCol="0" anchor="ctr"/>
+          <a:lstStyle/>
+          <a:p>
+            <a:pPr algn="ctr"/>
+          </a:p>
+        </p:txBody>
+      </p:sp>
+      <p:sp>
+        <p:nvSpPr>
+          <p:cNvPr id="10" name="TextBox 9"/>
+          <p:cNvSpPr txBox="1"/>
+          <p:nvPr/>
+        </p:nvSpPr>
+        <p:spPr>
+          <a:xfrm>
+            <a:off x="6400800" y="1508760"/>
+            <a:ext cx="5486400" cy="365760"/>
+          </a:xfrm>
+          <a:prstGeom prst="rect">
+            <a:avLst/>
+          </a:prstGeom>
+          <a:noFill/>
+        </p:spPr>
+        <p:txBody>
+          <a:bodyPr wrap="square" lIns="45720" rIns="45720" tIns="18288" bIns="18288" anchor="t">
+            <a:spAutoFit/>
+          </a:bodyPr>
+          <a:lstStyle/>
+          <a:p>
+            <a:pPr algn="l"/>
+            <a:r>
+              <a:rPr sz="1500" b="1">
+                <a:solidFill>
+                  <a:srgbClr val="1F4E79"/>
+                </a:solidFill>
+                <a:latin typeface="Calibri"/>
+              </a:rPr>
+              <a:t>Local mode — Git + Ansible AWX</a:t>
+            </a:r>
+          </a:p>
+        </p:txBody>
+      </p:sp>
+      <p:sp>
+        <p:nvSpPr>
+          <p:cNvPr id="11" name="TextBox 10"/>
+          <p:cNvSpPr txBox="1"/>
+          <p:nvPr/>
+        </p:nvSpPr>
+        <p:spPr>
+          <a:xfrm>
+            <a:off x="6400800" y="1920240"/>
+            <a:ext cx="5486400" cy="1463040"/>
+          </a:xfrm>
+          <a:prstGeom prst="rect">
+            <a:avLst/>
+          </a:prstGeom>
+          <a:noFill/>
+        </p:spPr>
+        <p:txBody>
+          <a:bodyPr wrap="square" lIns="45720" rIns="45720" tIns="18288" bIns="18288" anchor="t">
+            <a:spAutoFit/>
+          </a:bodyPr>
+          <a:lstStyle/>
+          <a:p>
+            <a:pPr algn="l"/>
+            <a:r>
+              <a:rPr sz="1100" b="0">
+                <a:solidFill>
+                  <a:srgbClr val="333333"/>
+                </a:solidFill>
+                <a:latin typeface="Calibri"/>
+              </a:rPr>
+              <a:t>Config (declarative YAML) lives in a Git repo — single source of truth. CI pipeline pushes to BOTH DCs in parallel on merge to main. Per-DC Ansible Tower / AWX runs the file deploy + SIGHUP hot reload. Daily reconciliation drift-detects and corrects.</a:t>
+            </a:r>
+          </a:p>
+        </p:txBody>
+      </p:sp>
+      <p:graphicFrame>
+        <p:nvGraphicFramePr>
+          <p:cNvPr id="12" name="Table 11"/>
+          <p:cNvGraphicFramePr>
+            <a:graphicFrameLocks noGrp="1"/>
+          </p:cNvGraphicFramePr>
+          <p:nvPr/>
+        </p:nvGraphicFramePr>
+        <p:xfrm>
+          <a:off x="6400800" y="3657600"/>
+          <a:ext cx="5440680" cy="2606040"/>
+        </p:xfrm>
+        <a:graphic>
+          <a:graphicData uri="http://schemas.openxmlformats.org/drawingml/2006/table">
+            <a:tbl>
+              <a:tblPr firstRow="1" bandRow="1">
+                <a:tableStyleId>{5C22544A-7EE6-4342-B048-85BDC9FD1C3A}</a:tableStyleId>
+              </a:tblPr>
+              <a:tblGrid>
+                <a:gridCol w="2743200"/>
+                <a:gridCol w="2697480"/>
+              </a:tblGrid>
+              <a:tr h="372291">
+                <a:tc>
+                  <a:txBody>
+                    <a:bodyPr wrap="square"/>
+                    <a:lstStyle/>
+                    <a:p>
+                      <a:pPr algn="l"/>
+                      <a:r>
+                        <a:rPr sz="1100" b="1">
+                          <a:solidFill>
+                            <a:srgbClr val="FFFFFF"/>
+                          </a:solidFill>
+                          <a:latin typeface="Calibri"/>
+                        </a:rPr>
+                        <a:t>Property</a:t>
+                      </a:r>
+                    </a:p>
+                  </a:txBody>
+                  <a:tcPr marL="73152" marR="73152" marT="36576" marB="36576">
+                    <a:solidFill>
+                      <a:srgbClr val="2E75B6"/>
+                    </a:solidFill>
+                  </a:tcPr>
+                </a:tc>
+                <a:tc>
+                  <a:txBody>
+                    <a:bodyPr wrap="square"/>
+                    <a:lstStyle/>
+                    <a:p>
+                      <a:pPr algn="l"/>
+                      <a:r>
+                        <a:rPr sz="1100" b="1">
+                          <a:solidFill>
+                            <a:srgbClr val="FFFFFF"/>
+                          </a:solidFill>
+                          <a:latin typeface="Calibri"/>
+                        </a:rPr>
+                        <a:t>Value</a:t>
+                      </a:r>
+                    </a:p>
+                  </a:txBody>
+                  <a:tcPr marL="73152" marR="73152" marT="36576" marB="36576">
+                    <a:solidFill>
+                      <a:srgbClr val="2E75B6"/>
+                    </a:solidFill>
+                  </a:tcPr>
+                </a:tc>
+              </a:tr>
+              <a:tr h="372291">
+                <a:tc>
+                  <a:txBody>
+                    <a:bodyPr wrap="square"/>
+                    <a:lstStyle/>
+                    <a:p>
+                      <a:pPr algn="l"/>
+                      <a:r>
+                        <a:rPr sz="1000" b="0">
+                          <a:solidFill>
+                            <a:srgbClr val="333333"/>
+                          </a:solidFill>
+                          <a:latin typeface="Calibri"/>
+                        </a:rPr>
+                        <a:t>Replication mechanism</a:t>
+                      </a:r>
+                    </a:p>
+                  </a:txBody>
+                  <a:tcPr marL="73152" marR="73152" marT="36576" marB="36576">
+                    <a:solidFill>
+                      <a:srgbClr val="FFFFFF"/>
+                    </a:solidFill>
+                  </a:tcPr>
+                </a:tc>
+                <a:tc>
+                  <a:txBody>
+                    <a:bodyPr wrap="square"/>
+                    <a:lstStyle/>
+                    <a:p>
+                      <a:pPr algn="l"/>
+                      <a:r>
+                        <a:rPr sz="1000" b="0">
+                          <a:solidFill>
+                            <a:srgbClr val="333333"/>
+                          </a:solidFill>
+                          <a:latin typeface="Calibri"/>
+                        </a:rPr>
+                        <a:t>GitOps + Ansible AWX (parallel push)</a:t>
+                      </a:r>
+                    </a:p>
+                  </a:txBody>
+                  <a:tcPr marL="73152" marR="73152" marT="36576" marB="36576">
+                    <a:solidFill>
+                      <a:srgbClr val="FFFFFF"/>
+                    </a:solidFill>
+                  </a:tcPr>
+                </a:tc>
+              </a:tr>
+              <a:tr h="372291">
+                <a:tc>
+                  <a:txBody>
+                    <a:bodyPr wrap="square"/>
+                    <a:lstStyle/>
+                    <a:p>
+                      <a:pPr algn="l"/>
+                      <a:r>
+                        <a:rPr sz="1000" b="0">
+                          <a:solidFill>
+                            <a:srgbClr val="333333"/>
+                          </a:solidFill>
+                          <a:latin typeface="Calibri"/>
+                        </a:rPr>
+                        <a:t>Push latency (merge → live)</a:t>
+                      </a:r>
+                    </a:p>
+                  </a:txBody>
+                  <a:tcPr marL="73152" marR="73152" marT="36576" marB="36576">
+                    <a:solidFill>
+                      <a:srgbClr val="F2F2F2"/>
+                    </a:solidFill>
+                  </a:tcPr>
+                </a:tc>
+                <a:tc>
+                  <a:txBody>
+                    <a:bodyPr wrap="square"/>
+                    <a:lstStyle/>
+                    <a:p>
+                      <a:pPr algn="l"/>
+                      <a:r>
+                        <a:rPr sz="1000" b="0">
+                          <a:solidFill>
+                            <a:srgbClr val="333333"/>
+                          </a:solidFill>
+                          <a:latin typeface="Calibri"/>
+                        </a:rPr>
+                        <a:t>&lt; 30 s typical</a:t>
+                      </a:r>
+                    </a:p>
+                  </a:txBody>
+                  <a:tcPr marL="73152" marR="73152" marT="36576" marB="36576">
+                    <a:solidFill>
+                      <a:srgbClr val="F2F2F2"/>
+                    </a:solidFill>
+                  </a:tcPr>
+                </a:tc>
+              </a:tr>
+              <a:tr h="372291">
+                <a:tc>
+                  <a:txBody>
+                    <a:bodyPr wrap="square"/>
+                    <a:lstStyle/>
+                    <a:p>
+                      <a:pPr algn="l"/>
+                      <a:r>
+                        <a:rPr sz="1000" b="0">
+                          <a:solidFill>
+                            <a:srgbClr val="333333"/>
+                          </a:solidFill>
+                          <a:latin typeface="Calibri"/>
+                        </a:rPr>
+                        <a:t>RPO for config</a:t>
+                      </a:r>
+                    </a:p>
+                  </a:txBody>
+                  <a:tcPr marL="73152" marR="73152" marT="36576" marB="36576">
+                    <a:solidFill>
+                      <a:srgbClr val="FFFFFF"/>
+                    </a:solidFill>
+                  </a:tcPr>
+                </a:tc>
+                <a:tc>
+                  <a:txBody>
+                    <a:bodyPr wrap="square"/>
+                    <a:lstStyle/>
+                    <a:p>
+                      <a:pPr algn="l"/>
+                      <a:r>
+                        <a:rPr sz="1000" b="0">
+                          <a:solidFill>
+                            <a:srgbClr val="333333"/>
+                          </a:solidFill>
+                          <a:latin typeface="Calibri"/>
+                        </a:rPr>
+                        <a:t>Zero (Git is authoritative)</a:t>
+                      </a:r>
+                    </a:p>
+                  </a:txBody>
+                  <a:tcPr marL="73152" marR="73152" marT="36576" marB="36576">
+                    <a:solidFill>
+                      <a:srgbClr val="FFFFFF"/>
+                    </a:solidFill>
+                  </a:tcPr>
+                </a:tc>
+              </a:tr>
+              <a:tr h="372291">
+                <a:tc>
+                  <a:txBody>
+                    <a:bodyPr wrap="square"/>
+                    <a:lstStyle/>
+                    <a:p>
+                      <a:pPr algn="l"/>
+                      <a:r>
+                        <a:rPr sz="1000" b="0">
+                          <a:solidFill>
+                            <a:srgbClr val="333333"/>
+                          </a:solidFill>
+                          <a:latin typeface="Calibri"/>
+                        </a:rPr>
+                        <a:t>Customer infrastructure needed</a:t>
+                      </a:r>
+                    </a:p>
+                  </a:txBody>
+                  <a:tcPr marL="73152" marR="73152" marT="36576" marB="36576">
+                    <a:solidFill>
+                      <a:srgbClr val="F2F2F2"/>
+                    </a:solidFill>
+                  </a:tcPr>
+                </a:tc>
+                <a:tc>
+                  <a:txBody>
+                    <a:bodyPr wrap="square"/>
+                    <a:lstStyle/>
+                    <a:p>
+                      <a:pPr algn="l"/>
+                      <a:r>
+                        <a:rPr sz="1000" b="0">
+                          <a:solidFill>
+                            <a:srgbClr val="333333"/>
+                          </a:solidFill>
+                          <a:latin typeface="Calibri"/>
+                        </a:rPr>
+                        <a:t>Git + CI + AWX per DC + Vault for secrets</a:t>
+                      </a:r>
+                    </a:p>
+                  </a:txBody>
+                  <a:tcPr marL="73152" marR="73152" marT="36576" marB="36576">
+                    <a:solidFill>
+                      <a:srgbClr val="F2F2F2"/>
+                    </a:solidFill>
+                  </a:tcPr>
+                </a:tc>
+              </a:tr>
+              <a:tr h="372291">
+                <a:tc>
+                  <a:txBody>
+                    <a:bodyPr wrap="square"/>
+                    <a:lstStyle/>
+                    <a:p>
+                      <a:pPr algn="l"/>
+                      <a:r>
+                        <a:rPr sz="1000" b="0">
+                          <a:solidFill>
+                            <a:srgbClr val="333333"/>
+                          </a:solidFill>
+                          <a:latin typeface="Calibri"/>
+                        </a:rPr>
+                        <a:t>Resilience to GitOps outage</a:t>
+                      </a:r>
+                    </a:p>
+                  </a:txBody>
+                  <a:tcPr marL="73152" marR="73152" marT="36576" marB="36576">
+                    <a:solidFill>
+                      <a:srgbClr val="FFFFFF"/>
+                    </a:solidFill>
+                  </a:tcPr>
+                </a:tc>
+                <a:tc>
+                  <a:txBody>
+                    <a:bodyPr wrap="square"/>
+                    <a:lstStyle/>
+                    <a:p>
+                      <a:pPr algn="l"/>
+                      <a:r>
+                        <a:rPr sz="1000" b="0">
+                          <a:solidFill>
+                            <a:srgbClr val="333333"/>
+                          </a:solidFill>
+                          <a:latin typeface="Calibri"/>
+                        </a:rPr>
+                        <a:t>Existing config keeps serving</a:t>
+                      </a:r>
+                    </a:p>
+                  </a:txBody>
+                  <a:tcPr marL="73152" marR="73152" marT="36576" marB="36576">
+                    <a:solidFill>
+                      <a:srgbClr val="FFFFFF"/>
+                    </a:solidFill>
+                  </a:tcPr>
+                </a:tc>
+              </a:tr>
+              <a:tr h="372294">
+                <a:tc>
+                  <a:txBody>
+                    <a:bodyPr wrap="square"/>
+                    <a:lstStyle/>
+                    <a:p>
+                      <a:pPr algn="l"/>
+                      <a:r>
+                        <a:rPr sz="1000" b="0">
+                          <a:solidFill>
+                            <a:srgbClr val="333333"/>
+                          </a:solidFill>
+                          <a:latin typeface="Calibri"/>
+                        </a:rPr>
+                        <a:t>Network requirement</a:t>
+                      </a:r>
+                    </a:p>
+                  </a:txBody>
+                  <a:tcPr marL="73152" marR="73152" marT="36576" marB="36576">
+                    <a:solidFill>
+                      <a:srgbClr val="F2F2F2"/>
+                    </a:solidFill>
+                  </a:tcPr>
+                </a:tc>
+                <a:tc>
+                  <a:txBody>
+                    <a:bodyPr wrap="square"/>
+                    <a:lstStyle/>
+                    <a:p>
+                      <a:pPr algn="l"/>
+                      <a:r>
+                        <a:rPr sz="1000" b="0">
+                          <a:solidFill>
+                            <a:srgbClr val="333333"/>
+                          </a:solidFill>
+                          <a:latin typeface="Calibri"/>
+                        </a:rPr>
+                        <a:t>None outbound — fully air-gappable</a:t>
+                      </a:r>
+                    </a:p>
+                  </a:txBody>
+                  <a:tcPr marL="73152" marR="73152" marT="36576" marB="36576">
+                    <a:solidFill>
+                      <a:srgbClr val="F2F2F2"/>
+                    </a:solidFill>
+                  </a:tcPr>
+                </a:tc>
+              </a:tr>
+            </a:tbl>
+          </a:graphicData>
+        </a:graphic>
+      </p:graphicFrame>
+      <p:sp>
+        <p:nvSpPr>
+          <p:cNvPr id="13" name="Rectangle 12"/>
+          <p:cNvSpPr/>
+          <p:nvPr/>
+        </p:nvSpPr>
+        <p:spPr>
+          <a:xfrm>
+            <a:off x="0" y="6583680"/>
+            <a:ext cx="12191695" cy="274320"/>
+          </a:xfrm>
+          <a:prstGeom prst="rect">
+            <a:avLst/>
+          </a:prstGeom>
+          <a:solidFill>
+            <a:srgbClr val="F2F2F2"/>
+          </a:solidFill>
+          <a:ln>
+            <a:noFill/>
+          </a:ln>
+        </p:spPr>
+        <p:style>
+          <a:lnRef idx="1">
+            <a:schemeClr val="accent1"/>
+          </a:lnRef>
+          <a:fillRef idx="3">
+            <a:schemeClr val="accent1"/>
+          </a:fillRef>
+          <a:effectRef idx="2">
+            <a:schemeClr val="accent1"/>
+          </a:effectRef>
+          <a:fontRef idx="minor">
+            <a:schemeClr val="lt1"/>
+          </a:fontRef>
+        </p:style>
+        <p:txBody>
+          <a:bodyPr rtlCol="0" anchor="ctr"/>
+          <a:lstStyle/>
+          <a:p>
+            <a:pPr algn="ctr"/>
+          </a:p>
+        </p:txBody>
+      </p:sp>
+      <p:sp>
+        <p:nvSpPr>
+          <p:cNvPr id="14" name="TextBox 13"/>
+          <p:cNvSpPr txBox="1"/>
+          <p:nvPr/>
+        </p:nvSpPr>
+        <p:spPr>
+          <a:xfrm>
+            <a:off x="365760" y="6601968"/>
+            <a:ext cx="7315200" cy="256032"/>
+          </a:xfrm>
+          <a:prstGeom prst="rect">
+            <a:avLst/>
+          </a:prstGeom>
+          <a:noFill/>
+        </p:spPr>
+        <p:txBody>
+          <a:bodyPr wrap="square" lIns="45720" rIns="45720" tIns="18288" bIns="18288" anchor="ctr">
+            <a:spAutoFit/>
+          </a:bodyPr>
+          <a:lstStyle/>
+          <a:p>
+            <a:pPr algn="l"/>
+            <a:r>
+              <a:rPr sz="1000" b="0">
+                <a:solidFill>
+                  <a:srgbClr val="333333"/>
+                </a:solidFill>
+                <a:latin typeface="Calibri"/>
+              </a:rPr>
+              <a:t>MuleSoft API Gateway — On-Prem Deployment</a:t>
+            </a:r>
+          </a:p>
+        </p:txBody>
+      </p:sp>
+      <p:sp>
+        <p:nvSpPr>
+          <p:cNvPr id="15" name="TextBox 14"/>
+          <p:cNvSpPr txBox="1"/>
+          <p:nvPr/>
+        </p:nvSpPr>
+        <p:spPr>
+          <a:xfrm>
+            <a:off x="10972800" y="6601968"/>
+            <a:ext cx="914400" cy="256032"/>
+          </a:xfrm>
+          <a:prstGeom prst="rect">
+            <a:avLst/>
+          </a:prstGeom>
+          <a:noFill/>
+        </p:spPr>
+        <p:txBody>
+          <a:bodyPr wrap="square" lIns="45720" rIns="45720" tIns="18288" bIns="18288" anchor="ctr">
+            <a:spAutoFit/>
+          </a:bodyPr>
+          <a:lstStyle/>
+          <a:p>
+            <a:pPr algn="r"/>
+            <a:r>
+              <a:rPr sz="1000" b="0">
+                <a:solidFill>
+                  <a:srgbClr val="333333"/>
+                </a:solidFill>
+                <a:latin typeface="Calibri"/>
+              </a:rPr>
+              <a:t>10 / 11</a:t>
+            </a:r>
+          </a:p>
+        </p:txBody>
+      </p:sp>
+    </p:spTree>
+  </p:cSld>
+  <p:clrMapOvr>
+    <a:masterClrMapping/>
+  </p:clrMapOvr>
+</p:sld>
+</file>
+
+<file path=ppt/slides/slide11.xml><?xml version="1.0" encoding="utf-8"?>
+<p:sld xmlns:a="http://schemas.openxmlformats.org/drawingml/2006/main" xmlns:p="http://schemas.openxmlformats.org/presentationml/2006/main" xmlns:r="http://schemas.openxmlformats.org/officeDocument/2006/relationships">
+  <p:cSld>
+    <p:spTree>
+      <p:nvGrpSpPr>
+        <p:cNvPr id="1" name=""/>
+        <p:cNvGrpSpPr/>
+        <p:nvPr/>
+      </p:nvGrpSpPr>
+      <p:grpSpPr/>
+      <p:sp>
+        <p:nvSpPr>
+          <p:cNvPr id="2" name="Rectangle 1"/>
+          <p:cNvSpPr/>
+          <p:nvPr/>
+        </p:nvSpPr>
+        <p:spPr>
+          <a:xfrm>
+            <a:off x="0" y="0"/>
+            <a:ext cx="12191695" cy="777240"/>
+          </a:xfrm>
+          <a:prstGeom prst="rect">
+            <a:avLst/>
+          </a:prstGeom>
+          <a:solidFill>
+            <a:srgbClr val="1F4E79"/>
+          </a:solidFill>
+          <a:ln>
+            <a:noFill/>
+          </a:ln>
+        </p:spPr>
+        <p:style>
+          <a:lnRef idx="1">
+            <a:schemeClr val="accent1"/>
+          </a:lnRef>
+          <a:fillRef idx="3">
+            <a:schemeClr val="accent1"/>
+          </a:fillRef>
+          <a:effectRef idx="2">
+            <a:schemeClr val="accent1"/>
+          </a:effectRef>
+          <a:fontRef idx="minor">
+            <a:schemeClr val="lt1"/>
+          </a:fontRef>
+        </p:style>
+        <p:txBody>
+          <a:bodyPr rtlCol="0" anchor="ctr"/>
+          <a:lstStyle/>
+          <a:p>
+            <a:pPr algn="ctr"/>
+          </a:p>
+        </p:txBody>
+      </p:sp>
+      <p:sp>
+        <p:nvSpPr>
+          <p:cNvPr id="3" name="TextBox 2"/>
+          <p:cNvSpPr txBox="1"/>
+          <p:nvPr/>
+        </p:nvSpPr>
+        <p:spPr>
+          <a:xfrm>
+            <a:off x="457200" y="137160"/>
+            <a:ext cx="11247120" cy="502920"/>
+          </a:xfrm>
+          <a:prstGeom prst="rect">
+            <a:avLst/>
+          </a:prstGeom>
+          <a:noFill/>
+        </p:spPr>
+        <p:txBody>
+          <a:bodyPr wrap="square" lIns="45720" rIns="45720" tIns="18288" bIns="18288" anchor="ctr">
+            <a:spAutoFit/>
+          </a:bodyPr>
+          <a:lstStyle/>
+          <a:p>
+            <a:pPr algn="l"/>
+            <a:r>
+              <a:rPr sz="2600" b="1">
+                <a:solidFill>
+                  <a:srgbClr val="FFFFFF"/>
+                </a:solidFill>
+                <a:latin typeface="Calibri"/>
+              </a:rPr>
               <a:t>Operational ownership · risks · next steps</a:t>
             </a:r>
           </a:p>
@@ -4666,7 +5861,7 @@
                 </a:solidFill>
                 <a:latin typeface="Calibri"/>
               </a:rPr>
-              <a:t>10 / 10</a:t>
+              <a:t>11 / 11</a:t>
             </a:r>
           </a:p>
         </p:txBody>
@@ -5160,7 +6355,7 @@
                 </a:solidFill>
                 <a:latin typeface="Calibri"/>
               </a:rPr>
-              <a:t>2 / 10</a:t>
+              <a:t>2 / 11</a:t>
             </a:r>
           </a:p>
         </p:txBody>
@@ -5681,7 +6876,7 @@
                 </a:solidFill>
                 <a:latin typeface="Calibri"/>
               </a:rPr>
-              <a:t>3 / 10</a:t>
+              <a:t>3 / 11</a:t>
             </a:r>
           </a:p>
         </p:txBody>
@@ -6662,7 +7857,7 @@
                 </a:solidFill>
                 <a:latin typeface="Calibri"/>
               </a:rPr>
-              <a:t>4 / 10</a:t>
+              <a:t>4 / 11</a:t>
             </a:r>
           </a:p>
         </p:txBody>
@@ -7714,7 +8909,7 @@
                 </a:solidFill>
                 <a:latin typeface="Calibri"/>
               </a:rPr>
-              <a:t>5 / 10</a:t>
+              <a:t>5 / 11</a:t>
             </a:r>
           </a:p>
         </p:txBody>
@@ -7810,7 +9005,7 @@
                 </a:solidFill>
                 <a:latin typeface="Calibri"/>
               </a:rPr>
-              <a:t>Hardware sizing — keyed to 100K calls/day with growth headroom</a:t>
+              <a:t>Hardware sizing — 5M calls/day target</a:t>
             </a:r>
           </a:p>
         </p:txBody>
@@ -8088,7 +9283,7 @@
                           </a:solidFill>
                           <a:latin typeface="Calibri"/>
                         </a:rPr>
-                        <a:t>50 GB SSD (root + logs)</a:t>
+                        <a:t>100 GB SSD (~10 GB/day logs at 5M)</a:t>
                       </a:r>
                     </a:p>
                   </a:txBody>
@@ -8136,7 +9331,7 @@
                           </a:solidFill>
                           <a:latin typeface="Calibri"/>
                         </a:rPr>
-                        <a:t>1 Gbps (10 Gbps for high-vol DCs)</a:t>
+                        <a:t>1 Gbps sufficient; 10 Gbps DC fabric</a:t>
                       </a:r>
                     </a:p>
                   </a:txBody>
@@ -8325,7 +9520,7 @@
                 </a:solidFill>
                 <a:latin typeface="Calibri"/>
               </a:rPr>
-              <a:t>Target for 100K calls/day</a:t>
+              <a:t>Target for 5M calls/day (Prod)</a:t>
             </a:r>
           </a:p>
         </p:txBody>
@@ -8414,7 +9609,7 @@
                           </a:solidFill>
                           <a:latin typeface="Calibri"/>
                         </a:rPr>
-                        <a:t>Replicas per DC</a:t>
+                        <a:t>Peak TPS (5×) / spike (10×)</a:t>
                       </a:r>
                     </a:p>
                   </a:txBody>
@@ -8437,7 +9632,7 @@
                           </a:solidFill>
                           <a:latin typeface="Calibri"/>
                         </a:rPr>
-                        <a:t>2</a:t>
+                        <a:t>~600 / ~1,200</a:t>
                       </a:r>
                     </a:p>
                   </a:txBody>
@@ -8462,7 +9657,7 @@
                           </a:solidFill>
                           <a:latin typeface="Calibri"/>
                         </a:rPr>
-                        <a:t>Number of DCs</a:t>
+                        <a:t>Replicas per DC</a:t>
                       </a:r>
                     </a:p>
                   </a:txBody>
@@ -8485,7 +9680,7 @@
                           </a:solidFill>
                           <a:latin typeface="Calibri"/>
                         </a:rPr>
-                        <a:t>2 (active/active)</a:t>
+                        <a:t>4</a:t>
                       </a:r>
                     </a:p>
                   </a:txBody>
@@ -8510,7 +9705,7 @@
                           </a:solidFill>
                           <a:latin typeface="Calibri"/>
                         </a:rPr>
-                        <a:t>Total replicas</a:t>
+                        <a:t>Number of DCs</a:t>
                       </a:r>
                     </a:p>
                   </a:txBody>
@@ -8533,7 +9728,7 @@
                           </a:solidFill>
                           <a:latin typeface="Calibri"/>
                         </a:rPr>
-                        <a:t>4</a:t>
+                        <a:t>2 (active/active)</a:t>
                       </a:r>
                     </a:p>
                   </a:txBody>
@@ -8558,7 +9753,7 @@
                           </a:solidFill>
                           <a:latin typeface="Calibri"/>
                         </a:rPr>
-                        <a:t>Per-replica</a:t>
+                        <a:t>Total replicas</a:t>
                       </a:r>
                     </a:p>
                   </a:txBody>
@@ -8581,7 +9776,7 @@
                           </a:solidFill>
                           <a:latin typeface="Calibri"/>
                         </a:rPr>
-                        <a:t>2 vCPU / 4 GB RAM</a:t>
+                        <a:t>8</a:t>
                       </a:r>
                     </a:p>
                   </a:txBody>
@@ -8606,7 +9801,7 @@
                           </a:solidFill>
                           <a:latin typeface="Calibri"/>
                         </a:rPr>
-                        <a:t>Total compute footprint</a:t>
+                        <a:t>Per-replica</a:t>
                       </a:r>
                     </a:p>
                   </a:txBody>
@@ -8629,7 +9824,7 @@
                           </a:solidFill>
                           <a:latin typeface="Calibri"/>
                         </a:rPr>
-                        <a:t>8 vCPU + 16 GB RAM</a:t>
+                        <a:t>4 vCPU / 8 GB RAM</a:t>
                       </a:r>
                     </a:p>
                   </a:txBody>
@@ -8654,7 +9849,7 @@
                           </a:solidFill>
                           <a:latin typeface="Calibri"/>
                         </a:rPr>
-                        <a:t>Headroom vs 35 TPS worst-case spike</a:t>
+                        <a:t>Total Prod compute footprint</a:t>
                       </a:r>
                     </a:p>
                   </a:txBody>
@@ -8677,7 +9872,7 @@
                           </a:solidFill>
                           <a:latin typeface="Calibri"/>
                         </a:rPr>
-                        <a:t>~23×</a:t>
+                        <a:t>32 vCPU + 64 GB RAM</a:t>
                       </a:r>
                     </a:p>
                   </a:txBody>
@@ -8702,7 +9897,7 @@
                           </a:solidFill>
                           <a:latin typeface="Calibri"/>
                         </a:rPr>
-                        <a:t>Network egress at this volume</a:t>
+                        <a:t>Headroom vs 1,200 TPS spike</a:t>
                       </a:r>
                     </a:p>
                   </a:txBody>
@@ -8725,7 +9920,7 @@
                           </a:solidFill>
                           <a:latin typeface="Calibri"/>
                         </a:rPr>
-                        <a:t>~25 Mbps (well under any 1 Gbps NIC)</a:t>
+                        <a:t>~2× (monitor closely)</a:t>
                       </a:r>
                     </a:p>
                   </a:txBody>
@@ -8799,7 +9994,7 @@
                 <a:gridCol w="3657600"/>
                 <a:gridCol w="2743200"/>
               </a:tblGrid>
-              <a:tr h="304800">
+              <a:tr h="261257">
                 <a:tc>
                   <a:txBody>
                     <a:bodyPr wrap="square"/>
@@ -8882,7 +10077,7 @@
                           </a:solidFill>
                           <a:latin typeface="Calibri"/>
                         </a:rPr>
-                        <a:t>Total compute</a:t>
+                        <a:t>Total compute (both DCs)</a:t>
                       </a:r>
                     </a:p>
                   </a:txBody>
@@ -8893,21 +10088,21 @@
                   </a:tcPr>
                 </a:tc>
               </a:tr>
-              <a:tr h="304800">
-                <a:tc>
-                  <a:txBody>
-                    <a:bodyPr wrap="square"/>
-                    <a:lstStyle/>
-                    <a:p>
-                      <a:pPr algn="l"/>
-                      <a:r>
-                        <a:rPr sz="1100" b="0">
-                          <a:solidFill>
-                            <a:srgbClr val="333333"/>
-                          </a:solidFill>
-                          <a:latin typeface="Calibri"/>
-                        </a:rPr>
-                        <a:t>≤ 100K/day (now)</a:t>
+              <a:tr h="261257">
+                <a:tc>
+                  <a:txBody>
+                    <a:bodyPr wrap="square"/>
+                    <a:lstStyle/>
+                    <a:p>
+                      <a:pPr algn="l"/>
+                      <a:r>
+                        <a:rPr sz="1000" b="0">
+                          <a:solidFill>
+                            <a:srgbClr val="333333"/>
+                          </a:solidFill>
+                          <a:latin typeface="Calibri"/>
+                        </a:rPr>
+                        <a:t>≤ 100K/day</a:t>
                       </a:r>
                     </a:p>
                   </a:txBody>
@@ -8924,7 +10119,7 @@
                     <a:p>
                       <a:pPr algn="l"/>
                       <a:r>
-                        <a:rPr sz="1100" b="0">
+                        <a:rPr sz="1000" b="0">
                           <a:solidFill>
                             <a:srgbClr val="333333"/>
                           </a:solidFill>
@@ -8947,7 +10142,7 @@
                     <a:p>
                       <a:pPr algn="l"/>
                       <a:r>
-                        <a:rPr sz="1100" b="0">
+                        <a:rPr sz="1000" b="0">
                           <a:solidFill>
                             <a:srgbClr val="333333"/>
                           </a:solidFill>
@@ -8970,7 +10165,7 @@
                     <a:p>
                       <a:pPr algn="l"/>
                       <a:r>
-                        <a:rPr sz="1100" b="0">
+                        <a:rPr sz="1000" b="0">
                           <a:solidFill>
                             <a:srgbClr val="333333"/>
                           </a:solidFill>
@@ -8987,15 +10182,15 @@
                   </a:tcPr>
                 </a:tc>
               </a:tr>
-              <a:tr h="304800">
-                <a:tc>
-                  <a:txBody>
-                    <a:bodyPr wrap="square"/>
-                    <a:lstStyle/>
-                    <a:p>
-                      <a:pPr algn="l"/>
-                      <a:r>
-                        <a:rPr sz="1100" b="0">
+              <a:tr h="261257">
+                <a:tc>
+                  <a:txBody>
+                    <a:bodyPr wrap="square"/>
+                    <a:lstStyle/>
+                    <a:p>
+                      <a:pPr algn="l"/>
+                      <a:r>
+                        <a:rPr sz="1000" b="0">
                           <a:solidFill>
                             <a:srgbClr val="333333"/>
                           </a:solidFill>
@@ -9018,7 +10213,7 @@
                     <a:p>
                       <a:pPr algn="l"/>
                       <a:r>
-                        <a:rPr sz="1100" b="0">
+                        <a:rPr sz="1000" b="0">
                           <a:solidFill>
                             <a:srgbClr val="333333"/>
                           </a:solidFill>
@@ -9041,7 +10236,7 @@
                     <a:p>
                       <a:pPr algn="l"/>
                       <a:r>
-                        <a:rPr sz="1100" b="0">
+                        <a:rPr sz="1000" b="0">
                           <a:solidFill>
                             <a:srgbClr val="333333"/>
                           </a:solidFill>
@@ -9064,7 +10259,7 @@
                     <a:p>
                       <a:pPr algn="l"/>
                       <a:r>
-                        <a:rPr sz="1100" b="0">
+                        <a:rPr sz="1000" b="0">
                           <a:solidFill>
                             <a:srgbClr val="333333"/>
                           </a:solidFill>
@@ -9081,21 +10276,21 @@
                   </a:tcPr>
                 </a:tc>
               </a:tr>
-              <a:tr h="304800">
-                <a:tc>
-                  <a:txBody>
-                    <a:bodyPr wrap="square"/>
-                    <a:lstStyle/>
-                    <a:p>
-                      <a:pPr algn="l"/>
-                      <a:r>
-                        <a:rPr sz="1100" b="0">
-                          <a:solidFill>
-                            <a:srgbClr val="333333"/>
-                          </a:solidFill>
-                          <a:latin typeface="Calibri"/>
-                        </a:rPr>
-                        <a:t>5M/day</a:t>
+              <a:tr h="261257">
+                <a:tc>
+                  <a:txBody>
+                    <a:bodyPr wrap="square"/>
+                    <a:lstStyle/>
+                    <a:p>
+                      <a:pPr algn="l"/>
+                      <a:r>
+                        <a:rPr sz="1000" b="0">
+                          <a:solidFill>
+                            <a:srgbClr val="333333"/>
+                          </a:solidFill>
+                          <a:latin typeface="Calibri"/>
+                        </a:rPr>
+                        <a:t>5M/day (current target)</a:t>
                       </a:r>
                     </a:p>
                   </a:txBody>
@@ -9112,7 +10307,7 @@
                     <a:p>
                       <a:pPr algn="l"/>
                       <a:r>
-                        <a:rPr sz="1100" b="0">
+                        <a:rPr sz="1000" b="0">
                           <a:solidFill>
                             <a:srgbClr val="333333"/>
                           </a:solidFill>
@@ -9135,7 +10330,7 @@
                     <a:p>
                       <a:pPr algn="l"/>
                       <a:r>
-                        <a:rPr sz="1100" b="0">
+                        <a:rPr sz="1000" b="0">
                           <a:solidFill>
                             <a:srgbClr val="333333"/>
                           </a:solidFill>
@@ -9158,7 +10353,7 @@
                     <a:p>
                       <a:pPr algn="l"/>
                       <a:r>
-                        <a:rPr sz="1100" b="0">
+                        <a:rPr sz="1000" b="0">
                           <a:solidFill>
                             <a:srgbClr val="333333"/>
                           </a:solidFill>
@@ -9175,15 +10370,15 @@
                   </a:tcPr>
                 </a:tc>
               </a:tr>
-              <a:tr h="304800">
-                <a:tc>
-                  <a:txBody>
-                    <a:bodyPr wrap="square"/>
-                    <a:lstStyle/>
-                    <a:p>
-                      <a:pPr algn="l"/>
-                      <a:r>
-                        <a:rPr sz="1100" b="0">
+              <a:tr h="261257">
+                <a:tc>
+                  <a:txBody>
+                    <a:bodyPr wrap="square"/>
+                    <a:lstStyle/>
+                    <a:p>
+                      <a:pPr algn="l"/>
+                      <a:r>
+                        <a:rPr sz="1000" b="0">
                           <a:solidFill>
                             <a:srgbClr val="333333"/>
                           </a:solidFill>
@@ -9206,7 +10401,7 @@
                     <a:p>
                       <a:pPr algn="l"/>
                       <a:r>
-                        <a:rPr sz="1100" b="0">
+                        <a:rPr sz="1000" b="0">
                           <a:solidFill>
                             <a:srgbClr val="333333"/>
                           </a:solidFill>
@@ -9229,7 +10424,7 @@
                     <a:p>
                       <a:pPr algn="l"/>
                       <a:r>
-                        <a:rPr sz="1100" b="0">
+                        <a:rPr sz="1000" b="0">
                           <a:solidFill>
                             <a:srgbClr val="333333"/>
                           </a:solidFill>
@@ -9252,7 +10447,7 @@
                     <a:p>
                       <a:pPr algn="l"/>
                       <a:r>
-                        <a:rPr sz="1100" b="0">
+                        <a:rPr sz="1000" b="0">
                           <a:solidFill>
                             <a:srgbClr val="333333"/>
                           </a:solidFill>
@@ -9269,15 +10464,109 @@
                   </a:tcPr>
                 </a:tc>
               </a:tr>
-              <a:tr h="304800">
-                <a:tc>
-                  <a:txBody>
-                    <a:bodyPr wrap="square"/>
-                    <a:lstStyle/>
-                    <a:p>
-                      <a:pPr algn="l"/>
-                      <a:r>
-                        <a:rPr sz="1100" b="0">
+              <a:tr h="261257">
+                <a:tc>
+                  <a:txBody>
+                    <a:bodyPr wrap="square"/>
+                    <a:lstStyle/>
+                    <a:p>
+                      <a:pPr algn="l"/>
+                      <a:r>
+                        <a:rPr sz="1000" b="0">
+                          <a:solidFill>
+                            <a:srgbClr val="333333"/>
+                          </a:solidFill>
+                          <a:latin typeface="Calibri"/>
+                        </a:rPr>
+                        <a:t>25M/day</a:t>
+                      </a:r>
+                    </a:p>
+                  </a:txBody>
+                  <a:tcPr marL="73152" marR="73152" marT="36576" marB="36576">
+                    <a:solidFill>
+                      <a:srgbClr val="FFFFFF"/>
+                    </a:solidFill>
+                  </a:tcPr>
+                </a:tc>
+                <a:tc>
+                  <a:txBody>
+                    <a:bodyPr wrap="square"/>
+                    <a:lstStyle/>
+                    <a:p>
+                      <a:pPr algn="l"/>
+                      <a:r>
+                        <a:rPr sz="1000" b="0">
+                          <a:solidFill>
+                            <a:srgbClr val="333333"/>
+                          </a:solidFill>
+                          <a:latin typeface="Calibri"/>
+                        </a:rPr>
+                        <a:t>6</a:t>
+                      </a:r>
+                    </a:p>
+                  </a:txBody>
+                  <a:tcPr marL="73152" marR="73152" marT="36576" marB="36576">
+                    <a:solidFill>
+                      <a:srgbClr val="FFFFFF"/>
+                    </a:solidFill>
+                  </a:tcPr>
+                </a:tc>
+                <a:tc>
+                  <a:txBody>
+                    <a:bodyPr wrap="square"/>
+                    <a:lstStyle/>
+                    <a:p>
+                      <a:pPr algn="l"/>
+                      <a:r>
+                        <a:rPr sz="1000" b="0">
+                          <a:solidFill>
+                            <a:srgbClr val="333333"/>
+                          </a:solidFill>
+                          <a:latin typeface="Calibri"/>
+                        </a:rPr>
+                        <a:t>8 vCPU / 16 GB</a:t>
+                      </a:r>
+                    </a:p>
+                  </a:txBody>
+                  <a:tcPr marL="73152" marR="73152" marT="36576" marB="36576">
+                    <a:solidFill>
+                      <a:srgbClr val="FFFFFF"/>
+                    </a:solidFill>
+                  </a:tcPr>
+                </a:tc>
+                <a:tc>
+                  <a:txBody>
+                    <a:bodyPr wrap="square"/>
+                    <a:lstStyle/>
+                    <a:p>
+                      <a:pPr algn="l"/>
+                      <a:r>
+                        <a:rPr sz="1000" b="0">
+                          <a:solidFill>
+                            <a:srgbClr val="333333"/>
+                          </a:solidFill>
+                          <a:latin typeface="Calibri"/>
+                        </a:rPr>
+                        <a:t>96 vCPU + 192 GB</a:t>
+                      </a:r>
+                    </a:p>
+                  </a:txBody>
+                  <a:tcPr marL="73152" marR="73152" marT="36576" marB="36576">
+                    <a:solidFill>
+                      <a:srgbClr val="FFFFFF"/>
+                    </a:solidFill>
+                  </a:tcPr>
+                </a:tc>
+              </a:tr>
+              <a:tr h="261258">
+                <a:tc>
+                  <a:txBody>
+                    <a:bodyPr wrap="square"/>
+                    <a:lstStyle/>
+                    <a:p>
+                      <a:pPr algn="l"/>
+                      <a:r>
+                        <a:rPr sz="1000" b="0">
                           <a:solidFill>
                             <a:srgbClr val="333333"/>
                           </a:solidFill>
@@ -9289,18 +10578,18 @@
                   </a:txBody>
                   <a:tcPr marL="73152" marR="73152" marT="36576" marB="36576">
                     <a:solidFill>
-                      <a:srgbClr val="FFFFFF"/>
-                    </a:solidFill>
-                  </a:tcPr>
-                </a:tc>
-                <a:tc>
-                  <a:txBody>
-                    <a:bodyPr wrap="square"/>
-                    <a:lstStyle/>
-                    <a:p>
-                      <a:pPr algn="l"/>
-                      <a:r>
-                        <a:rPr sz="1100" b="0">
+                      <a:srgbClr val="F2F2F2"/>
+                    </a:solidFill>
+                  </a:tcPr>
+                </a:tc>
+                <a:tc>
+                  <a:txBody>
+                    <a:bodyPr wrap="square"/>
+                    <a:lstStyle/>
+                    <a:p>
+                      <a:pPr algn="l"/>
+                      <a:r>
+                        <a:rPr sz="1000" b="0">
                           <a:solidFill>
                             <a:srgbClr val="333333"/>
                           </a:solidFill>
@@ -9312,18 +10601,18 @@
                   </a:txBody>
                   <a:tcPr marL="73152" marR="73152" marT="36576" marB="36576">
                     <a:solidFill>
-                      <a:srgbClr val="FFFFFF"/>
-                    </a:solidFill>
-                  </a:tcPr>
-                </a:tc>
-                <a:tc>
-                  <a:txBody>
-                    <a:bodyPr wrap="square"/>
-                    <a:lstStyle/>
-                    <a:p>
-                      <a:pPr algn="l"/>
-                      <a:r>
-                        <a:rPr sz="1100" b="0">
+                      <a:srgbClr val="F2F2F2"/>
+                    </a:solidFill>
+                  </a:tcPr>
+                </a:tc>
+                <a:tc>
+                  <a:txBody>
+                    <a:bodyPr wrap="square"/>
+                    <a:lstStyle/>
+                    <a:p>
+                      <a:pPr algn="l"/>
+                      <a:r>
+                        <a:rPr sz="1000" b="0">
                           <a:solidFill>
                             <a:srgbClr val="333333"/>
                           </a:solidFill>
@@ -9335,18 +10624,18 @@
                   </a:txBody>
                   <a:tcPr marL="73152" marR="73152" marT="36576" marB="36576">
                     <a:solidFill>
-                      <a:srgbClr val="FFFFFF"/>
-                    </a:solidFill>
-                  </a:tcPr>
-                </a:tc>
-                <a:tc>
-                  <a:txBody>
-                    <a:bodyPr wrap="square"/>
-                    <a:lstStyle/>
-                    <a:p>
-                      <a:pPr algn="l"/>
-                      <a:r>
-                        <a:rPr sz="1100" b="0">
+                      <a:srgbClr val="F2F2F2"/>
+                    </a:solidFill>
+                  </a:tcPr>
+                </a:tc>
+                <a:tc>
+                  <a:txBody>
+                    <a:bodyPr wrap="square"/>
+                    <a:lstStyle/>
+                    <a:p>
+                      <a:pPr algn="l"/>
+                      <a:r>
+                        <a:rPr sz="1000" b="0">
                           <a:solidFill>
                             <a:srgbClr val="333333"/>
                           </a:solidFill>
@@ -9358,7 +10647,7 @@
                   </a:txBody>
                   <a:tcPr marL="73152" marR="73152" marT="36576" marB="36576">
                     <a:solidFill>
-                      <a:srgbClr val="FFFFFF"/>
+                      <a:srgbClr val="F2F2F2"/>
                     </a:solidFill>
                   </a:tcPr>
                 </a:tc>
@@ -9475,7 +10764,7 @@
                 </a:solidFill>
                 <a:latin typeface="Calibri"/>
               </a:rPr>
-              <a:t>6 / 10</a:t>
+              <a:t>6 / 11</a:t>
             </a:r>
           </a:p>
         </p:txBody>
@@ -9571,7 +10860,7 @@
                 </a:solidFill>
                 <a:latin typeface="Calibri"/>
               </a:rPr>
-              <a:t>Components to provision (on-prem)</a:t>
+              <a:t>Environments — DEV / QA / Acceptance / Prod</a:t>
             </a:r>
           </a:p>
         </p:txBody>
@@ -9606,7 +10895,7 @@
                 </a:solidFill>
                 <a:latin typeface="Calibri"/>
               </a:rPr>
-              <a:t>What your network, PKI, and platform teams need to deliver before first install</a:t>
+              <a:t>QA mirrors Prod for accurate load testing — that decision drives roughly half of gateway compute spend</a:t>
             </a:r>
           </a:p>
         </p:txBody>
@@ -9621,7 +10910,7 @@
         </p:nvGraphicFramePr>
         <p:xfrm>
           <a:off x="274320" y="1417320"/>
-          <a:ext cx="11612880" cy="4983480"/>
+          <a:ext cx="11612878" cy="3291840"/>
         </p:xfrm>
         <a:graphic>
           <a:graphicData uri="http://schemas.openxmlformats.org/drawingml/2006/table">
@@ -9630,25 +10919,27 @@
                 <a:tableStyleId>{5C22544A-7EE6-4342-B048-85BDC9FD1C3A}</a:tableStyleId>
               </a:tblPr>
               <a:tblGrid>
-                <a:gridCol w="4846320"/>
-                <a:gridCol w="2286000"/>
-                <a:gridCol w="4480560"/>
+                <a:gridCol w="2481384"/>
+                <a:gridCol w="1985107"/>
+                <a:gridCol w="2580640"/>
+                <a:gridCol w="2580640"/>
+                <a:gridCol w="1985107"/>
               </a:tblGrid>
-              <a:tr h="332232">
-                <a:tc>
-                  <a:txBody>
-                    <a:bodyPr wrap="square"/>
-                    <a:lstStyle/>
-                    <a:p>
-                      <a:pPr algn="l"/>
-                      <a:r>
-                        <a:rPr sz="1200" b="1">
+              <a:tr h="329184">
+                <a:tc>
+                  <a:txBody>
+                    <a:bodyPr wrap="square"/>
+                    <a:lstStyle/>
+                    <a:p>
+                      <a:pPr algn="l"/>
+                      <a:r>
+                        <a:rPr sz="1100" b="1">
                           <a:solidFill>
                             <a:srgbClr val="FFFFFF"/>
                           </a:solidFill>
                           <a:latin typeface="Calibri"/>
                         </a:rPr>
-                        <a:t>Component</a:t>
+                        <a:t>Setting</a:t>
                       </a:r>
                     </a:p>
                   </a:txBody>
@@ -9665,13 +10956,13 @@
                     <a:p>
                       <a:pPr algn="l"/>
                       <a:r>
-                        <a:rPr sz="1200" b="1">
+                        <a:rPr sz="1100" b="1">
                           <a:solidFill>
                             <a:srgbClr val="FFFFFF"/>
                           </a:solidFill>
                           <a:latin typeface="Calibri"/>
                         </a:rPr>
-                        <a:t>Owner</a:t>
+                        <a:t>DEV</a:t>
                       </a:r>
                     </a:p>
                   </a:txBody>
@@ -9688,13 +10979,13 @@
                     <a:p>
                       <a:pPr algn="l"/>
                       <a:r>
-                        <a:rPr sz="1200" b="1">
+                        <a:rPr sz="1100" b="1">
                           <a:solidFill>
                             <a:srgbClr val="FFFFFF"/>
                           </a:solidFill>
                           <a:latin typeface="Calibri"/>
                         </a:rPr>
-                        <a:t>Purpose</a:t>
+                        <a:t>QA (= Prod)</a:t>
                       </a:r>
                     </a:p>
                   </a:txBody>
@@ -9704,22 +10995,68 @@
                     </a:solidFill>
                   </a:tcPr>
                 </a:tc>
+                <a:tc>
+                  <a:txBody>
+                    <a:bodyPr wrap="square"/>
+                    <a:lstStyle/>
+                    <a:p>
+                      <a:pPr algn="l"/>
+                      <a:r>
+                        <a:rPr sz="1100" b="1">
+                          <a:solidFill>
+                            <a:srgbClr val="FFFFFF"/>
+                          </a:solidFill>
+                          <a:latin typeface="Calibri"/>
+                        </a:rPr>
+                        <a:t>Acceptance / UAT</a:t>
+                      </a:r>
+                    </a:p>
+                  </a:txBody>
+                  <a:tcPr marL="73152" marR="73152" marT="36576" marB="36576">
+                    <a:solidFill>
+                      <a:srgbClr val="1F4E79"/>
+                    </a:solidFill>
+                  </a:tcPr>
+                </a:tc>
+                <a:tc>
+                  <a:txBody>
+                    <a:bodyPr wrap="square"/>
+                    <a:lstStyle/>
+                    <a:p>
+                      <a:pPr algn="l"/>
+                      <a:r>
+                        <a:rPr sz="1100" b="1">
+                          <a:solidFill>
+                            <a:srgbClr val="FFFFFF"/>
+                          </a:solidFill>
+                          <a:latin typeface="Calibri"/>
+                        </a:rPr>
+                        <a:t>PROD</a:t>
+                      </a:r>
+                    </a:p>
+                  </a:txBody>
+                  <a:tcPr marL="73152" marR="73152" marT="36576" marB="36576">
+                    <a:solidFill>
+                      <a:srgbClr val="1F4E79"/>
+                    </a:solidFill>
+                  </a:tcPr>
+                </a:tc>
               </a:tr>
-              <a:tr h="332232">
-                <a:tc>
-                  <a:txBody>
-                    <a:bodyPr wrap="square"/>
-                    <a:lstStyle/>
-                    <a:p>
-                      <a:pPr algn="l"/>
-                      <a:r>
-                        <a:rPr sz="1000" b="0">
-                          <a:solidFill>
-                            <a:srgbClr val="333333"/>
-                          </a:solidFill>
-                          <a:latin typeface="Calibri"/>
-                        </a:rPr>
-                        <a:t>F5 BIG-IP DNS (GSLB) with cross-DC health checks, 30s TTL</a:t>
+              <a:tr h="329184">
+                <a:tc>
+                  <a:txBody>
+                    <a:bodyPr wrap="square"/>
+                    <a:lstStyle/>
+                    <a:p>
+                      <a:pPr algn="l"/>
+                      <a:r>
+                        <a:rPr sz="1000" b="0">
+                          <a:solidFill>
+                            <a:srgbClr val="333333"/>
+                          </a:solidFill>
+                          <a:latin typeface="Calibri"/>
+                        </a:rPr>
+                        <a:t>Volume target</a:t>
                       </a:r>
                     </a:p>
                   </a:txBody>
@@ -9742,7 +11079,7 @@
                           </a:solidFill>
                           <a:latin typeface="Calibri"/>
                         </a:rPr>
-                        <a:t>Network team</a:t>
+                        <a:t>sandbox</a:t>
                       </a:r>
                     </a:p>
                   </a:txBody>
@@ -9765,7 +11102,7 @@
                           </a:solidFill>
                           <a:latin typeface="Calibri"/>
                         </a:rPr>
-                        <a:t>Cross-DC failover and traffic distribution</a:t>
+                        <a:t>full 5M/day load test</a:t>
                       </a:r>
                     </a:p>
                   </a:txBody>
@@ -9775,22 +11112,68 @@
                     </a:solidFill>
                   </a:tcPr>
                 </a:tc>
+                <a:tc>
+                  <a:txBody>
+                    <a:bodyPr wrap="square"/>
+                    <a:lstStyle/>
+                    <a:p>
+                      <a:pPr algn="l"/>
+                      <a:r>
+                        <a:rPr sz="1000" b="0">
+                          <a:solidFill>
+                            <a:srgbClr val="333333"/>
+                          </a:solidFill>
+                          <a:latin typeface="Calibri"/>
+                        </a:rPr>
+                        <a:t>smoke + integration</a:t>
+                      </a:r>
+                    </a:p>
+                  </a:txBody>
+                  <a:tcPr marL="73152" marR="73152" marT="36576" marB="36576">
+                    <a:solidFill>
+                      <a:srgbClr val="FFFFFF"/>
+                    </a:solidFill>
+                  </a:tcPr>
+                </a:tc>
+                <a:tc>
+                  <a:txBody>
+                    <a:bodyPr wrap="square"/>
+                    <a:lstStyle/>
+                    <a:p>
+                      <a:pPr algn="l"/>
+                      <a:r>
+                        <a:rPr sz="1000" b="0">
+                          <a:solidFill>
+                            <a:srgbClr val="333333"/>
+                          </a:solidFill>
+                          <a:latin typeface="Calibri"/>
+                        </a:rPr>
+                        <a:t>5M/day</a:t>
+                      </a:r>
+                    </a:p>
+                  </a:txBody>
+                  <a:tcPr marL="73152" marR="73152" marT="36576" marB="36576">
+                    <a:solidFill>
+                      <a:srgbClr val="FFFFFF"/>
+                    </a:solidFill>
+                  </a:tcPr>
+                </a:tc>
               </a:tr>
-              <a:tr h="332232">
-                <a:tc>
-                  <a:txBody>
-                    <a:bodyPr wrap="square"/>
-                    <a:lstStyle/>
-                    <a:p>
-                      <a:pPr algn="l"/>
-                      <a:r>
-                        <a:rPr sz="1000" b="0">
-                          <a:solidFill>
-                            <a:srgbClr val="333333"/>
-                          </a:solidFill>
-                          <a:latin typeface="Calibri"/>
-                        </a:rPr>
-                        <a:t>F5 BIG-IP LTM per DC (HA pair, active/passive)</a:t>
+              <a:tr h="329184">
+                <a:tc>
+                  <a:txBody>
+                    <a:bodyPr wrap="square"/>
+                    <a:lstStyle/>
+                    <a:p>
+                      <a:pPr algn="l"/>
+                      <a:r>
+                        <a:rPr sz="1000" b="0">
+                          <a:solidFill>
+                            <a:srgbClr val="333333"/>
+                          </a:solidFill>
+                          <a:latin typeface="Calibri"/>
+                        </a:rPr>
+                        <a:t>DC topology</a:t>
                       </a:r>
                     </a:p>
                   </a:txBody>
@@ -9813,7 +11196,7 @@
                           </a:solidFill>
                           <a:latin typeface="Calibri"/>
                         </a:rPr>
-                        <a:t>Network team</a:t>
+                        <a:t>single DC</a:t>
                       </a:r>
                     </a:p>
                   </a:txBody>
@@ -9836,7 +11219,7 @@
                           </a:solidFill>
                           <a:latin typeface="Calibri"/>
                         </a:rPr>
-                        <a:t>Per-DC L7 load balancing across Flex Gateway replicas</a:t>
+                        <a:t>2 DCs active/active</a:t>
                       </a:r>
                     </a:p>
                   </a:txBody>
@@ -9846,22 +11229,68 @@
                     </a:solidFill>
                   </a:tcPr>
                 </a:tc>
+                <a:tc>
+                  <a:txBody>
+                    <a:bodyPr wrap="square"/>
+                    <a:lstStyle/>
+                    <a:p>
+                      <a:pPr algn="l"/>
+                      <a:r>
+                        <a:rPr sz="1000" b="0">
+                          <a:solidFill>
+                            <a:srgbClr val="333333"/>
+                          </a:solidFill>
+                          <a:latin typeface="Calibri"/>
+                        </a:rPr>
+                        <a:t>2 DCs active/active</a:t>
+                      </a:r>
+                    </a:p>
+                  </a:txBody>
+                  <a:tcPr marL="73152" marR="73152" marT="36576" marB="36576">
+                    <a:solidFill>
+                      <a:srgbClr val="F2F2F2"/>
+                    </a:solidFill>
+                  </a:tcPr>
+                </a:tc>
+                <a:tc>
+                  <a:txBody>
+                    <a:bodyPr wrap="square"/>
+                    <a:lstStyle/>
+                    <a:p>
+                      <a:pPr algn="l"/>
+                      <a:r>
+                        <a:rPr sz="1000" b="0">
+                          <a:solidFill>
+                            <a:srgbClr val="333333"/>
+                          </a:solidFill>
+                          <a:latin typeface="Calibri"/>
+                        </a:rPr>
+                        <a:t>2 DCs active/active</a:t>
+                      </a:r>
+                    </a:p>
+                  </a:txBody>
+                  <a:tcPr marL="73152" marR="73152" marT="36576" marB="36576">
+                    <a:solidFill>
+                      <a:srgbClr val="F2F2F2"/>
+                    </a:solidFill>
+                  </a:tcPr>
+                </a:tc>
               </a:tr>
-              <a:tr h="332232">
-                <a:tc>
-                  <a:txBody>
-                    <a:bodyPr wrap="square"/>
-                    <a:lstStyle/>
-                    <a:p>
-                      <a:pPr algn="l"/>
-                      <a:r>
-                        <a:rPr sz="1000" b="0">
-                          <a:solidFill>
-                            <a:srgbClr val="333333"/>
-                          </a:solidFill>
-                          <a:latin typeface="Calibri"/>
-                        </a:rPr>
-                        <a:t>VMs or K8s nodes per DC, sized per slide 6</a:t>
+              <a:tr h="329184">
+                <a:tc>
+                  <a:txBody>
+                    <a:bodyPr wrap="square"/>
+                    <a:lstStyle/>
+                    <a:p>
+                      <a:pPr algn="l"/>
+                      <a:r>
+                        <a:rPr sz="1000" b="0">
+                          <a:solidFill>
+                            <a:srgbClr val="333333"/>
+                          </a:solidFill>
+                          <a:latin typeface="Calibri"/>
+                        </a:rPr>
+                        <a:t>Replicas per DC</a:t>
                       </a:r>
                     </a:p>
                   </a:txBody>
@@ -9884,7 +11313,7 @@
                           </a:solidFill>
                           <a:latin typeface="Calibri"/>
                         </a:rPr>
-                        <a:t>Platform team</a:t>
+                        <a:t>1</a:t>
                       </a:r>
                     </a:p>
                   </a:txBody>
@@ -9907,7 +11336,7 @@
                           </a:solidFill>
                           <a:latin typeface="Calibri"/>
                         </a:rPr>
-                        <a:t>Flex Gateway runtime hosts</a:t>
+                        <a:t>4</a:t>
                       </a:r>
                     </a:p>
                   </a:txBody>
@@ -9917,22 +11346,68 @@
                     </a:solidFill>
                   </a:tcPr>
                 </a:tc>
+                <a:tc>
+                  <a:txBody>
+                    <a:bodyPr wrap="square"/>
+                    <a:lstStyle/>
+                    <a:p>
+                      <a:pPr algn="l"/>
+                      <a:r>
+                        <a:rPr sz="1000" b="0">
+                          <a:solidFill>
+                            <a:srgbClr val="333333"/>
+                          </a:solidFill>
+                          <a:latin typeface="Calibri"/>
+                        </a:rPr>
+                        <a:t>2</a:t>
+                      </a:r>
+                    </a:p>
+                  </a:txBody>
+                  <a:tcPr marL="73152" marR="73152" marT="36576" marB="36576">
+                    <a:solidFill>
+                      <a:srgbClr val="FFFFFF"/>
+                    </a:solidFill>
+                  </a:tcPr>
+                </a:tc>
+                <a:tc>
+                  <a:txBody>
+                    <a:bodyPr wrap="square"/>
+                    <a:lstStyle/>
+                    <a:p>
+                      <a:pPr algn="l"/>
+                      <a:r>
+                        <a:rPr sz="1000" b="0">
+                          <a:solidFill>
+                            <a:srgbClr val="333333"/>
+                          </a:solidFill>
+                          <a:latin typeface="Calibri"/>
+                        </a:rPr>
+                        <a:t>4</a:t>
+                      </a:r>
+                    </a:p>
+                  </a:txBody>
+                  <a:tcPr marL="73152" marR="73152" marT="36576" marB="36576">
+                    <a:solidFill>
+                      <a:srgbClr val="FFFFFF"/>
+                    </a:solidFill>
+                  </a:tcPr>
+                </a:tc>
               </a:tr>
-              <a:tr h="332232">
-                <a:tc>
-                  <a:txBody>
-                    <a:bodyPr wrap="square"/>
-                    <a:lstStyle/>
-                    <a:p>
-                      <a:pPr algn="l"/>
-                      <a:r>
-                        <a:rPr sz="1000" b="0">
-                          <a:solidFill>
-                            <a:srgbClr val="333333"/>
-                          </a:solidFill>
-                          <a:latin typeface="Calibri"/>
-                        </a:rPr>
-                        <a:t>Internal CA + cert lifecycle automation (cert-manager / Venafi)</a:t>
+              <a:tr h="329184">
+                <a:tc>
+                  <a:txBody>
+                    <a:bodyPr wrap="square"/>
+                    <a:lstStyle/>
+                    <a:p>
+                      <a:pPr algn="l"/>
+                      <a:r>
+                        <a:rPr sz="1000" b="0">
+                          <a:solidFill>
+                            <a:srgbClr val="333333"/>
+                          </a:solidFill>
+                          <a:latin typeface="Calibri"/>
+                        </a:rPr>
+                        <a:t>Total replicas</a:t>
                       </a:r>
                     </a:p>
                   </a:txBody>
@@ -9955,7 +11430,7 @@
                           </a:solidFill>
                           <a:latin typeface="Calibri"/>
                         </a:rPr>
-                        <a:t>PKI team</a:t>
+                        <a:t>1</a:t>
                       </a:r>
                     </a:p>
                   </a:txBody>
@@ -9978,7 +11453,7 @@
                           </a:solidFill>
                           <a:latin typeface="Calibri"/>
                         </a:rPr>
-                        <a:t>mTLS for internal listener + backend, public-CA cert for external listener</a:t>
+                        <a:t>8</a:t>
                       </a:r>
                     </a:p>
                   </a:txBody>
@@ -9988,22 +11463,68 @@
                     </a:solidFill>
                   </a:tcPr>
                 </a:tc>
+                <a:tc>
+                  <a:txBody>
+                    <a:bodyPr wrap="square"/>
+                    <a:lstStyle/>
+                    <a:p>
+                      <a:pPr algn="l"/>
+                      <a:r>
+                        <a:rPr sz="1000" b="0">
+                          <a:solidFill>
+                            <a:srgbClr val="333333"/>
+                          </a:solidFill>
+                          <a:latin typeface="Calibri"/>
+                        </a:rPr>
+                        <a:t>4</a:t>
+                      </a:r>
+                    </a:p>
+                  </a:txBody>
+                  <a:tcPr marL="73152" marR="73152" marT="36576" marB="36576">
+                    <a:solidFill>
+                      <a:srgbClr val="F2F2F2"/>
+                    </a:solidFill>
+                  </a:tcPr>
+                </a:tc>
+                <a:tc>
+                  <a:txBody>
+                    <a:bodyPr wrap="square"/>
+                    <a:lstStyle/>
+                    <a:p>
+                      <a:pPr algn="l"/>
+                      <a:r>
+                        <a:rPr sz="1000" b="0">
+                          <a:solidFill>
+                            <a:srgbClr val="333333"/>
+                          </a:solidFill>
+                          <a:latin typeface="Calibri"/>
+                        </a:rPr>
+                        <a:t>8</a:t>
+                      </a:r>
+                    </a:p>
+                  </a:txBody>
+                  <a:tcPr marL="73152" marR="73152" marT="36576" marB="36576">
+                    <a:solidFill>
+                      <a:srgbClr val="F2F2F2"/>
+                    </a:solidFill>
+                  </a:tcPr>
+                </a:tc>
               </a:tr>
-              <a:tr h="332232">
-                <a:tc>
-                  <a:txBody>
-                    <a:bodyPr wrap="square"/>
-                    <a:lstStyle/>
-                    <a:p>
-                      <a:pPr algn="l"/>
-                      <a:r>
-                        <a:rPr sz="1000" b="0">
-                          <a:solidFill>
-                            <a:srgbClr val="333333"/>
-                          </a:solidFill>
-                          <a:latin typeface="Calibri"/>
-                        </a:rPr>
-                        <a:t>HashiCorp Vault with performance replication across DCs</a:t>
+              <a:tr h="329184">
+                <a:tc>
+                  <a:txBody>
+                    <a:bodyPr wrap="square"/>
+                    <a:lstStyle/>
+                    <a:p>
+                      <a:pPr algn="l"/>
+                      <a:r>
+                        <a:rPr sz="1000" b="0">
+                          <a:solidFill>
+                            <a:srgbClr val="333333"/>
+                          </a:solidFill>
+                          <a:latin typeface="Calibri"/>
+                        </a:rPr>
+                        <a:t>Per-replica spec</a:t>
                       </a:r>
                     </a:p>
                   </a:txBody>
@@ -10026,7 +11547,7 @@
                           </a:solidFill>
                           <a:latin typeface="Calibri"/>
                         </a:rPr>
-                        <a:t>Security platform team</a:t>
+                        <a:t>2 vCPU / 2 GB</a:t>
                       </a:r>
                     </a:p>
                   </a:txBody>
@@ -10049,7 +11570,7 @@
                           </a:solidFill>
                           <a:latin typeface="Calibri"/>
                         </a:rPr>
-                        <a:t>Secrets, runtime registration token, backend credentials</a:t>
+                        <a:t>4 vCPU / 8 GB</a:t>
                       </a:r>
                     </a:p>
                   </a:txBody>
@@ -10059,22 +11580,68 @@
                     </a:solidFill>
                   </a:tcPr>
                 </a:tc>
+                <a:tc>
+                  <a:txBody>
+                    <a:bodyPr wrap="square"/>
+                    <a:lstStyle/>
+                    <a:p>
+                      <a:pPr algn="l"/>
+                      <a:r>
+                        <a:rPr sz="1000" b="0">
+                          <a:solidFill>
+                            <a:srgbClr val="333333"/>
+                          </a:solidFill>
+                          <a:latin typeface="Calibri"/>
+                        </a:rPr>
+                        <a:t>2 vCPU / 4 GB</a:t>
+                      </a:r>
+                    </a:p>
+                  </a:txBody>
+                  <a:tcPr marL="73152" marR="73152" marT="36576" marB="36576">
+                    <a:solidFill>
+                      <a:srgbClr val="FFFFFF"/>
+                    </a:solidFill>
+                  </a:tcPr>
+                </a:tc>
+                <a:tc>
+                  <a:txBody>
+                    <a:bodyPr wrap="square"/>
+                    <a:lstStyle/>
+                    <a:p>
+                      <a:pPr algn="l"/>
+                      <a:r>
+                        <a:rPr sz="1000" b="0">
+                          <a:solidFill>
+                            <a:srgbClr val="333333"/>
+                          </a:solidFill>
+                          <a:latin typeface="Calibri"/>
+                        </a:rPr>
+                        <a:t>4 vCPU / 8 GB</a:t>
+                      </a:r>
+                    </a:p>
+                  </a:txBody>
+                  <a:tcPr marL="73152" marR="73152" marT="36576" marB="36576">
+                    <a:solidFill>
+                      <a:srgbClr val="FFFFFF"/>
+                    </a:solidFill>
+                  </a:tcPr>
+                </a:tc>
               </a:tr>
-              <a:tr h="332232">
-                <a:tc>
-                  <a:txBody>
-                    <a:bodyPr wrap="square"/>
-                    <a:lstStyle/>
-                    <a:p>
-                      <a:pPr algn="l"/>
-                      <a:r>
-                        <a:rPr sz="1000" b="0">
-                          <a:solidFill>
-                            <a:srgbClr val="333333"/>
-                          </a:solidFill>
-                          <a:latin typeface="Calibri"/>
-                        </a:rPr>
-                        <a:t>Git repo + CI/CD pipeline (Jenkins / GitHub Actions / Tekton)</a:t>
+              <a:tr h="329184">
+                <a:tc>
+                  <a:txBody>
+                    <a:bodyPr wrap="square"/>
+                    <a:lstStyle/>
+                    <a:p>
+                      <a:pPr algn="l"/>
+                      <a:r>
+                        <a:rPr sz="1000" b="0">
+                          <a:solidFill>
+                            <a:srgbClr val="333333"/>
+                          </a:solidFill>
+                          <a:latin typeface="Calibri"/>
+                        </a:rPr>
+                        <a:t>Compute total</a:t>
                       </a:r>
                     </a:p>
                   </a:txBody>
@@ -10097,7 +11664,7 @@
                           </a:solidFill>
                           <a:latin typeface="Calibri"/>
                         </a:rPr>
-                        <a:t>Platform team</a:t>
+                        <a:t>2 + 2</a:t>
                       </a:r>
                     </a:p>
                   </a:txBody>
@@ -10120,7 +11687,7 @@
                           </a:solidFill>
                           <a:latin typeface="Calibri"/>
                         </a:rPr>
-                        <a:t>Source of truth for config; pushes to both DCs in parallel</a:t>
+                        <a:t>32 + 64</a:t>
                       </a:r>
                     </a:p>
                   </a:txBody>
@@ -10130,22 +11697,68 @@
                     </a:solidFill>
                   </a:tcPr>
                 </a:tc>
+                <a:tc>
+                  <a:txBody>
+                    <a:bodyPr wrap="square"/>
+                    <a:lstStyle/>
+                    <a:p>
+                      <a:pPr algn="l"/>
+                      <a:r>
+                        <a:rPr sz="1000" b="0">
+                          <a:solidFill>
+                            <a:srgbClr val="333333"/>
+                          </a:solidFill>
+                          <a:latin typeface="Calibri"/>
+                        </a:rPr>
+                        <a:t>8 + 16</a:t>
+                      </a:r>
+                    </a:p>
+                  </a:txBody>
+                  <a:tcPr marL="73152" marR="73152" marT="36576" marB="36576">
+                    <a:solidFill>
+                      <a:srgbClr val="F2F2F2"/>
+                    </a:solidFill>
+                  </a:tcPr>
+                </a:tc>
+                <a:tc>
+                  <a:txBody>
+                    <a:bodyPr wrap="square"/>
+                    <a:lstStyle/>
+                    <a:p>
+                      <a:pPr algn="l"/>
+                      <a:r>
+                        <a:rPr sz="1000" b="0">
+                          <a:solidFill>
+                            <a:srgbClr val="333333"/>
+                          </a:solidFill>
+                          <a:latin typeface="Calibri"/>
+                        </a:rPr>
+                        <a:t>32 + 64</a:t>
+                      </a:r>
+                    </a:p>
+                  </a:txBody>
+                  <a:tcPr marL="73152" marR="73152" marT="36576" marB="36576">
+                    <a:solidFill>
+                      <a:srgbClr val="F2F2F2"/>
+                    </a:solidFill>
+                  </a:tcPr>
+                </a:tc>
               </a:tr>
-              <a:tr h="332232">
-                <a:tc>
-                  <a:txBody>
-                    <a:bodyPr wrap="square"/>
-                    <a:lstStyle/>
-                    <a:p>
-                      <a:pPr algn="l"/>
-                      <a:r>
-                        <a:rPr sz="1000" b="0">
-                          <a:solidFill>
-                            <a:srgbClr val="333333"/>
-                          </a:solidFill>
-                          <a:latin typeface="Calibri"/>
-                        </a:rPr>
-                        <a:t>Ansible Tower / AWX per DC</a:t>
+              <a:tr h="329184">
+                <a:tc>
+                  <a:txBody>
+                    <a:bodyPr wrap="square"/>
+                    <a:lstStyle/>
+                    <a:p>
+                      <a:pPr algn="l"/>
+                      <a:r>
+                        <a:rPr sz="1000" b="0">
+                          <a:solidFill>
+                            <a:srgbClr val="333333"/>
+                          </a:solidFill>
+                          <a:latin typeface="Calibri"/>
+                        </a:rPr>
+                        <a:t>Redis</a:t>
                       </a:r>
                     </a:p>
                   </a:txBody>
@@ -10168,7 +11781,7 @@
                           </a:solidFill>
                           <a:latin typeface="Calibri"/>
                         </a:rPr>
-                        <a:t>Platform team</a:t>
+                        <a:t>1 dev node</a:t>
                       </a:r>
                     </a:p>
                   </a:txBody>
@@ -10191,7 +11804,7 @@
                           </a:solidFill>
                           <a:latin typeface="Calibri"/>
                         </a:rPr>
-                        <a:t>Per-DC config deployment + SIGHUP hot reload (Local mode)</a:t>
+                        <a:t>Sentinel 3-node × 2 DCs</a:t>
                       </a:r>
                     </a:p>
                   </a:txBody>
@@ -10201,22 +11814,68 @@
                     </a:solidFill>
                   </a:tcPr>
                 </a:tc>
+                <a:tc>
+                  <a:txBody>
+                    <a:bodyPr wrap="square"/>
+                    <a:lstStyle/>
+                    <a:p>
+                      <a:pPr algn="l"/>
+                      <a:r>
+                        <a:rPr sz="1000" b="0">
+                          <a:solidFill>
+                            <a:srgbClr val="333333"/>
+                          </a:solidFill>
+                          <a:latin typeface="Calibri"/>
+                        </a:rPr>
+                        <a:t>Sentinel 3-node × 1 DC</a:t>
+                      </a:r>
+                    </a:p>
+                  </a:txBody>
+                  <a:tcPr marL="73152" marR="73152" marT="36576" marB="36576">
+                    <a:solidFill>
+                      <a:srgbClr val="FFFFFF"/>
+                    </a:solidFill>
+                  </a:tcPr>
+                </a:tc>
+                <a:tc>
+                  <a:txBody>
+                    <a:bodyPr wrap="square"/>
+                    <a:lstStyle/>
+                    <a:p>
+                      <a:pPr algn="l"/>
+                      <a:r>
+                        <a:rPr sz="1000" b="0">
+                          <a:solidFill>
+                            <a:srgbClr val="333333"/>
+                          </a:solidFill>
+                          <a:latin typeface="Calibri"/>
+                        </a:rPr>
+                        <a:t>Sentinel 3-node × 2 DCs</a:t>
+                      </a:r>
+                    </a:p>
+                  </a:txBody>
+                  <a:tcPr marL="73152" marR="73152" marT="36576" marB="36576">
+                    <a:solidFill>
+                      <a:srgbClr val="FFFFFF"/>
+                    </a:solidFill>
+                  </a:tcPr>
+                </a:tc>
               </a:tr>
-              <a:tr h="332232">
-                <a:tc>
-                  <a:txBody>
-                    <a:bodyPr wrap="square"/>
-                    <a:lstStyle/>
-                    <a:p>
-                      <a:pPr algn="l"/>
-                      <a:r>
-                        <a:rPr sz="1000" b="0">
-                          <a:solidFill>
-                            <a:srgbClr val="333333"/>
-                          </a:solidFill>
-                          <a:latin typeface="Calibri"/>
-                        </a:rPr>
-                        <a:t>Outbound HTTPS to anypoint.mulesoft.com on 443 (Connected mode only)</a:t>
+              <a:tr h="329184">
+                <a:tc>
+                  <a:txBody>
+                    <a:bodyPr wrap="square"/>
+                    <a:lstStyle/>
+                    <a:p>
+                      <a:pPr algn="l"/>
+                      <a:r>
+                        <a:rPr sz="1000" b="0">
+                          <a:solidFill>
+                            <a:srgbClr val="333333"/>
+                          </a:solidFill>
+                          <a:latin typeface="Calibri"/>
+                        </a:rPr>
+                        <a:t>Service Bus tier (if used)</a:t>
                       </a:r>
                     </a:p>
                   </a:txBody>
@@ -10239,7 +11898,7 @@
                           </a:solidFill>
                           <a:latin typeface="Calibri"/>
                         </a:rPr>
-                        <a:t>Network team</a:t>
+                        <a:t>Standard</a:t>
                       </a:r>
                     </a:p>
                   </a:txBody>
@@ -10262,7 +11921,7 @@
                           </a:solidFill>
                           <a:latin typeface="Calibri"/>
                         </a:rPr>
-                        <a:t>Policy push + telemetry to Anypoint Control Plane</a:t>
+                        <a:t>Premium (load-test data)</a:t>
                       </a:r>
                     </a:p>
                   </a:txBody>
@@ -10272,22 +11931,68 @@
                     </a:solidFill>
                   </a:tcPr>
                 </a:tc>
+                <a:tc>
+                  <a:txBody>
+                    <a:bodyPr wrap="square"/>
+                    <a:lstStyle/>
+                    <a:p>
+                      <a:pPr algn="l"/>
+                      <a:r>
+                        <a:rPr sz="1000" b="0">
+                          <a:solidFill>
+                            <a:srgbClr val="333333"/>
+                          </a:solidFill>
+                          <a:latin typeface="Calibri"/>
+                        </a:rPr>
+                        <a:t>Standard or Premium</a:t>
+                      </a:r>
+                    </a:p>
+                  </a:txBody>
+                  <a:tcPr marL="73152" marR="73152" marT="36576" marB="36576">
+                    <a:solidFill>
+                      <a:srgbClr val="F2F2F2"/>
+                    </a:solidFill>
+                  </a:tcPr>
+                </a:tc>
+                <a:tc>
+                  <a:txBody>
+                    <a:bodyPr wrap="square"/>
+                    <a:lstStyle/>
+                    <a:p>
+                      <a:pPr algn="l"/>
+                      <a:r>
+                        <a:rPr sz="1000" b="0">
+                          <a:solidFill>
+                            <a:srgbClr val="333333"/>
+                          </a:solidFill>
+                          <a:latin typeface="Calibri"/>
+                        </a:rPr>
+                        <a:t>Premium</a:t>
+                      </a:r>
+                    </a:p>
+                  </a:txBody>
+                  <a:tcPr marL="73152" marR="73152" marT="36576" marB="36576">
+                    <a:solidFill>
+                      <a:srgbClr val="F2F2F2"/>
+                    </a:solidFill>
+                  </a:tcPr>
+                </a:tc>
               </a:tr>
-              <a:tr h="332232">
-                <a:tc>
-                  <a:txBody>
-                    <a:bodyPr wrap="square"/>
-                    <a:lstStyle/>
-                    <a:p>
-                      <a:pPr algn="l"/>
-                      <a:r>
-                        <a:rPr sz="1000" b="0">
-                          <a:solidFill>
-                            <a:srgbClr val="333333"/>
-                          </a:solidFill>
-                          <a:latin typeface="Calibri"/>
-                        </a:rPr>
-                        <a:t>Private DNS — internal zone with backend hostnames</a:t>
+              <a:tr h="329184">
+                <a:tc>
+                  <a:txBody>
+                    <a:bodyPr wrap="square"/>
+                    <a:lstStyle/>
+                    <a:p>
+                      <a:pPr algn="l"/>
+                      <a:r>
+                        <a:rPr sz="1000" b="0">
+                          <a:solidFill>
+                            <a:srgbClr val="333333"/>
+                          </a:solidFill>
+                          <a:latin typeface="Calibri"/>
+                        </a:rPr>
+                        <a:t>HA / DR drills validated here?</a:t>
                       </a:r>
                     </a:p>
                   </a:txBody>
@@ -10310,7 +12015,7 @@
                           </a:solidFill>
                           <a:latin typeface="Calibri"/>
                         </a:rPr>
-                        <a:t>DNS team</a:t>
+                        <a:t>No</a:t>
                       </a:r>
                     </a:p>
                   </a:txBody>
@@ -10333,7 +12038,7 @@
                           </a:solidFill>
                           <a:latin typeface="Calibri"/>
                         </a:rPr>
-                        <a:t>Backend service resolution (e.g. biztalk-prod.internal.yourco)</a:t>
+                        <a:t>Yes — full Prod runbook</a:t>
                       </a:r>
                     </a:p>
                   </a:txBody>
@@ -10343,93 +12048,20 @@
                     </a:solidFill>
                   </a:tcPr>
                 </a:tc>
-              </a:tr>
-              <a:tr h="332232">
-                <a:tc>
-                  <a:txBody>
-                    <a:bodyPr wrap="square"/>
-                    <a:lstStyle/>
-                    <a:p>
-                      <a:pPr algn="l"/>
-                      <a:r>
-                        <a:rPr sz="1000" b="0">
-                          <a:solidFill>
-                            <a:srgbClr val="333333"/>
-                          </a:solidFill>
-                          <a:latin typeface="Calibri"/>
-                        </a:rPr>
-                        <a:t>Perimeter firewall + east-west FW rules</a:t>
-                      </a:r>
-                    </a:p>
-                  </a:txBody>
-                  <a:tcPr marL="73152" marR="73152" marT="36576" marB="36576">
-                    <a:solidFill>
-                      <a:srgbClr val="F2F2F2"/>
-                    </a:solidFill>
-                  </a:tcPr>
-                </a:tc>
-                <a:tc>
-                  <a:txBody>
-                    <a:bodyPr wrap="square"/>
-                    <a:lstStyle/>
-                    <a:p>
-                      <a:pPr algn="l"/>
-                      <a:r>
-                        <a:rPr sz="1000" b="0">
-                          <a:solidFill>
-                            <a:srgbClr val="333333"/>
-                          </a:solidFill>
-                          <a:latin typeface="Calibri"/>
-                        </a:rPr>
-                        <a:t>Network team</a:t>
-                      </a:r>
-                    </a:p>
-                  </a:txBody>
-                  <a:tcPr marL="73152" marR="73152" marT="36576" marB="36576">
-                    <a:solidFill>
-                      <a:srgbClr val="F2F2F2"/>
-                    </a:solidFill>
-                  </a:tcPr>
-                </a:tc>
-                <a:tc>
-                  <a:txBody>
-                    <a:bodyPr wrap="square"/>
-                    <a:lstStyle/>
-                    <a:p>
-                      <a:pPr algn="l"/>
-                      <a:r>
-                        <a:rPr sz="1000" b="0">
-                          <a:solidFill>
-                            <a:srgbClr val="333333"/>
-                          </a:solidFill>
-                          <a:latin typeface="Calibri"/>
-                        </a:rPr>
-                        <a:t>Inbound 443/8443 to gateway; outbound 443 to MS stack and IdP</a:t>
-                      </a:r>
-                    </a:p>
-                  </a:txBody>
-                  <a:tcPr marL="73152" marR="73152" marT="36576" marB="36576">
-                    <a:solidFill>
-                      <a:srgbClr val="F2F2F2"/>
-                    </a:solidFill>
-                  </a:tcPr>
-                </a:tc>
-              </a:tr>
-              <a:tr h="332232">
-                <a:tc>
-                  <a:txBody>
-                    <a:bodyPr wrap="square"/>
-                    <a:lstStyle/>
-                    <a:p>
-                      <a:pPr algn="l"/>
-                      <a:r>
-                        <a:rPr sz="1000" b="0">
-                          <a:solidFill>
-                            <a:srgbClr val="333333"/>
-                          </a:solidFill>
-                          <a:latin typeface="Calibri"/>
-                        </a:rPr>
-                        <a:t>NTP servers (Stratum-2 ideally)</a:t>
+                <a:tc>
+                  <a:txBody>
+                    <a:bodyPr wrap="square"/>
+                    <a:lstStyle/>
+                    <a:p>
+                      <a:pPr algn="l"/>
+                      <a:r>
+                        <a:rPr sz="1000" b="0">
+                          <a:solidFill>
+                            <a:srgbClr val="333333"/>
+                          </a:solidFill>
+                          <a:latin typeface="Calibri"/>
+                        </a:rPr>
+                        <a:t>Yes</a:t>
                       </a:r>
                     </a:p>
                   </a:txBody>
@@ -10452,249 +12084,13 @@
                           </a:solidFill>
                           <a:latin typeface="Calibri"/>
                         </a:rPr>
-                        <a:t>Sysadmins</a:t>
+                        <a:t>Yes (production)</a:t>
                       </a:r>
                     </a:p>
                   </a:txBody>
                   <a:tcPr marL="73152" marR="73152" marT="36576" marB="36576">
                     <a:solidFill>
                       <a:srgbClr val="FFFFFF"/>
-                    </a:solidFill>
-                  </a:tcPr>
-                </a:tc>
-                <a:tc>
-                  <a:txBody>
-                    <a:bodyPr wrap="square"/>
-                    <a:lstStyle/>
-                    <a:p>
-                      <a:pPr algn="l"/>
-                      <a:r>
-                        <a:rPr sz="1000" b="0">
-                          <a:solidFill>
-                            <a:srgbClr val="333333"/>
-                          </a:solidFill>
-                          <a:latin typeface="Calibri"/>
-                        </a:rPr>
-                        <a:t>JWT exp/nbf validation requires &lt; 60s skew</a:t>
-                      </a:r>
-                    </a:p>
-                  </a:txBody>
-                  <a:tcPr marL="73152" marR="73152" marT="36576" marB="36576">
-                    <a:solidFill>
-                      <a:srgbClr val="FFFFFF"/>
-                    </a:solidFill>
-                  </a:tcPr>
-                </a:tc>
-              </a:tr>
-              <a:tr h="332232">
-                <a:tc>
-                  <a:txBody>
-                    <a:bodyPr wrap="square"/>
-                    <a:lstStyle/>
-                    <a:p>
-                      <a:pPr algn="l"/>
-                      <a:r>
-                        <a:rPr sz="1000" b="0">
-                          <a:solidFill>
-                            <a:srgbClr val="333333"/>
-                          </a:solidFill>
-                          <a:latin typeface="Calibri"/>
-                        </a:rPr>
-                        <a:t>SIEM (Splunk) + APM (Datadog) ingest endpoints</a:t>
-                      </a:r>
-                    </a:p>
-                  </a:txBody>
-                  <a:tcPr marL="73152" marR="73152" marT="36576" marB="36576">
-                    <a:solidFill>
-                      <a:srgbClr val="F2F2F2"/>
-                    </a:solidFill>
-                  </a:tcPr>
-                </a:tc>
-                <a:tc>
-                  <a:txBody>
-                    <a:bodyPr wrap="square"/>
-                    <a:lstStyle/>
-                    <a:p>
-                      <a:pPr algn="l"/>
-                      <a:r>
-                        <a:rPr sz="1000" b="0">
-                          <a:solidFill>
-                            <a:srgbClr val="333333"/>
-                          </a:solidFill>
-                          <a:latin typeface="Calibri"/>
-                        </a:rPr>
-                        <a:t>Observability</a:t>
-                      </a:r>
-                    </a:p>
-                  </a:txBody>
-                  <a:tcPr marL="73152" marR="73152" marT="36576" marB="36576">
-                    <a:solidFill>
-                      <a:srgbClr val="F2F2F2"/>
-                    </a:solidFill>
-                  </a:tcPr>
-                </a:tc>
-                <a:tc>
-                  <a:txBody>
-                    <a:bodyPr wrap="square"/>
-                    <a:lstStyle/>
-                    <a:p>
-                      <a:pPr algn="l"/>
-                      <a:r>
-                        <a:rPr sz="1000" b="0">
-                          <a:solidFill>
-                            <a:srgbClr val="333333"/>
-                          </a:solidFill>
-                          <a:latin typeface="Calibri"/>
-                        </a:rPr>
-                        <a:t>Dual-shipping from each Flex Gateway replica</a:t>
-                      </a:r>
-                    </a:p>
-                  </a:txBody>
-                  <a:tcPr marL="73152" marR="73152" marT="36576" marB="36576">
-                    <a:solidFill>
-                      <a:srgbClr val="F2F2F2"/>
-                    </a:solidFill>
-                  </a:tcPr>
-                </a:tc>
-              </a:tr>
-              <a:tr h="332232">
-                <a:tc>
-                  <a:txBody>
-                    <a:bodyPr wrap="square"/>
-                    <a:lstStyle/>
-                    <a:p>
-                      <a:pPr algn="l"/>
-                      <a:r>
-                        <a:rPr sz="1000" b="0">
-                          <a:solidFill>
-                            <a:srgbClr val="333333"/>
-                          </a:solidFill>
-                          <a:latin typeface="Calibri"/>
-                        </a:rPr>
-                        <a:t>Backup target for /etc/flex-gateway + Vault snapshots</a:t>
-                      </a:r>
-                    </a:p>
-                  </a:txBody>
-                  <a:tcPr marL="73152" marR="73152" marT="36576" marB="36576">
-                    <a:solidFill>
-                      <a:srgbClr val="FFFFFF"/>
-                    </a:solidFill>
-                  </a:tcPr>
-                </a:tc>
-                <a:tc>
-                  <a:txBody>
-                    <a:bodyPr wrap="square"/>
-                    <a:lstStyle/>
-                    <a:p>
-                      <a:pPr algn="l"/>
-                      <a:r>
-                        <a:rPr sz="1000" b="0">
-                          <a:solidFill>
-                            <a:srgbClr val="333333"/>
-                          </a:solidFill>
-                          <a:latin typeface="Calibri"/>
-                        </a:rPr>
-                        <a:t>Backup team</a:t>
-                      </a:r>
-                    </a:p>
-                  </a:txBody>
-                  <a:tcPr marL="73152" marR="73152" marT="36576" marB="36576">
-                    <a:solidFill>
-                      <a:srgbClr val="FFFFFF"/>
-                    </a:solidFill>
-                  </a:tcPr>
-                </a:tc>
-                <a:tc>
-                  <a:txBody>
-                    <a:bodyPr wrap="square"/>
-                    <a:lstStyle/>
-                    <a:p>
-                      <a:pPr algn="l"/>
-                      <a:r>
-                        <a:rPr sz="1000" b="0">
-                          <a:solidFill>
-                            <a:srgbClr val="333333"/>
-                          </a:solidFill>
-                          <a:latin typeface="Calibri"/>
-                        </a:rPr>
-                        <a:t>Disaster recovery; daily cadence</a:t>
-                      </a:r>
-                    </a:p>
-                  </a:txBody>
-                  <a:tcPr marL="73152" marR="73152" marT="36576" marB="36576">
-                    <a:solidFill>
-                      <a:srgbClr val="FFFFFF"/>
-                    </a:solidFill>
-                  </a:tcPr>
-                </a:tc>
-              </a:tr>
-              <a:tr h="332232">
-                <a:tc>
-                  <a:txBody>
-                    <a:bodyPr wrap="square"/>
-                    <a:lstStyle/>
-                    <a:p>
-                      <a:pPr algn="l"/>
-                      <a:r>
-                        <a:rPr sz="1000" b="0">
-                          <a:solidFill>
-                            <a:srgbClr val="333333"/>
-                          </a:solidFill>
-                          <a:latin typeface="Calibri"/>
-                        </a:rPr>
-                        <a:t>DR-site provisioning (3rd DC or cloud) — optional</a:t>
-                      </a:r>
-                    </a:p>
-                  </a:txBody>
-                  <a:tcPr marL="73152" marR="73152" marT="36576" marB="36576">
-                    <a:solidFill>
-                      <a:srgbClr val="F2F2F2"/>
-                    </a:solidFill>
-                  </a:tcPr>
-                </a:tc>
-                <a:tc>
-                  <a:txBody>
-                    <a:bodyPr wrap="square"/>
-                    <a:lstStyle/>
-                    <a:p>
-                      <a:pPr algn="l"/>
-                      <a:r>
-                        <a:rPr sz="1000" b="0">
-                          <a:solidFill>
-                            <a:srgbClr val="333333"/>
-                          </a:solidFill>
-                          <a:latin typeface="Calibri"/>
-                        </a:rPr>
-                        <a:t>Platform team</a:t>
-                      </a:r>
-                    </a:p>
-                  </a:txBody>
-                  <a:tcPr marL="73152" marR="73152" marT="36576" marB="36576">
-                    <a:solidFill>
-                      <a:srgbClr val="F2F2F2"/>
-                    </a:solidFill>
-                  </a:tcPr>
-                </a:tc>
-                <a:tc>
-                  <a:txBody>
-                    <a:bodyPr wrap="square"/>
-                    <a:lstStyle/>
-                    <a:p>
-                      <a:pPr algn="l"/>
-                      <a:r>
-                        <a:rPr sz="1000" b="0">
-                          <a:solidFill>
-                            <a:srgbClr val="333333"/>
-                          </a:solidFill>
-                          <a:latin typeface="Calibri"/>
-                        </a:rPr>
-                        <a:t>Multi-region geographic resilience beyond 2 metro DCs</a:t>
-                      </a:r>
-                    </a:p>
-                  </a:txBody>
-                  <a:tcPr marL="73152" marR="73152" marT="36576" marB="36576">
-                    <a:solidFill>
-                      <a:srgbClr val="F2F2F2"/>
                     </a:solidFill>
                   </a:tcPr>
                 </a:tc>
@@ -10706,6 +12102,1091 @@
       <p:sp>
         <p:nvSpPr>
           <p:cNvPr id="6" name="Rectangle 5"/>
+          <p:cNvSpPr/>
+          <p:nvPr/>
+        </p:nvSpPr>
+        <p:spPr>
+          <a:xfrm>
+            <a:off x="274320" y="4800600"/>
+            <a:ext cx="7680960" cy="1691640"/>
+          </a:xfrm>
+          <a:prstGeom prst="rect">
+            <a:avLst/>
+          </a:prstGeom>
+          <a:solidFill>
+            <a:srgbClr val="DEEBF7"/>
+          </a:solidFill>
+          <a:ln>
+            <a:noFill/>
+          </a:ln>
+        </p:spPr>
+        <p:style>
+          <a:lnRef idx="1">
+            <a:schemeClr val="accent1"/>
+          </a:lnRef>
+          <a:fillRef idx="3">
+            <a:schemeClr val="accent1"/>
+          </a:fillRef>
+          <a:effectRef idx="2">
+            <a:schemeClr val="accent1"/>
+          </a:effectRef>
+          <a:fontRef idx="minor">
+            <a:schemeClr val="lt1"/>
+          </a:fontRef>
+        </p:style>
+        <p:txBody>
+          <a:bodyPr rtlCol="0" anchor="ctr"/>
+          <a:lstStyle/>
+          <a:p>
+            <a:pPr algn="ctr"/>
+          </a:p>
+        </p:txBody>
+      </p:sp>
+      <p:sp>
+        <p:nvSpPr>
+          <p:cNvPr id="7" name="TextBox 6"/>
+          <p:cNvSpPr txBox="1"/>
+          <p:nvPr/>
+        </p:nvSpPr>
+        <p:spPr>
+          <a:xfrm>
+            <a:off x="457200" y="4864608"/>
+            <a:ext cx="7315200" cy="320040"/>
+          </a:xfrm>
+          <a:prstGeom prst="rect">
+            <a:avLst/>
+          </a:prstGeom>
+          <a:noFill/>
+        </p:spPr>
+        <p:txBody>
+          <a:bodyPr wrap="square" lIns="45720" rIns="45720" tIns="18288" bIns="18288" anchor="t">
+            <a:spAutoFit/>
+          </a:bodyPr>
+          <a:lstStyle/>
+          <a:p>
+            <a:pPr algn="l"/>
+            <a:r>
+              <a:rPr sz="1400" b="1">
+                <a:solidFill>
+                  <a:srgbClr val="1F4E79"/>
+                </a:solidFill>
+                <a:latin typeface="Calibri"/>
+              </a:rPr>
+              <a:t>Aggregated footprint across all 4 environments</a:t>
+            </a:r>
+          </a:p>
+        </p:txBody>
+      </p:sp>
+      <p:graphicFrame>
+        <p:nvGraphicFramePr>
+          <p:cNvPr id="8" name="Table 7"/>
+          <p:cNvGraphicFramePr>
+            <a:graphicFrameLocks noGrp="1"/>
+          </p:cNvGraphicFramePr>
+          <p:nvPr/>
+        </p:nvGraphicFramePr>
+        <p:xfrm>
+          <a:off x="457200" y="5193792"/>
+          <a:ext cx="7315200" cy="1280160"/>
+        </p:xfrm>
+        <a:graphic>
+          <a:graphicData uri="http://schemas.openxmlformats.org/drawingml/2006/table">
+            <a:tbl>
+              <a:tblPr firstRow="1" bandRow="1">
+                <a:tableStyleId>{5C22544A-7EE6-4342-B048-85BDC9FD1C3A}</a:tableStyleId>
+              </a:tblPr>
+              <a:tblGrid>
+                <a:gridCol w="2194560"/>
+                <a:gridCol w="731520"/>
+                <a:gridCol w="731520"/>
+                <a:gridCol w="731520"/>
+                <a:gridCol w="731520"/>
+                <a:gridCol w="2194560"/>
+              </a:tblGrid>
+              <a:tr h="213360">
+                <a:tc>
+                  <a:txBody>
+                    <a:bodyPr wrap="square"/>
+                    <a:lstStyle/>
+                    <a:p>
+                      <a:pPr algn="l"/>
+                      <a:r>
+                        <a:rPr sz="1000" b="1">
+                          <a:solidFill>
+                            <a:srgbClr val="FFFFFF"/>
+                          </a:solidFill>
+                          <a:latin typeface="Calibri"/>
+                        </a:rPr>
+                        <a:t>Resource</a:t>
+                      </a:r>
+                    </a:p>
+                  </a:txBody>
+                  <a:tcPr marL="73152" marR="73152" marT="36576" marB="36576">
+                    <a:solidFill>
+                      <a:srgbClr val="2E75B6"/>
+                    </a:solidFill>
+                  </a:tcPr>
+                </a:tc>
+                <a:tc>
+                  <a:txBody>
+                    <a:bodyPr wrap="square"/>
+                    <a:lstStyle/>
+                    <a:p>
+                      <a:pPr algn="l"/>
+                      <a:r>
+                        <a:rPr sz="1000" b="1">
+                          <a:solidFill>
+                            <a:srgbClr val="FFFFFF"/>
+                          </a:solidFill>
+                          <a:latin typeface="Calibri"/>
+                        </a:rPr>
+                        <a:t>DEV</a:t>
+                      </a:r>
+                    </a:p>
+                  </a:txBody>
+                  <a:tcPr marL="73152" marR="73152" marT="36576" marB="36576">
+                    <a:solidFill>
+                      <a:srgbClr val="2E75B6"/>
+                    </a:solidFill>
+                  </a:tcPr>
+                </a:tc>
+                <a:tc>
+                  <a:txBody>
+                    <a:bodyPr wrap="square"/>
+                    <a:lstStyle/>
+                    <a:p>
+                      <a:pPr algn="l"/>
+                      <a:r>
+                        <a:rPr sz="1000" b="1">
+                          <a:solidFill>
+                            <a:srgbClr val="FFFFFF"/>
+                          </a:solidFill>
+                          <a:latin typeface="Calibri"/>
+                        </a:rPr>
+                        <a:t>QA</a:t>
+                      </a:r>
+                    </a:p>
+                  </a:txBody>
+                  <a:tcPr marL="73152" marR="73152" marT="36576" marB="36576">
+                    <a:solidFill>
+                      <a:srgbClr val="2E75B6"/>
+                    </a:solidFill>
+                  </a:tcPr>
+                </a:tc>
+                <a:tc>
+                  <a:txBody>
+                    <a:bodyPr wrap="square"/>
+                    <a:lstStyle/>
+                    <a:p>
+                      <a:pPr algn="l"/>
+                      <a:r>
+                        <a:rPr sz="1000" b="1">
+                          <a:solidFill>
+                            <a:srgbClr val="FFFFFF"/>
+                          </a:solidFill>
+                          <a:latin typeface="Calibri"/>
+                        </a:rPr>
+                        <a:t>UAT</a:t>
+                      </a:r>
+                    </a:p>
+                  </a:txBody>
+                  <a:tcPr marL="73152" marR="73152" marT="36576" marB="36576">
+                    <a:solidFill>
+                      <a:srgbClr val="2E75B6"/>
+                    </a:solidFill>
+                  </a:tcPr>
+                </a:tc>
+                <a:tc>
+                  <a:txBody>
+                    <a:bodyPr wrap="square"/>
+                    <a:lstStyle/>
+                    <a:p>
+                      <a:pPr algn="l"/>
+                      <a:r>
+                        <a:rPr sz="1000" b="1">
+                          <a:solidFill>
+                            <a:srgbClr val="FFFFFF"/>
+                          </a:solidFill>
+                          <a:latin typeface="Calibri"/>
+                        </a:rPr>
+                        <a:t>PROD</a:t>
+                      </a:r>
+                    </a:p>
+                  </a:txBody>
+                  <a:tcPr marL="73152" marR="73152" marT="36576" marB="36576">
+                    <a:solidFill>
+                      <a:srgbClr val="2E75B6"/>
+                    </a:solidFill>
+                  </a:tcPr>
+                </a:tc>
+                <a:tc>
+                  <a:txBody>
+                    <a:bodyPr wrap="square"/>
+                    <a:lstStyle/>
+                    <a:p>
+                      <a:pPr algn="l"/>
+                      <a:r>
+                        <a:rPr sz="1000" b="1">
+                          <a:solidFill>
+                            <a:srgbClr val="FFFFFF"/>
+                          </a:solidFill>
+                          <a:latin typeface="Calibri"/>
+                        </a:rPr>
+                        <a:t>Total</a:t>
+                      </a:r>
+                    </a:p>
+                  </a:txBody>
+                  <a:tcPr marL="73152" marR="73152" marT="36576" marB="36576">
+                    <a:solidFill>
+                      <a:srgbClr val="2E75B6"/>
+                    </a:solidFill>
+                  </a:tcPr>
+                </a:tc>
+              </a:tr>
+              <a:tr h="213360">
+                <a:tc>
+                  <a:txBody>
+                    <a:bodyPr wrap="square"/>
+                    <a:lstStyle/>
+                    <a:p>
+                      <a:pPr algn="l"/>
+                      <a:r>
+                        <a:rPr sz="900" b="0">
+                          <a:solidFill>
+                            <a:srgbClr val="333333"/>
+                          </a:solidFill>
+                          <a:latin typeface="Calibri"/>
+                        </a:rPr>
+                        <a:t>Gateway replicas</a:t>
+                      </a:r>
+                    </a:p>
+                  </a:txBody>
+                  <a:tcPr marL="73152" marR="73152" marT="36576" marB="36576">
+                    <a:solidFill>
+                      <a:srgbClr val="FFFFFF"/>
+                    </a:solidFill>
+                  </a:tcPr>
+                </a:tc>
+                <a:tc>
+                  <a:txBody>
+                    <a:bodyPr wrap="square"/>
+                    <a:lstStyle/>
+                    <a:p>
+                      <a:pPr algn="l"/>
+                      <a:r>
+                        <a:rPr sz="900" b="0">
+                          <a:solidFill>
+                            <a:srgbClr val="333333"/>
+                          </a:solidFill>
+                          <a:latin typeface="Calibri"/>
+                        </a:rPr>
+                        <a:t>1</a:t>
+                      </a:r>
+                    </a:p>
+                  </a:txBody>
+                  <a:tcPr marL="73152" marR="73152" marT="36576" marB="36576">
+                    <a:solidFill>
+                      <a:srgbClr val="FFFFFF"/>
+                    </a:solidFill>
+                  </a:tcPr>
+                </a:tc>
+                <a:tc>
+                  <a:txBody>
+                    <a:bodyPr wrap="square"/>
+                    <a:lstStyle/>
+                    <a:p>
+                      <a:pPr algn="l"/>
+                      <a:r>
+                        <a:rPr sz="900" b="0">
+                          <a:solidFill>
+                            <a:srgbClr val="333333"/>
+                          </a:solidFill>
+                          <a:latin typeface="Calibri"/>
+                        </a:rPr>
+                        <a:t>8</a:t>
+                      </a:r>
+                    </a:p>
+                  </a:txBody>
+                  <a:tcPr marL="73152" marR="73152" marT="36576" marB="36576">
+                    <a:solidFill>
+                      <a:srgbClr val="FFFFFF"/>
+                    </a:solidFill>
+                  </a:tcPr>
+                </a:tc>
+                <a:tc>
+                  <a:txBody>
+                    <a:bodyPr wrap="square"/>
+                    <a:lstStyle/>
+                    <a:p>
+                      <a:pPr algn="l"/>
+                      <a:r>
+                        <a:rPr sz="900" b="0">
+                          <a:solidFill>
+                            <a:srgbClr val="333333"/>
+                          </a:solidFill>
+                          <a:latin typeface="Calibri"/>
+                        </a:rPr>
+                        <a:t>4</a:t>
+                      </a:r>
+                    </a:p>
+                  </a:txBody>
+                  <a:tcPr marL="73152" marR="73152" marT="36576" marB="36576">
+                    <a:solidFill>
+                      <a:srgbClr val="FFFFFF"/>
+                    </a:solidFill>
+                  </a:tcPr>
+                </a:tc>
+                <a:tc>
+                  <a:txBody>
+                    <a:bodyPr wrap="square"/>
+                    <a:lstStyle/>
+                    <a:p>
+                      <a:pPr algn="l"/>
+                      <a:r>
+                        <a:rPr sz="900" b="0">
+                          <a:solidFill>
+                            <a:srgbClr val="333333"/>
+                          </a:solidFill>
+                          <a:latin typeface="Calibri"/>
+                        </a:rPr>
+                        <a:t>8</a:t>
+                      </a:r>
+                    </a:p>
+                  </a:txBody>
+                  <a:tcPr marL="73152" marR="73152" marT="36576" marB="36576">
+                    <a:solidFill>
+                      <a:srgbClr val="FFFFFF"/>
+                    </a:solidFill>
+                  </a:tcPr>
+                </a:tc>
+                <a:tc>
+                  <a:txBody>
+                    <a:bodyPr wrap="square"/>
+                    <a:lstStyle/>
+                    <a:p>
+                      <a:pPr algn="l"/>
+                      <a:r>
+                        <a:rPr sz="900" b="0">
+                          <a:solidFill>
+                            <a:srgbClr val="333333"/>
+                          </a:solidFill>
+                          <a:latin typeface="Calibri"/>
+                        </a:rPr>
+                        <a:t>21</a:t>
+                      </a:r>
+                    </a:p>
+                  </a:txBody>
+                  <a:tcPr marL="73152" marR="73152" marT="36576" marB="36576">
+                    <a:solidFill>
+                      <a:srgbClr val="FFFFFF"/>
+                    </a:solidFill>
+                  </a:tcPr>
+                </a:tc>
+              </a:tr>
+              <a:tr h="213360">
+                <a:tc>
+                  <a:txBody>
+                    <a:bodyPr wrap="square"/>
+                    <a:lstStyle/>
+                    <a:p>
+                      <a:pPr algn="l"/>
+                      <a:r>
+                        <a:rPr sz="900" b="0">
+                          <a:solidFill>
+                            <a:srgbClr val="333333"/>
+                          </a:solidFill>
+                          <a:latin typeface="Calibri"/>
+                        </a:rPr>
+                        <a:t>Gateway vCPU</a:t>
+                      </a:r>
+                    </a:p>
+                  </a:txBody>
+                  <a:tcPr marL="73152" marR="73152" marT="36576" marB="36576">
+                    <a:solidFill>
+                      <a:srgbClr val="F2F2F2"/>
+                    </a:solidFill>
+                  </a:tcPr>
+                </a:tc>
+                <a:tc>
+                  <a:txBody>
+                    <a:bodyPr wrap="square"/>
+                    <a:lstStyle/>
+                    <a:p>
+                      <a:pPr algn="l"/>
+                      <a:r>
+                        <a:rPr sz="900" b="0">
+                          <a:solidFill>
+                            <a:srgbClr val="333333"/>
+                          </a:solidFill>
+                          <a:latin typeface="Calibri"/>
+                        </a:rPr>
+                        <a:t>2</a:t>
+                      </a:r>
+                    </a:p>
+                  </a:txBody>
+                  <a:tcPr marL="73152" marR="73152" marT="36576" marB="36576">
+                    <a:solidFill>
+                      <a:srgbClr val="F2F2F2"/>
+                    </a:solidFill>
+                  </a:tcPr>
+                </a:tc>
+                <a:tc>
+                  <a:txBody>
+                    <a:bodyPr wrap="square"/>
+                    <a:lstStyle/>
+                    <a:p>
+                      <a:pPr algn="l"/>
+                      <a:r>
+                        <a:rPr sz="900" b="0">
+                          <a:solidFill>
+                            <a:srgbClr val="333333"/>
+                          </a:solidFill>
+                          <a:latin typeface="Calibri"/>
+                        </a:rPr>
+                        <a:t>32</a:t>
+                      </a:r>
+                    </a:p>
+                  </a:txBody>
+                  <a:tcPr marL="73152" marR="73152" marT="36576" marB="36576">
+                    <a:solidFill>
+                      <a:srgbClr val="F2F2F2"/>
+                    </a:solidFill>
+                  </a:tcPr>
+                </a:tc>
+                <a:tc>
+                  <a:txBody>
+                    <a:bodyPr wrap="square"/>
+                    <a:lstStyle/>
+                    <a:p>
+                      <a:pPr algn="l"/>
+                      <a:r>
+                        <a:rPr sz="900" b="0">
+                          <a:solidFill>
+                            <a:srgbClr val="333333"/>
+                          </a:solidFill>
+                          <a:latin typeface="Calibri"/>
+                        </a:rPr>
+                        <a:t>8</a:t>
+                      </a:r>
+                    </a:p>
+                  </a:txBody>
+                  <a:tcPr marL="73152" marR="73152" marT="36576" marB="36576">
+                    <a:solidFill>
+                      <a:srgbClr val="F2F2F2"/>
+                    </a:solidFill>
+                  </a:tcPr>
+                </a:tc>
+                <a:tc>
+                  <a:txBody>
+                    <a:bodyPr wrap="square"/>
+                    <a:lstStyle/>
+                    <a:p>
+                      <a:pPr algn="l"/>
+                      <a:r>
+                        <a:rPr sz="900" b="0">
+                          <a:solidFill>
+                            <a:srgbClr val="333333"/>
+                          </a:solidFill>
+                          <a:latin typeface="Calibri"/>
+                        </a:rPr>
+                        <a:t>32</a:t>
+                      </a:r>
+                    </a:p>
+                  </a:txBody>
+                  <a:tcPr marL="73152" marR="73152" marT="36576" marB="36576">
+                    <a:solidFill>
+                      <a:srgbClr val="F2F2F2"/>
+                    </a:solidFill>
+                  </a:tcPr>
+                </a:tc>
+                <a:tc>
+                  <a:txBody>
+                    <a:bodyPr wrap="square"/>
+                    <a:lstStyle/>
+                    <a:p>
+                      <a:pPr algn="l"/>
+                      <a:r>
+                        <a:rPr sz="900" b="0">
+                          <a:solidFill>
+                            <a:srgbClr val="333333"/>
+                          </a:solidFill>
+                          <a:latin typeface="Calibri"/>
+                        </a:rPr>
+                        <a:t>74</a:t>
+                      </a:r>
+                    </a:p>
+                  </a:txBody>
+                  <a:tcPr marL="73152" marR="73152" marT="36576" marB="36576">
+                    <a:solidFill>
+                      <a:srgbClr val="F2F2F2"/>
+                    </a:solidFill>
+                  </a:tcPr>
+                </a:tc>
+              </a:tr>
+              <a:tr h="213360">
+                <a:tc>
+                  <a:txBody>
+                    <a:bodyPr wrap="square"/>
+                    <a:lstStyle/>
+                    <a:p>
+                      <a:pPr algn="l"/>
+                      <a:r>
+                        <a:rPr sz="900" b="0">
+                          <a:solidFill>
+                            <a:srgbClr val="333333"/>
+                          </a:solidFill>
+                          <a:latin typeface="Calibri"/>
+                        </a:rPr>
+                        <a:t>Gateway RAM (GB)</a:t>
+                      </a:r>
+                    </a:p>
+                  </a:txBody>
+                  <a:tcPr marL="73152" marR="73152" marT="36576" marB="36576">
+                    <a:solidFill>
+                      <a:srgbClr val="FFFFFF"/>
+                    </a:solidFill>
+                  </a:tcPr>
+                </a:tc>
+                <a:tc>
+                  <a:txBody>
+                    <a:bodyPr wrap="square"/>
+                    <a:lstStyle/>
+                    <a:p>
+                      <a:pPr algn="l"/>
+                      <a:r>
+                        <a:rPr sz="900" b="0">
+                          <a:solidFill>
+                            <a:srgbClr val="333333"/>
+                          </a:solidFill>
+                          <a:latin typeface="Calibri"/>
+                        </a:rPr>
+                        <a:t>2</a:t>
+                      </a:r>
+                    </a:p>
+                  </a:txBody>
+                  <a:tcPr marL="73152" marR="73152" marT="36576" marB="36576">
+                    <a:solidFill>
+                      <a:srgbClr val="FFFFFF"/>
+                    </a:solidFill>
+                  </a:tcPr>
+                </a:tc>
+                <a:tc>
+                  <a:txBody>
+                    <a:bodyPr wrap="square"/>
+                    <a:lstStyle/>
+                    <a:p>
+                      <a:pPr algn="l"/>
+                      <a:r>
+                        <a:rPr sz="900" b="0">
+                          <a:solidFill>
+                            <a:srgbClr val="333333"/>
+                          </a:solidFill>
+                          <a:latin typeface="Calibri"/>
+                        </a:rPr>
+                        <a:t>64</a:t>
+                      </a:r>
+                    </a:p>
+                  </a:txBody>
+                  <a:tcPr marL="73152" marR="73152" marT="36576" marB="36576">
+                    <a:solidFill>
+                      <a:srgbClr val="FFFFFF"/>
+                    </a:solidFill>
+                  </a:tcPr>
+                </a:tc>
+                <a:tc>
+                  <a:txBody>
+                    <a:bodyPr wrap="square"/>
+                    <a:lstStyle/>
+                    <a:p>
+                      <a:pPr algn="l"/>
+                      <a:r>
+                        <a:rPr sz="900" b="0">
+                          <a:solidFill>
+                            <a:srgbClr val="333333"/>
+                          </a:solidFill>
+                          <a:latin typeface="Calibri"/>
+                        </a:rPr>
+                        <a:t>16</a:t>
+                      </a:r>
+                    </a:p>
+                  </a:txBody>
+                  <a:tcPr marL="73152" marR="73152" marT="36576" marB="36576">
+                    <a:solidFill>
+                      <a:srgbClr val="FFFFFF"/>
+                    </a:solidFill>
+                  </a:tcPr>
+                </a:tc>
+                <a:tc>
+                  <a:txBody>
+                    <a:bodyPr wrap="square"/>
+                    <a:lstStyle/>
+                    <a:p>
+                      <a:pPr algn="l"/>
+                      <a:r>
+                        <a:rPr sz="900" b="0">
+                          <a:solidFill>
+                            <a:srgbClr val="333333"/>
+                          </a:solidFill>
+                          <a:latin typeface="Calibri"/>
+                        </a:rPr>
+                        <a:t>64</a:t>
+                      </a:r>
+                    </a:p>
+                  </a:txBody>
+                  <a:tcPr marL="73152" marR="73152" marT="36576" marB="36576">
+                    <a:solidFill>
+                      <a:srgbClr val="FFFFFF"/>
+                    </a:solidFill>
+                  </a:tcPr>
+                </a:tc>
+                <a:tc>
+                  <a:txBody>
+                    <a:bodyPr wrap="square"/>
+                    <a:lstStyle/>
+                    <a:p>
+                      <a:pPr algn="l"/>
+                      <a:r>
+                        <a:rPr sz="900" b="0">
+                          <a:solidFill>
+                            <a:srgbClr val="333333"/>
+                          </a:solidFill>
+                          <a:latin typeface="Calibri"/>
+                        </a:rPr>
+                        <a:t>146</a:t>
+                      </a:r>
+                    </a:p>
+                  </a:txBody>
+                  <a:tcPr marL="73152" marR="73152" marT="36576" marB="36576">
+                    <a:solidFill>
+                      <a:srgbClr val="FFFFFF"/>
+                    </a:solidFill>
+                  </a:tcPr>
+                </a:tc>
+              </a:tr>
+              <a:tr h="213360">
+                <a:tc>
+                  <a:txBody>
+                    <a:bodyPr wrap="square"/>
+                    <a:lstStyle/>
+                    <a:p>
+                      <a:pPr algn="l"/>
+                      <a:r>
+                        <a:rPr sz="900" b="0">
+                          <a:solidFill>
+                            <a:srgbClr val="333333"/>
+                          </a:solidFill>
+                          <a:latin typeface="Calibri"/>
+                        </a:rPr>
+                        <a:t>Redis nodes</a:t>
+                      </a:r>
+                    </a:p>
+                  </a:txBody>
+                  <a:tcPr marL="73152" marR="73152" marT="36576" marB="36576">
+                    <a:solidFill>
+                      <a:srgbClr val="F2F2F2"/>
+                    </a:solidFill>
+                  </a:tcPr>
+                </a:tc>
+                <a:tc>
+                  <a:txBody>
+                    <a:bodyPr wrap="square"/>
+                    <a:lstStyle/>
+                    <a:p>
+                      <a:pPr algn="l"/>
+                      <a:r>
+                        <a:rPr sz="900" b="0">
+                          <a:solidFill>
+                            <a:srgbClr val="333333"/>
+                          </a:solidFill>
+                          <a:latin typeface="Calibri"/>
+                        </a:rPr>
+                        <a:t>1</a:t>
+                      </a:r>
+                    </a:p>
+                  </a:txBody>
+                  <a:tcPr marL="73152" marR="73152" marT="36576" marB="36576">
+                    <a:solidFill>
+                      <a:srgbClr val="F2F2F2"/>
+                    </a:solidFill>
+                  </a:tcPr>
+                </a:tc>
+                <a:tc>
+                  <a:txBody>
+                    <a:bodyPr wrap="square"/>
+                    <a:lstStyle/>
+                    <a:p>
+                      <a:pPr algn="l"/>
+                      <a:r>
+                        <a:rPr sz="900" b="0">
+                          <a:solidFill>
+                            <a:srgbClr val="333333"/>
+                          </a:solidFill>
+                          <a:latin typeface="Calibri"/>
+                        </a:rPr>
+                        <a:t>6</a:t>
+                      </a:r>
+                    </a:p>
+                  </a:txBody>
+                  <a:tcPr marL="73152" marR="73152" marT="36576" marB="36576">
+                    <a:solidFill>
+                      <a:srgbClr val="F2F2F2"/>
+                    </a:solidFill>
+                  </a:tcPr>
+                </a:tc>
+                <a:tc>
+                  <a:txBody>
+                    <a:bodyPr wrap="square"/>
+                    <a:lstStyle/>
+                    <a:p>
+                      <a:pPr algn="l"/>
+                      <a:r>
+                        <a:rPr sz="900" b="0">
+                          <a:solidFill>
+                            <a:srgbClr val="333333"/>
+                          </a:solidFill>
+                          <a:latin typeface="Calibri"/>
+                        </a:rPr>
+                        <a:t>3</a:t>
+                      </a:r>
+                    </a:p>
+                  </a:txBody>
+                  <a:tcPr marL="73152" marR="73152" marT="36576" marB="36576">
+                    <a:solidFill>
+                      <a:srgbClr val="F2F2F2"/>
+                    </a:solidFill>
+                  </a:tcPr>
+                </a:tc>
+                <a:tc>
+                  <a:txBody>
+                    <a:bodyPr wrap="square"/>
+                    <a:lstStyle/>
+                    <a:p>
+                      <a:pPr algn="l"/>
+                      <a:r>
+                        <a:rPr sz="900" b="0">
+                          <a:solidFill>
+                            <a:srgbClr val="333333"/>
+                          </a:solidFill>
+                          <a:latin typeface="Calibri"/>
+                        </a:rPr>
+                        <a:t>6</a:t>
+                      </a:r>
+                    </a:p>
+                  </a:txBody>
+                  <a:tcPr marL="73152" marR="73152" marT="36576" marB="36576">
+                    <a:solidFill>
+                      <a:srgbClr val="F2F2F2"/>
+                    </a:solidFill>
+                  </a:tcPr>
+                </a:tc>
+                <a:tc>
+                  <a:txBody>
+                    <a:bodyPr wrap="square"/>
+                    <a:lstStyle/>
+                    <a:p>
+                      <a:pPr algn="l"/>
+                      <a:r>
+                        <a:rPr sz="900" b="0">
+                          <a:solidFill>
+                            <a:srgbClr val="333333"/>
+                          </a:solidFill>
+                          <a:latin typeface="Calibri"/>
+                        </a:rPr>
+                        <a:t>16</a:t>
+                      </a:r>
+                    </a:p>
+                  </a:txBody>
+                  <a:tcPr marL="73152" marR="73152" marT="36576" marB="36576">
+                    <a:solidFill>
+                      <a:srgbClr val="F2F2F2"/>
+                    </a:solidFill>
+                  </a:tcPr>
+                </a:tc>
+              </a:tr>
+              <a:tr h="213360">
+                <a:tc>
+                  <a:txBody>
+                    <a:bodyPr wrap="square"/>
+                    <a:lstStyle/>
+                    <a:p>
+                      <a:pPr algn="l"/>
+                      <a:r>
+                        <a:rPr sz="900" b="0">
+                          <a:solidFill>
+                            <a:srgbClr val="333333"/>
+                          </a:solidFill>
+                          <a:latin typeface="Calibri"/>
+                        </a:rPr>
+                        <a:t>TOTAL compute (vCPU + GB)</a:t>
+                      </a:r>
+                    </a:p>
+                  </a:txBody>
+                  <a:tcPr marL="73152" marR="73152" marT="36576" marB="36576">
+                    <a:solidFill>
+                      <a:srgbClr val="FFFFFF"/>
+                    </a:solidFill>
+                  </a:tcPr>
+                </a:tc>
+                <a:tc>
+                  <a:txBody>
+                    <a:bodyPr wrap="square"/>
+                    <a:lstStyle/>
+                    <a:p>
+                      <a:pPr algn="l"/>
+                      <a:r>
+                        <a:rPr sz="900" b="0">
+                          <a:solidFill>
+                            <a:srgbClr val="333333"/>
+                          </a:solidFill>
+                          <a:latin typeface="Calibri"/>
+                        </a:rPr>
+                        <a:t>4 + 4</a:t>
+                      </a:r>
+                    </a:p>
+                  </a:txBody>
+                  <a:tcPr marL="73152" marR="73152" marT="36576" marB="36576">
+                    <a:solidFill>
+                      <a:srgbClr val="FFFFFF"/>
+                    </a:solidFill>
+                  </a:tcPr>
+                </a:tc>
+                <a:tc>
+                  <a:txBody>
+                    <a:bodyPr wrap="square"/>
+                    <a:lstStyle/>
+                    <a:p>
+                      <a:pPr algn="l"/>
+                      <a:r>
+                        <a:rPr sz="900" b="0">
+                          <a:solidFill>
+                            <a:srgbClr val="333333"/>
+                          </a:solidFill>
+                          <a:latin typeface="Calibri"/>
+                        </a:rPr>
+                        <a:t>44 + 76</a:t>
+                      </a:r>
+                    </a:p>
+                  </a:txBody>
+                  <a:tcPr marL="73152" marR="73152" marT="36576" marB="36576">
+                    <a:solidFill>
+                      <a:srgbClr val="FFFFFF"/>
+                    </a:solidFill>
+                  </a:tcPr>
+                </a:tc>
+                <a:tc>
+                  <a:txBody>
+                    <a:bodyPr wrap="square"/>
+                    <a:lstStyle/>
+                    <a:p>
+                      <a:pPr algn="l"/>
+                      <a:r>
+                        <a:rPr sz="900" b="0">
+                          <a:solidFill>
+                            <a:srgbClr val="333333"/>
+                          </a:solidFill>
+                          <a:latin typeface="Calibri"/>
+                        </a:rPr>
+                        <a:t>14 + 22</a:t>
+                      </a:r>
+                    </a:p>
+                  </a:txBody>
+                  <a:tcPr marL="73152" marR="73152" marT="36576" marB="36576">
+                    <a:solidFill>
+                      <a:srgbClr val="FFFFFF"/>
+                    </a:solidFill>
+                  </a:tcPr>
+                </a:tc>
+                <a:tc>
+                  <a:txBody>
+                    <a:bodyPr wrap="square"/>
+                    <a:lstStyle/>
+                    <a:p>
+                      <a:pPr algn="l"/>
+                      <a:r>
+                        <a:rPr sz="900" b="0">
+                          <a:solidFill>
+                            <a:srgbClr val="333333"/>
+                          </a:solidFill>
+                          <a:latin typeface="Calibri"/>
+                        </a:rPr>
+                        <a:t>44 + 76</a:t>
+                      </a:r>
+                    </a:p>
+                  </a:txBody>
+                  <a:tcPr marL="73152" marR="73152" marT="36576" marB="36576">
+                    <a:solidFill>
+                      <a:srgbClr val="FFFFFF"/>
+                    </a:solidFill>
+                  </a:tcPr>
+                </a:tc>
+                <a:tc>
+                  <a:txBody>
+                    <a:bodyPr wrap="square"/>
+                    <a:lstStyle/>
+                    <a:p>
+                      <a:pPr algn="l"/>
+                      <a:r>
+                        <a:rPr sz="900" b="0">
+                          <a:solidFill>
+                            <a:srgbClr val="333333"/>
+                          </a:solidFill>
+                          <a:latin typeface="Calibri"/>
+                        </a:rPr>
+                        <a:t>~106 vCPU + ~178 GB</a:t>
+                      </a:r>
+                    </a:p>
+                  </a:txBody>
+                  <a:tcPr marL="73152" marR="73152" marT="36576" marB="36576">
+                    <a:solidFill>
+                      <a:srgbClr val="FFFFFF"/>
+                    </a:solidFill>
+                  </a:tcPr>
+                </a:tc>
+              </a:tr>
+            </a:tbl>
+          </a:graphicData>
+        </a:graphic>
+      </p:graphicFrame>
+      <p:sp>
+        <p:nvSpPr>
+          <p:cNvPr id="9" name="Rectangle 8"/>
+          <p:cNvSpPr/>
+          <p:nvPr/>
+        </p:nvSpPr>
+        <p:spPr>
+          <a:xfrm>
+            <a:off x="8138160" y="4800600"/>
+            <a:ext cx="3749039" cy="1691640"/>
+          </a:xfrm>
+          <a:prstGeom prst="rect">
+            <a:avLst/>
+          </a:prstGeom>
+          <a:solidFill>
+            <a:srgbClr val="F2F2F2"/>
+          </a:solidFill>
+          <a:ln>
+            <a:noFill/>
+          </a:ln>
+        </p:spPr>
+        <p:style>
+          <a:lnRef idx="1">
+            <a:schemeClr val="accent1"/>
+          </a:lnRef>
+          <a:fillRef idx="3">
+            <a:schemeClr val="accent1"/>
+          </a:fillRef>
+          <a:effectRef idx="2">
+            <a:schemeClr val="accent1"/>
+          </a:effectRef>
+          <a:fontRef idx="minor">
+            <a:schemeClr val="lt1"/>
+          </a:fontRef>
+        </p:style>
+        <p:txBody>
+          <a:bodyPr rtlCol="0" anchor="ctr"/>
+          <a:lstStyle/>
+          <a:p>
+            <a:pPr algn="ctr"/>
+          </a:p>
+        </p:txBody>
+      </p:sp>
+      <p:sp>
+        <p:nvSpPr>
+          <p:cNvPr id="10" name="TextBox 9"/>
+          <p:cNvSpPr txBox="1"/>
+          <p:nvPr/>
+        </p:nvSpPr>
+        <p:spPr>
+          <a:xfrm>
+            <a:off x="8275320" y="4864608"/>
+            <a:ext cx="3657600" cy="320040"/>
+          </a:xfrm>
+          <a:prstGeom prst="rect">
+            <a:avLst/>
+          </a:prstGeom>
+          <a:noFill/>
+        </p:spPr>
+        <p:txBody>
+          <a:bodyPr wrap="square" lIns="45720" rIns="45720" tIns="18288" bIns="18288" anchor="t">
+            <a:spAutoFit/>
+          </a:bodyPr>
+          <a:lstStyle/>
+          <a:p>
+            <a:pPr algn="l"/>
+            <a:r>
+              <a:rPr sz="1300" b="1">
+                <a:solidFill>
+                  <a:srgbClr val="1F4E79"/>
+                </a:solidFill>
+                <a:latin typeface="Calibri"/>
+              </a:rPr>
+              <a:t>Alternative worth considering</a:t>
+            </a:r>
+          </a:p>
+        </p:txBody>
+      </p:sp>
+      <p:sp>
+        <p:nvSpPr>
+          <p:cNvPr id="11" name="TextBox 10"/>
+          <p:cNvSpPr txBox="1"/>
+          <p:nvPr/>
+        </p:nvSpPr>
+        <p:spPr>
+          <a:xfrm>
+            <a:off x="8275320" y="5193792"/>
+            <a:ext cx="3657600" cy="1234440"/>
+          </a:xfrm>
+          <a:prstGeom prst="rect">
+            <a:avLst/>
+          </a:prstGeom>
+          <a:noFill/>
+        </p:spPr>
+        <p:txBody>
+          <a:bodyPr wrap="square" lIns="45720" rIns="45720" tIns="18288" bIns="18288" anchor="t">
+            <a:spAutoFit/>
+          </a:bodyPr>
+          <a:lstStyle/>
+          <a:p>
+            <a:pPr algn="l"/>
+            <a:r>
+              <a:rPr sz="1000" b="0">
+                <a:solidFill>
+                  <a:srgbClr val="333333"/>
+                </a:solidFill>
+                <a:latin typeface="Calibri"/>
+              </a:rPr>
+              <a:t>Ephemeral QA — spin up Prod-sized QA only during scheduled load-test windows (e.g. 2 days per release), tear down after.</a:t>
+            </a:r>
+          </a:p>
+          <a:p>
+            <a:pPr algn="l"/>
+            <a:r>
+              <a:rPr sz="1000" b="0">
+                <a:solidFill>
+                  <a:srgbClr val="333333"/>
+                </a:solidFill>
+                <a:latin typeface="Calibri"/>
+              </a:rPr>
+              <a:t>Saves ~80% of QA compute cost in exchange for IaC / automation maturity.</a:t>
+            </a:r>
+          </a:p>
+          <a:p>
+            <a:pPr algn="l"/>
+            <a:r>
+              <a:rPr sz="1000" b="0">
+                <a:solidFill>
+                  <a:srgbClr val="333333"/>
+                </a:solidFill>
+                <a:latin typeface="Calibri"/>
+              </a:rPr>
+              <a:t>Especially attractive on K8s (kubectl scale --replicas=0) or with Terraform-driven VMs.</a:t>
+            </a:r>
+          </a:p>
+        </p:txBody>
+      </p:sp>
+      <p:sp>
+        <p:nvSpPr>
+          <p:cNvPr id="12" name="Rectangle 11"/>
           <p:cNvSpPr/>
           <p:nvPr/>
         </p:nvSpPr>
@@ -10748,7 +13229,7 @@
       </p:sp>
       <p:sp>
         <p:nvSpPr>
-          <p:cNvPr id="7" name="TextBox 6"/>
+          <p:cNvPr id="13" name="TextBox 12"/>
           <p:cNvSpPr txBox="1"/>
           <p:nvPr/>
         </p:nvSpPr>
@@ -10783,7 +13264,7 @@
       </p:sp>
       <p:sp>
         <p:nvSpPr>
-          <p:cNvPr id="8" name="TextBox 7"/>
+          <p:cNvPr id="14" name="TextBox 13"/>
           <p:cNvSpPr txBox="1"/>
           <p:nvPr/>
         </p:nvSpPr>
@@ -10811,7 +13292,7 @@
                 </a:solidFill>
                 <a:latin typeface="Calibri"/>
               </a:rPr>
-              <a:t>7 / 10</a:t>
+              <a:t>7 / 11</a:t>
             </a:r>
           </a:p>
         </p:txBody>
@@ -10907,7 +13388,7 @@
                 </a:solidFill>
                 <a:latin typeface="Calibri"/>
               </a:rPr>
-              <a:t>Disaster recovery — posture options</a:t>
+              <a:t>Components to provision (on-prem)</a:t>
             </a:r>
           </a:p>
         </p:txBody>
@@ -10942,7 +13423,7 @@
                 </a:solidFill>
                 <a:latin typeface="Calibri"/>
               </a:rPr>
-              <a:t>Pick the RTO/RPO point that matches your business continuity requirement and budget</a:t>
+              <a:t>What your network, PKI, and platform teams need to deliver before first install</a:t>
             </a:r>
           </a:p>
         </p:txBody>
@@ -10957,7 +13438,7 @@
         </p:nvGraphicFramePr>
         <p:xfrm>
           <a:off x="274320" y="1417320"/>
-          <a:ext cx="11612880" cy="2194560"/>
+          <a:ext cx="11612880" cy="4983480"/>
         </p:xfrm>
         <a:graphic>
           <a:graphicData uri="http://schemas.openxmlformats.org/drawingml/2006/table">
@@ -10966,13 +13447,11 @@
                 <a:tableStyleId>{5C22544A-7EE6-4342-B048-85BDC9FD1C3A}</a:tableStyleId>
               </a:tblPr>
               <a:tblGrid>
-                <a:gridCol w="2743200"/>
-                <a:gridCol w="4114800"/>
-                <a:gridCol w="1280160"/>
-                <a:gridCol w="2194560"/>
-                <a:gridCol w="1280160"/>
+                <a:gridCol w="4846320"/>
+                <a:gridCol w="2286000"/>
+                <a:gridCol w="4480560"/>
               </a:tblGrid>
-              <a:tr h="438912">
+              <a:tr h="332232">
                 <a:tc>
                   <a:txBody>
                     <a:bodyPr wrap="square"/>
@@ -10986,7 +13465,7 @@
                           </a:solidFill>
                           <a:latin typeface="Calibri"/>
                         </a:rPr>
-                        <a:t>Posture</a:t>
+                        <a:t>Component</a:t>
                       </a:r>
                     </a:p>
                   </a:txBody>
@@ -11009,7 +13488,7 @@
                           </a:solidFill>
                           <a:latin typeface="Calibri"/>
                         </a:rPr>
-                        <a:t>Description</a:t>
+                        <a:t>Owner</a:t>
                       </a:r>
                     </a:p>
                   </a:txBody>
@@ -11032,7 +13511,7 @@
                           </a:solidFill>
                           <a:latin typeface="Calibri"/>
                         </a:rPr>
-                        <a:t>RTO</a:t>
+                        <a:t>Purpose</a:t>
                       </a:r>
                     </a:p>
                   </a:txBody>
@@ -11042,68 +13521,22 @@
                     </a:solidFill>
                   </a:tcPr>
                 </a:tc>
-                <a:tc>
-                  <a:txBody>
-                    <a:bodyPr wrap="square"/>
-                    <a:lstStyle/>
-                    <a:p>
-                      <a:pPr algn="l"/>
-                      <a:r>
-                        <a:rPr sz="1200" b="1">
-                          <a:solidFill>
-                            <a:srgbClr val="FFFFFF"/>
-                          </a:solidFill>
-                          <a:latin typeface="Calibri"/>
-                        </a:rPr>
-                        <a:t>RPO</a:t>
-                      </a:r>
-                    </a:p>
-                  </a:txBody>
-                  <a:tcPr marL="73152" marR="73152" marT="36576" marB="36576">
-                    <a:solidFill>
-                      <a:srgbClr val="1F4E79"/>
-                    </a:solidFill>
-                  </a:tcPr>
-                </a:tc>
-                <a:tc>
-                  <a:txBody>
-                    <a:bodyPr wrap="square"/>
-                    <a:lstStyle/>
-                    <a:p>
-                      <a:pPr algn="l"/>
-                      <a:r>
-                        <a:rPr sz="1200" b="1">
-                          <a:solidFill>
-                            <a:srgbClr val="FFFFFF"/>
-                          </a:solidFill>
-                          <a:latin typeface="Calibri"/>
-                        </a:rPr>
-                        <a:t>Cost (vs single DC)</a:t>
-                      </a:r>
-                    </a:p>
-                  </a:txBody>
-                  <a:tcPr marL="73152" marR="73152" marT="36576" marB="36576">
-                    <a:solidFill>
-                      <a:srgbClr val="1F4E79"/>
-                    </a:solidFill>
-                  </a:tcPr>
-                </a:tc>
               </a:tr>
-              <a:tr h="438912">
-                <a:tc>
-                  <a:txBody>
-                    <a:bodyPr wrap="square"/>
-                    <a:lstStyle/>
-                    <a:p>
-                      <a:pPr algn="l"/>
-                      <a:r>
-                        <a:rPr sz="1100" b="0">
-                          <a:solidFill>
-                            <a:srgbClr val="333333"/>
-                          </a:solidFill>
-                          <a:latin typeface="Calibri"/>
-                        </a:rPr>
-                        <a:t>A. Cold standby</a:t>
+              <a:tr h="332232">
+                <a:tc>
+                  <a:txBody>
+                    <a:bodyPr wrap="square"/>
+                    <a:lstStyle/>
+                    <a:p>
+                      <a:pPr algn="l"/>
+                      <a:r>
+                        <a:rPr sz="1000" b="0">
+                          <a:solidFill>
+                            <a:srgbClr val="333333"/>
+                          </a:solidFill>
+                          <a:latin typeface="Calibri"/>
+                        </a:rPr>
+                        <a:t>F5 BIG-IP DNS (GSLB) with cross-DC health checks, 30s TTL</a:t>
                       </a:r>
                     </a:p>
                   </a:txBody>
@@ -11120,13 +13553,13 @@
                     <a:p>
                       <a:pPr algn="l"/>
                       <a:r>
-                        <a:rPr sz="1100" b="0">
-                          <a:solidFill>
-                            <a:srgbClr val="333333"/>
-                          </a:solidFill>
-                          <a:latin typeface="Calibri"/>
-                        </a:rPr>
-                        <a:t>DR site provisioned but stopped; manual power-on + DNS flip on failure</a:t>
+                        <a:rPr sz="1000" b="0">
+                          <a:solidFill>
+                            <a:srgbClr val="333333"/>
+                          </a:solidFill>
+                          <a:latin typeface="Calibri"/>
+                        </a:rPr>
+                        <a:t>Network team</a:t>
                       </a:r>
                     </a:p>
                   </a:txBody>
@@ -11143,13 +13576,13 @@
                     <a:p>
                       <a:pPr algn="l"/>
                       <a:r>
-                        <a:rPr sz="1100" b="0">
-                          <a:solidFill>
-                            <a:srgbClr val="333333"/>
-                          </a:solidFill>
-                          <a:latin typeface="Calibri"/>
-                        </a:rPr>
-                        <a:t>30–60 min</a:t>
+                        <a:rPr sz="1000" b="0">
+                          <a:solidFill>
+                            <a:srgbClr val="333333"/>
+                          </a:solidFill>
+                          <a:latin typeface="Calibri"/>
+                        </a:rPr>
+                        <a:t>Cross-DC failover and traffic distribution</a:t>
                       </a:r>
                     </a:p>
                   </a:txBody>
@@ -11159,20 +13592,93 @@
                     </a:solidFill>
                   </a:tcPr>
                 </a:tc>
-                <a:tc>
-                  <a:txBody>
-                    <a:bodyPr wrap="square"/>
-                    <a:lstStyle/>
-                    <a:p>
-                      <a:pPr algn="l"/>
-                      <a:r>
-                        <a:rPr sz="1100" b="0">
-                          <a:solidFill>
-                            <a:srgbClr val="333333"/>
-                          </a:solidFill>
-                          <a:latin typeface="Calibri"/>
-                        </a:rPr>
-                        <a:t>Zero for config (declarative)</a:t>
+              </a:tr>
+              <a:tr h="332232">
+                <a:tc>
+                  <a:txBody>
+                    <a:bodyPr wrap="square"/>
+                    <a:lstStyle/>
+                    <a:p>
+                      <a:pPr algn="l"/>
+                      <a:r>
+                        <a:rPr sz="1000" b="0">
+                          <a:solidFill>
+                            <a:srgbClr val="333333"/>
+                          </a:solidFill>
+                          <a:latin typeface="Calibri"/>
+                        </a:rPr>
+                        <a:t>F5 BIG-IP LTM per DC (HA pair, active/passive)</a:t>
+                      </a:r>
+                    </a:p>
+                  </a:txBody>
+                  <a:tcPr marL="73152" marR="73152" marT="36576" marB="36576">
+                    <a:solidFill>
+                      <a:srgbClr val="F2F2F2"/>
+                    </a:solidFill>
+                  </a:tcPr>
+                </a:tc>
+                <a:tc>
+                  <a:txBody>
+                    <a:bodyPr wrap="square"/>
+                    <a:lstStyle/>
+                    <a:p>
+                      <a:pPr algn="l"/>
+                      <a:r>
+                        <a:rPr sz="1000" b="0">
+                          <a:solidFill>
+                            <a:srgbClr val="333333"/>
+                          </a:solidFill>
+                          <a:latin typeface="Calibri"/>
+                        </a:rPr>
+                        <a:t>Network team</a:t>
+                      </a:r>
+                    </a:p>
+                  </a:txBody>
+                  <a:tcPr marL="73152" marR="73152" marT="36576" marB="36576">
+                    <a:solidFill>
+                      <a:srgbClr val="F2F2F2"/>
+                    </a:solidFill>
+                  </a:tcPr>
+                </a:tc>
+                <a:tc>
+                  <a:txBody>
+                    <a:bodyPr wrap="square"/>
+                    <a:lstStyle/>
+                    <a:p>
+                      <a:pPr algn="l"/>
+                      <a:r>
+                        <a:rPr sz="1000" b="0">
+                          <a:solidFill>
+                            <a:srgbClr val="333333"/>
+                          </a:solidFill>
+                          <a:latin typeface="Calibri"/>
+                        </a:rPr>
+                        <a:t>Per-DC L7 load balancing across Flex Gateway replicas</a:t>
+                      </a:r>
+                    </a:p>
+                  </a:txBody>
+                  <a:tcPr marL="73152" marR="73152" marT="36576" marB="36576">
+                    <a:solidFill>
+                      <a:srgbClr val="F2F2F2"/>
+                    </a:solidFill>
+                  </a:tcPr>
+                </a:tc>
+              </a:tr>
+              <a:tr h="332232">
+                <a:tc>
+                  <a:txBody>
+                    <a:bodyPr wrap="square"/>
+                    <a:lstStyle/>
+                    <a:p>
+                      <a:pPr algn="l"/>
+                      <a:r>
+                        <a:rPr sz="1000" b="0">
+                          <a:solidFill>
+                            <a:srgbClr val="333333"/>
+                          </a:solidFill>
+                          <a:latin typeface="Calibri"/>
+                        </a:rPr>
+                        <a:t>VMs or K8s nodes per DC, sized per slide 6</a:t>
                       </a:r>
                     </a:p>
                   </a:txBody>
@@ -11189,13 +13695,13 @@
                     <a:p>
                       <a:pPr algn="l"/>
                       <a:r>
-                        <a:rPr sz="1100" b="0">
-                          <a:solidFill>
-                            <a:srgbClr val="333333"/>
-                          </a:solidFill>
-                          <a:latin typeface="Calibri"/>
-                        </a:rPr>
-                        <a:t>1.1×</a:t>
+                        <a:rPr sz="1000" b="0">
+                          <a:solidFill>
+                            <a:srgbClr val="333333"/>
+                          </a:solidFill>
+                          <a:latin typeface="Calibri"/>
+                        </a:rPr>
+                        <a:t>Platform team</a:t>
                       </a:r>
                     </a:p>
                   </a:txBody>
@@ -11205,22 +13711,45 @@
                     </a:solidFill>
                   </a:tcPr>
                 </a:tc>
+                <a:tc>
+                  <a:txBody>
+                    <a:bodyPr wrap="square"/>
+                    <a:lstStyle/>
+                    <a:p>
+                      <a:pPr algn="l"/>
+                      <a:r>
+                        <a:rPr sz="1000" b="0">
+                          <a:solidFill>
+                            <a:srgbClr val="333333"/>
+                          </a:solidFill>
+                          <a:latin typeface="Calibri"/>
+                        </a:rPr>
+                        <a:t>Flex Gateway runtime hosts</a:t>
+                      </a:r>
+                    </a:p>
+                  </a:txBody>
+                  <a:tcPr marL="73152" marR="73152" marT="36576" marB="36576">
+                    <a:solidFill>
+                      <a:srgbClr val="FFFFFF"/>
+                    </a:solidFill>
+                  </a:tcPr>
+                </a:tc>
               </a:tr>
-              <a:tr h="438912">
-                <a:tc>
-                  <a:txBody>
-                    <a:bodyPr wrap="square"/>
-                    <a:lstStyle/>
-                    <a:p>
-                      <a:pPr algn="l"/>
-                      <a:r>
-                        <a:rPr sz="1100" b="0">
-                          <a:solidFill>
-                            <a:srgbClr val="333333"/>
-                          </a:solidFill>
-                          <a:latin typeface="Calibri"/>
-                        </a:rPr>
-                        <a:t>B. Warm standby (active/passive)</a:t>
+              <a:tr h="332232">
+                <a:tc>
+                  <a:txBody>
+                    <a:bodyPr wrap="square"/>
+                    <a:lstStyle/>
+                    <a:p>
+                      <a:pPr algn="l"/>
+                      <a:r>
+                        <a:rPr sz="1000" b="0">
+                          <a:solidFill>
+                            <a:srgbClr val="333333"/>
+                          </a:solidFill>
+                          <a:latin typeface="Calibri"/>
+                        </a:rPr>
+                        <a:t>Internal CA + cert lifecycle automation (cert-manager / Venafi)</a:t>
                       </a:r>
                     </a:p>
                   </a:txBody>
@@ -11237,13 +13766,13 @@
                     <a:p>
                       <a:pPr algn="l"/>
                       <a:r>
-                        <a:rPr sz="1100" b="0">
-                          <a:solidFill>
-                            <a:srgbClr val="333333"/>
-                          </a:solidFill>
-                          <a:latin typeface="Calibri"/>
-                        </a:rPr>
-                        <a:t>DR site running but idle; GSLB sends 100% to primary; on failure flips to DR</a:t>
+                        <a:rPr sz="1000" b="0">
+                          <a:solidFill>
+                            <a:srgbClr val="333333"/>
+                          </a:solidFill>
+                          <a:latin typeface="Calibri"/>
+                        </a:rPr>
+                        <a:t>PKI team</a:t>
                       </a:r>
                     </a:p>
                   </a:txBody>
@@ -11260,13 +13789,13 @@
                     <a:p>
                       <a:pPr algn="l"/>
                       <a:r>
-                        <a:rPr sz="1100" b="0">
-                          <a:solidFill>
-                            <a:srgbClr val="333333"/>
-                          </a:solidFill>
-                          <a:latin typeface="Calibri"/>
-                        </a:rPr>
-                        <a:t>1–5 min</a:t>
+                        <a:rPr sz="1000" b="0">
+                          <a:solidFill>
+                            <a:srgbClr val="333333"/>
+                          </a:solidFill>
+                          <a:latin typeface="Calibri"/>
+                        </a:rPr>
+                        <a:t>mTLS for internal listener + backend, public-CA cert for external listener</a:t>
                       </a:r>
                     </a:p>
                   </a:txBody>
@@ -11276,20 +13805,93 @@
                     </a:solidFill>
                   </a:tcPr>
                 </a:tc>
-                <a:tc>
-                  <a:txBody>
-                    <a:bodyPr wrap="square"/>
-                    <a:lstStyle/>
-                    <a:p>
-                      <a:pPr algn="l"/>
-                      <a:r>
-                        <a:rPr sz="1100" b="0">
-                          <a:solidFill>
-                            <a:srgbClr val="333333"/>
-                          </a:solidFill>
-                          <a:latin typeface="Calibri"/>
-                        </a:rPr>
-                        <a:t>Zero</a:t>
+              </a:tr>
+              <a:tr h="332232">
+                <a:tc>
+                  <a:txBody>
+                    <a:bodyPr wrap="square"/>
+                    <a:lstStyle/>
+                    <a:p>
+                      <a:pPr algn="l"/>
+                      <a:r>
+                        <a:rPr sz="1000" b="0">
+                          <a:solidFill>
+                            <a:srgbClr val="333333"/>
+                          </a:solidFill>
+                          <a:latin typeface="Calibri"/>
+                        </a:rPr>
+                        <a:t>HashiCorp Vault with performance replication across DCs</a:t>
+                      </a:r>
+                    </a:p>
+                  </a:txBody>
+                  <a:tcPr marL="73152" marR="73152" marT="36576" marB="36576">
+                    <a:solidFill>
+                      <a:srgbClr val="FFFFFF"/>
+                    </a:solidFill>
+                  </a:tcPr>
+                </a:tc>
+                <a:tc>
+                  <a:txBody>
+                    <a:bodyPr wrap="square"/>
+                    <a:lstStyle/>
+                    <a:p>
+                      <a:pPr algn="l"/>
+                      <a:r>
+                        <a:rPr sz="1000" b="0">
+                          <a:solidFill>
+                            <a:srgbClr val="333333"/>
+                          </a:solidFill>
+                          <a:latin typeface="Calibri"/>
+                        </a:rPr>
+                        <a:t>Security platform team</a:t>
+                      </a:r>
+                    </a:p>
+                  </a:txBody>
+                  <a:tcPr marL="73152" marR="73152" marT="36576" marB="36576">
+                    <a:solidFill>
+                      <a:srgbClr val="FFFFFF"/>
+                    </a:solidFill>
+                  </a:tcPr>
+                </a:tc>
+                <a:tc>
+                  <a:txBody>
+                    <a:bodyPr wrap="square"/>
+                    <a:lstStyle/>
+                    <a:p>
+                      <a:pPr algn="l"/>
+                      <a:r>
+                        <a:rPr sz="1000" b="0">
+                          <a:solidFill>
+                            <a:srgbClr val="333333"/>
+                          </a:solidFill>
+                          <a:latin typeface="Calibri"/>
+                        </a:rPr>
+                        <a:t>Secrets, runtime registration token, backend credentials</a:t>
+                      </a:r>
+                    </a:p>
+                  </a:txBody>
+                  <a:tcPr marL="73152" marR="73152" marT="36576" marB="36576">
+                    <a:solidFill>
+                      <a:srgbClr val="FFFFFF"/>
+                    </a:solidFill>
+                  </a:tcPr>
+                </a:tc>
+              </a:tr>
+              <a:tr h="332232">
+                <a:tc>
+                  <a:txBody>
+                    <a:bodyPr wrap="square"/>
+                    <a:lstStyle/>
+                    <a:p>
+                      <a:pPr algn="l"/>
+                      <a:r>
+                        <a:rPr sz="1000" b="0">
+                          <a:solidFill>
+                            <a:srgbClr val="333333"/>
+                          </a:solidFill>
+                          <a:latin typeface="Calibri"/>
+                        </a:rPr>
+                        <a:t>Git repo + CI/CD pipeline (Jenkins / GitHub Actions / Tekton)</a:t>
                       </a:r>
                     </a:p>
                   </a:txBody>
@@ -11306,13 +13908,13 @@
                     <a:p>
                       <a:pPr algn="l"/>
                       <a:r>
-                        <a:rPr sz="1100" b="0">
-                          <a:solidFill>
-                            <a:srgbClr val="333333"/>
-                          </a:solidFill>
-                          <a:latin typeface="Calibri"/>
-                        </a:rPr>
-                        <a:t>1.8×</a:t>
+                        <a:rPr sz="1000" b="0">
+                          <a:solidFill>
+                            <a:srgbClr val="333333"/>
+                          </a:solidFill>
+                          <a:latin typeface="Calibri"/>
+                        </a:rPr>
+                        <a:t>Platform team</a:t>
                       </a:r>
                     </a:p>
                   </a:txBody>
@@ -11322,22 +13924,45 @@
                     </a:solidFill>
                   </a:tcPr>
                 </a:tc>
+                <a:tc>
+                  <a:txBody>
+                    <a:bodyPr wrap="square"/>
+                    <a:lstStyle/>
+                    <a:p>
+                      <a:pPr algn="l"/>
+                      <a:r>
+                        <a:rPr sz="1000" b="0">
+                          <a:solidFill>
+                            <a:srgbClr val="333333"/>
+                          </a:solidFill>
+                          <a:latin typeface="Calibri"/>
+                        </a:rPr>
+                        <a:t>Source of truth for config; pushes to both DCs in parallel</a:t>
+                      </a:r>
+                    </a:p>
+                  </a:txBody>
+                  <a:tcPr marL="73152" marR="73152" marT="36576" marB="36576">
+                    <a:solidFill>
+                      <a:srgbClr val="F2F2F2"/>
+                    </a:solidFill>
+                  </a:tcPr>
+                </a:tc>
               </a:tr>
-              <a:tr h="438912">
-                <a:tc>
-                  <a:txBody>
-                    <a:bodyPr wrap="square"/>
-                    <a:lstStyle/>
-                    <a:p>
-                      <a:pPr algn="l"/>
-                      <a:r>
-                        <a:rPr sz="1100" b="0">
-                          <a:solidFill>
-                            <a:srgbClr val="333333"/>
-                          </a:solidFill>
-                          <a:latin typeface="Calibri"/>
-                        </a:rPr>
-                        <a:t>C. Active/active across DCs in same metro  (recommended)</a:t>
+              <a:tr h="332232">
+                <a:tc>
+                  <a:txBody>
+                    <a:bodyPr wrap="square"/>
+                    <a:lstStyle/>
+                    <a:p>
+                      <a:pPr algn="l"/>
+                      <a:r>
+                        <a:rPr sz="1000" b="0">
+                          <a:solidFill>
+                            <a:srgbClr val="333333"/>
+                          </a:solidFill>
+                          <a:latin typeface="Calibri"/>
+                        </a:rPr>
+                        <a:t>Ansible Tower / AWX per DC</a:t>
                       </a:r>
                     </a:p>
                   </a:txBody>
@@ -11354,13 +13979,13 @@
                     <a:p>
                       <a:pPr algn="l"/>
                       <a:r>
-                        <a:rPr sz="1100" b="0">
-                          <a:solidFill>
-                            <a:srgbClr val="333333"/>
-                          </a:solidFill>
-                          <a:latin typeface="Calibri"/>
-                        </a:rPr>
-                        <a:t>Both DCs serve traffic; GSLB weighted round-robin; DC failure = GSLB removes node</a:t>
+                        <a:rPr sz="1000" b="0">
+                          <a:solidFill>
+                            <a:srgbClr val="333333"/>
+                          </a:solidFill>
+                          <a:latin typeface="Calibri"/>
+                        </a:rPr>
+                        <a:t>Platform team</a:t>
                       </a:r>
                     </a:p>
                   </a:txBody>
@@ -11377,13 +14002,13 @@
                     <a:p>
                       <a:pPr algn="l"/>
                       <a:r>
-                        <a:rPr sz="1100" b="0">
-                          <a:solidFill>
-                            <a:srgbClr val="333333"/>
-                          </a:solidFill>
-                          <a:latin typeface="Calibri"/>
-                        </a:rPr>
-                        <a:t>&lt; 60 s</a:t>
+                        <a:rPr sz="1000" b="0">
+                          <a:solidFill>
+                            <a:srgbClr val="333333"/>
+                          </a:solidFill>
+                          <a:latin typeface="Calibri"/>
+                        </a:rPr>
+                        <a:t>Per-DC config deployment + SIGHUP hot reload (Local mode)</a:t>
                       </a:r>
                     </a:p>
                   </a:txBody>
@@ -11393,20 +14018,93 @@
                     </a:solidFill>
                   </a:tcPr>
                 </a:tc>
-                <a:tc>
-                  <a:txBody>
-                    <a:bodyPr wrap="square"/>
-                    <a:lstStyle/>
-                    <a:p>
-                      <a:pPr algn="l"/>
-                      <a:r>
-                        <a:rPr sz="1100" b="0">
-                          <a:solidFill>
-                            <a:srgbClr val="333333"/>
-                          </a:solidFill>
-                          <a:latin typeface="Calibri"/>
-                        </a:rPr>
-                        <a:t>Zero</a:t>
+              </a:tr>
+              <a:tr h="332232">
+                <a:tc>
+                  <a:txBody>
+                    <a:bodyPr wrap="square"/>
+                    <a:lstStyle/>
+                    <a:p>
+                      <a:pPr algn="l"/>
+                      <a:r>
+                        <a:rPr sz="1000" b="0">
+                          <a:solidFill>
+                            <a:srgbClr val="333333"/>
+                          </a:solidFill>
+                          <a:latin typeface="Calibri"/>
+                        </a:rPr>
+                        <a:t>Outbound HTTPS to anypoint.mulesoft.com on 443 (Connected mode only)</a:t>
+                      </a:r>
+                    </a:p>
+                  </a:txBody>
+                  <a:tcPr marL="73152" marR="73152" marT="36576" marB="36576">
+                    <a:solidFill>
+                      <a:srgbClr val="F2F2F2"/>
+                    </a:solidFill>
+                  </a:tcPr>
+                </a:tc>
+                <a:tc>
+                  <a:txBody>
+                    <a:bodyPr wrap="square"/>
+                    <a:lstStyle/>
+                    <a:p>
+                      <a:pPr algn="l"/>
+                      <a:r>
+                        <a:rPr sz="1000" b="0">
+                          <a:solidFill>
+                            <a:srgbClr val="333333"/>
+                          </a:solidFill>
+                          <a:latin typeface="Calibri"/>
+                        </a:rPr>
+                        <a:t>Network team</a:t>
+                      </a:r>
+                    </a:p>
+                  </a:txBody>
+                  <a:tcPr marL="73152" marR="73152" marT="36576" marB="36576">
+                    <a:solidFill>
+                      <a:srgbClr val="F2F2F2"/>
+                    </a:solidFill>
+                  </a:tcPr>
+                </a:tc>
+                <a:tc>
+                  <a:txBody>
+                    <a:bodyPr wrap="square"/>
+                    <a:lstStyle/>
+                    <a:p>
+                      <a:pPr algn="l"/>
+                      <a:r>
+                        <a:rPr sz="1000" b="0">
+                          <a:solidFill>
+                            <a:srgbClr val="333333"/>
+                          </a:solidFill>
+                          <a:latin typeface="Calibri"/>
+                        </a:rPr>
+                        <a:t>Policy push + telemetry to Anypoint Control Plane</a:t>
+                      </a:r>
+                    </a:p>
+                  </a:txBody>
+                  <a:tcPr marL="73152" marR="73152" marT="36576" marB="36576">
+                    <a:solidFill>
+                      <a:srgbClr val="F2F2F2"/>
+                    </a:solidFill>
+                  </a:tcPr>
+                </a:tc>
+              </a:tr>
+              <a:tr h="332232">
+                <a:tc>
+                  <a:txBody>
+                    <a:bodyPr wrap="square"/>
+                    <a:lstStyle/>
+                    <a:p>
+                      <a:pPr algn="l"/>
+                      <a:r>
+                        <a:rPr sz="1000" b="0">
+                          <a:solidFill>
+                            <a:srgbClr val="333333"/>
+                          </a:solidFill>
+                          <a:latin typeface="Calibri"/>
+                        </a:rPr>
+                        <a:t>Private DNS — internal zone with backend hostnames</a:t>
                       </a:r>
                     </a:p>
                   </a:txBody>
@@ -11423,13 +14121,13 @@
                     <a:p>
                       <a:pPr algn="l"/>
                       <a:r>
-                        <a:rPr sz="1100" b="0">
-                          <a:solidFill>
-                            <a:srgbClr val="333333"/>
-                          </a:solidFill>
-                          <a:latin typeface="Calibri"/>
-                        </a:rPr>
-                        <a:t>2.0×</a:t>
+                        <a:rPr sz="1000" b="0">
+                          <a:solidFill>
+                            <a:srgbClr val="333333"/>
+                          </a:solidFill>
+                          <a:latin typeface="Calibri"/>
+                        </a:rPr>
+                        <a:t>DNS team</a:t>
                       </a:r>
                     </a:p>
                   </a:txBody>
@@ -11439,22 +14137,45 @@
                     </a:solidFill>
                   </a:tcPr>
                 </a:tc>
+                <a:tc>
+                  <a:txBody>
+                    <a:bodyPr wrap="square"/>
+                    <a:lstStyle/>
+                    <a:p>
+                      <a:pPr algn="l"/>
+                      <a:r>
+                        <a:rPr sz="1000" b="0">
+                          <a:solidFill>
+                            <a:srgbClr val="333333"/>
+                          </a:solidFill>
+                          <a:latin typeface="Calibri"/>
+                        </a:rPr>
+                        <a:t>Backend service resolution (e.g. biztalk-prod.internal.yourco)</a:t>
+                      </a:r>
+                    </a:p>
+                  </a:txBody>
+                  <a:tcPr marL="73152" marR="73152" marT="36576" marB="36576">
+                    <a:solidFill>
+                      <a:srgbClr val="FFFFFF"/>
+                    </a:solidFill>
+                  </a:tcPr>
+                </a:tc>
               </a:tr>
-              <a:tr h="438912">
-                <a:tc>
-                  <a:txBody>
-                    <a:bodyPr wrap="square"/>
-                    <a:lstStyle/>
-                    <a:p>
-                      <a:pPr algn="l"/>
-                      <a:r>
-                        <a:rPr sz="1100" b="0">
-                          <a:solidFill>
-                            <a:srgbClr val="333333"/>
-                          </a:solidFill>
-                          <a:latin typeface="Calibri"/>
-                        </a:rPr>
-                        <a:t>D. Multi-region active/active</a:t>
+              <a:tr h="332232">
+                <a:tc>
+                  <a:txBody>
+                    <a:bodyPr wrap="square"/>
+                    <a:lstStyle/>
+                    <a:p>
+                      <a:pPr algn="l"/>
+                      <a:r>
+                        <a:rPr sz="1000" b="0">
+                          <a:solidFill>
+                            <a:srgbClr val="333333"/>
+                          </a:solidFill>
+                          <a:latin typeface="Calibri"/>
+                        </a:rPr>
+                        <a:t>Perimeter firewall + east-west FW rules</a:t>
                       </a:r>
                     </a:p>
                   </a:txBody>
@@ -11471,13 +14192,13 @@
                     <a:p>
                       <a:pPr algn="l"/>
                       <a:r>
-                        <a:rPr sz="1100" b="0">
-                          <a:solidFill>
-                            <a:srgbClr val="333333"/>
-                          </a:solidFill>
-                          <a:latin typeface="Calibri"/>
-                        </a:rPr>
-                        <a:t>DCs in different cities/regions (latency &gt; 50ms apart); geo-affinity routing</a:t>
+                        <a:rPr sz="1000" b="0">
+                          <a:solidFill>
+                            <a:srgbClr val="333333"/>
+                          </a:solidFill>
+                          <a:latin typeface="Calibri"/>
+                        </a:rPr>
+                        <a:t>Network team</a:t>
                       </a:r>
                     </a:p>
                   </a:txBody>
@@ -11494,13 +14215,13 @@
                     <a:p>
                       <a:pPr algn="l"/>
                       <a:r>
-                        <a:rPr sz="1100" b="0">
-                          <a:solidFill>
-                            <a:srgbClr val="333333"/>
-                          </a:solidFill>
-                          <a:latin typeface="Calibri"/>
-                        </a:rPr>
-                        <a:t>&lt; 60 s</a:t>
+                        <a:rPr sz="1000" b="0">
+                          <a:solidFill>
+                            <a:srgbClr val="333333"/>
+                          </a:solidFill>
+                          <a:latin typeface="Calibri"/>
+                        </a:rPr>
+                        <a:t>Inbound 443/8443 to gateway; outbound 443 to MS stack and IdP</a:t>
                       </a:r>
                     </a:p>
                   </a:txBody>
@@ -11510,20 +14231,93 @@
                     </a:solidFill>
                   </a:tcPr>
                 </a:tc>
-                <a:tc>
-                  <a:txBody>
-                    <a:bodyPr wrap="square"/>
-                    <a:lstStyle/>
-                    <a:p>
-                      <a:pPr algn="l"/>
-                      <a:r>
-                        <a:rPr sz="1100" b="0">
-                          <a:solidFill>
-                            <a:srgbClr val="333333"/>
-                          </a:solidFill>
-                          <a:latin typeface="Calibri"/>
-                        </a:rPr>
-                        <a:t>Near-zero (config) / backend-dependent (data)</a:t>
+              </a:tr>
+              <a:tr h="332232">
+                <a:tc>
+                  <a:txBody>
+                    <a:bodyPr wrap="square"/>
+                    <a:lstStyle/>
+                    <a:p>
+                      <a:pPr algn="l"/>
+                      <a:r>
+                        <a:rPr sz="1000" b="0">
+                          <a:solidFill>
+                            <a:srgbClr val="333333"/>
+                          </a:solidFill>
+                          <a:latin typeface="Calibri"/>
+                        </a:rPr>
+                        <a:t>NTP servers (Stratum-2 ideally)</a:t>
+                      </a:r>
+                    </a:p>
+                  </a:txBody>
+                  <a:tcPr marL="73152" marR="73152" marT="36576" marB="36576">
+                    <a:solidFill>
+                      <a:srgbClr val="FFFFFF"/>
+                    </a:solidFill>
+                  </a:tcPr>
+                </a:tc>
+                <a:tc>
+                  <a:txBody>
+                    <a:bodyPr wrap="square"/>
+                    <a:lstStyle/>
+                    <a:p>
+                      <a:pPr algn="l"/>
+                      <a:r>
+                        <a:rPr sz="1000" b="0">
+                          <a:solidFill>
+                            <a:srgbClr val="333333"/>
+                          </a:solidFill>
+                          <a:latin typeface="Calibri"/>
+                        </a:rPr>
+                        <a:t>Sysadmins</a:t>
+                      </a:r>
+                    </a:p>
+                  </a:txBody>
+                  <a:tcPr marL="73152" marR="73152" marT="36576" marB="36576">
+                    <a:solidFill>
+                      <a:srgbClr val="FFFFFF"/>
+                    </a:solidFill>
+                  </a:tcPr>
+                </a:tc>
+                <a:tc>
+                  <a:txBody>
+                    <a:bodyPr wrap="square"/>
+                    <a:lstStyle/>
+                    <a:p>
+                      <a:pPr algn="l"/>
+                      <a:r>
+                        <a:rPr sz="1000" b="0">
+                          <a:solidFill>
+                            <a:srgbClr val="333333"/>
+                          </a:solidFill>
+                          <a:latin typeface="Calibri"/>
+                        </a:rPr>
+                        <a:t>JWT exp/nbf validation requires &lt; 60s skew</a:t>
+                      </a:r>
+                    </a:p>
+                  </a:txBody>
+                  <a:tcPr marL="73152" marR="73152" marT="36576" marB="36576">
+                    <a:solidFill>
+                      <a:srgbClr val="FFFFFF"/>
+                    </a:solidFill>
+                  </a:tcPr>
+                </a:tc>
+              </a:tr>
+              <a:tr h="332232">
+                <a:tc>
+                  <a:txBody>
+                    <a:bodyPr wrap="square"/>
+                    <a:lstStyle/>
+                    <a:p>
+                      <a:pPr algn="l"/>
+                      <a:r>
+                        <a:rPr sz="1000" b="0">
+                          <a:solidFill>
+                            <a:srgbClr val="333333"/>
+                          </a:solidFill>
+                          <a:latin typeface="Calibri"/>
+                        </a:rPr>
+                        <a:t>SIEM (Splunk) + APM (Datadog) ingest endpoints</a:t>
                       </a:r>
                     </a:p>
                   </a:txBody>
@@ -11540,13 +14334,178 @@
                     <a:p>
                       <a:pPr algn="l"/>
                       <a:r>
-                        <a:rPr sz="1100" b="0">
-                          <a:solidFill>
-                            <a:srgbClr val="333333"/>
-                          </a:solidFill>
-                          <a:latin typeface="Calibri"/>
-                        </a:rPr>
-                        <a:t>2.2×</a:t>
+                        <a:rPr sz="1000" b="0">
+                          <a:solidFill>
+                            <a:srgbClr val="333333"/>
+                          </a:solidFill>
+                          <a:latin typeface="Calibri"/>
+                        </a:rPr>
+                        <a:t>Observability</a:t>
+                      </a:r>
+                    </a:p>
+                  </a:txBody>
+                  <a:tcPr marL="73152" marR="73152" marT="36576" marB="36576">
+                    <a:solidFill>
+                      <a:srgbClr val="F2F2F2"/>
+                    </a:solidFill>
+                  </a:tcPr>
+                </a:tc>
+                <a:tc>
+                  <a:txBody>
+                    <a:bodyPr wrap="square"/>
+                    <a:lstStyle/>
+                    <a:p>
+                      <a:pPr algn="l"/>
+                      <a:r>
+                        <a:rPr sz="1000" b="0">
+                          <a:solidFill>
+                            <a:srgbClr val="333333"/>
+                          </a:solidFill>
+                          <a:latin typeface="Calibri"/>
+                        </a:rPr>
+                        <a:t>Dual-shipping from each Flex Gateway replica</a:t>
+                      </a:r>
+                    </a:p>
+                  </a:txBody>
+                  <a:tcPr marL="73152" marR="73152" marT="36576" marB="36576">
+                    <a:solidFill>
+                      <a:srgbClr val="F2F2F2"/>
+                    </a:solidFill>
+                  </a:tcPr>
+                </a:tc>
+              </a:tr>
+              <a:tr h="332232">
+                <a:tc>
+                  <a:txBody>
+                    <a:bodyPr wrap="square"/>
+                    <a:lstStyle/>
+                    <a:p>
+                      <a:pPr algn="l"/>
+                      <a:r>
+                        <a:rPr sz="1000" b="0">
+                          <a:solidFill>
+                            <a:srgbClr val="333333"/>
+                          </a:solidFill>
+                          <a:latin typeface="Calibri"/>
+                        </a:rPr>
+                        <a:t>Backup target for /etc/flex-gateway + Vault snapshots</a:t>
+                      </a:r>
+                    </a:p>
+                  </a:txBody>
+                  <a:tcPr marL="73152" marR="73152" marT="36576" marB="36576">
+                    <a:solidFill>
+                      <a:srgbClr val="FFFFFF"/>
+                    </a:solidFill>
+                  </a:tcPr>
+                </a:tc>
+                <a:tc>
+                  <a:txBody>
+                    <a:bodyPr wrap="square"/>
+                    <a:lstStyle/>
+                    <a:p>
+                      <a:pPr algn="l"/>
+                      <a:r>
+                        <a:rPr sz="1000" b="0">
+                          <a:solidFill>
+                            <a:srgbClr val="333333"/>
+                          </a:solidFill>
+                          <a:latin typeface="Calibri"/>
+                        </a:rPr>
+                        <a:t>Backup team</a:t>
+                      </a:r>
+                    </a:p>
+                  </a:txBody>
+                  <a:tcPr marL="73152" marR="73152" marT="36576" marB="36576">
+                    <a:solidFill>
+                      <a:srgbClr val="FFFFFF"/>
+                    </a:solidFill>
+                  </a:tcPr>
+                </a:tc>
+                <a:tc>
+                  <a:txBody>
+                    <a:bodyPr wrap="square"/>
+                    <a:lstStyle/>
+                    <a:p>
+                      <a:pPr algn="l"/>
+                      <a:r>
+                        <a:rPr sz="1000" b="0">
+                          <a:solidFill>
+                            <a:srgbClr val="333333"/>
+                          </a:solidFill>
+                          <a:latin typeface="Calibri"/>
+                        </a:rPr>
+                        <a:t>Disaster recovery; daily cadence</a:t>
+                      </a:r>
+                    </a:p>
+                  </a:txBody>
+                  <a:tcPr marL="73152" marR="73152" marT="36576" marB="36576">
+                    <a:solidFill>
+                      <a:srgbClr val="FFFFFF"/>
+                    </a:solidFill>
+                  </a:tcPr>
+                </a:tc>
+              </a:tr>
+              <a:tr h="332232">
+                <a:tc>
+                  <a:txBody>
+                    <a:bodyPr wrap="square"/>
+                    <a:lstStyle/>
+                    <a:p>
+                      <a:pPr algn="l"/>
+                      <a:r>
+                        <a:rPr sz="1000" b="0">
+                          <a:solidFill>
+                            <a:srgbClr val="333333"/>
+                          </a:solidFill>
+                          <a:latin typeface="Calibri"/>
+                        </a:rPr>
+                        <a:t>DR-site provisioning (3rd DC or cloud) — optional</a:t>
+                      </a:r>
+                    </a:p>
+                  </a:txBody>
+                  <a:tcPr marL="73152" marR="73152" marT="36576" marB="36576">
+                    <a:solidFill>
+                      <a:srgbClr val="F2F2F2"/>
+                    </a:solidFill>
+                  </a:tcPr>
+                </a:tc>
+                <a:tc>
+                  <a:txBody>
+                    <a:bodyPr wrap="square"/>
+                    <a:lstStyle/>
+                    <a:p>
+                      <a:pPr algn="l"/>
+                      <a:r>
+                        <a:rPr sz="1000" b="0">
+                          <a:solidFill>
+                            <a:srgbClr val="333333"/>
+                          </a:solidFill>
+                          <a:latin typeface="Calibri"/>
+                        </a:rPr>
+                        <a:t>Platform team</a:t>
+                      </a:r>
+                    </a:p>
+                  </a:txBody>
+                  <a:tcPr marL="73152" marR="73152" marT="36576" marB="36576">
+                    <a:solidFill>
+                      <a:srgbClr val="F2F2F2"/>
+                    </a:solidFill>
+                  </a:tcPr>
+                </a:tc>
+                <a:tc>
+                  <a:txBody>
+                    <a:bodyPr wrap="square"/>
+                    <a:lstStyle/>
+                    <a:p>
+                      <a:pPr algn="l"/>
+                      <a:r>
+                        <a:rPr sz="1000" b="0">
+                          <a:solidFill>
+                            <a:srgbClr val="333333"/>
+                          </a:solidFill>
+                          <a:latin typeface="Calibri"/>
+                        </a:rPr>
+                        <a:t>Multi-region geographic resilience beyond 2 metro DCs</a:t>
                       </a:r>
                     </a:p>
                   </a:txBody>
@@ -11564,502 +14523,6 @@
       <p:sp>
         <p:nvSpPr>
           <p:cNvPr id="6" name="Rectangle 5"/>
-          <p:cNvSpPr/>
-          <p:nvPr/>
-        </p:nvSpPr>
-        <p:spPr>
-          <a:xfrm>
-            <a:off x="274320" y="3749039"/>
-            <a:ext cx="11612880" cy="914400"/>
-          </a:xfrm>
-          <a:prstGeom prst="rect">
-            <a:avLst/>
-          </a:prstGeom>
-          <a:solidFill>
-            <a:srgbClr val="DEEBF7"/>
-          </a:solidFill>
-          <a:ln>
-            <a:noFill/>
-          </a:ln>
-        </p:spPr>
-        <p:style>
-          <a:lnRef idx="1">
-            <a:schemeClr val="accent1"/>
-          </a:lnRef>
-          <a:fillRef idx="3">
-            <a:schemeClr val="accent1"/>
-          </a:fillRef>
-          <a:effectRef idx="2">
-            <a:schemeClr val="accent1"/>
-          </a:effectRef>
-          <a:fontRef idx="minor">
-            <a:schemeClr val="lt1"/>
-          </a:fontRef>
-        </p:style>
-        <p:txBody>
-          <a:bodyPr rtlCol="0" anchor="ctr"/>
-          <a:lstStyle/>
-          <a:p>
-            <a:pPr algn="ctr"/>
-          </a:p>
-        </p:txBody>
-      </p:sp>
-      <p:sp>
-        <p:nvSpPr>
-          <p:cNvPr id="7" name="TextBox 6"/>
-          <p:cNvSpPr txBox="1"/>
-          <p:nvPr/>
-        </p:nvSpPr>
-        <p:spPr>
-          <a:xfrm>
-            <a:off x="457200" y="3822191"/>
-            <a:ext cx="7315200" cy="320040"/>
-          </a:xfrm>
-          <a:prstGeom prst="rect">
-            <a:avLst/>
-          </a:prstGeom>
-          <a:noFill/>
-        </p:spPr>
-        <p:txBody>
-          <a:bodyPr wrap="square" lIns="45720" rIns="45720" tIns="18288" bIns="18288" anchor="t">
-            <a:spAutoFit/>
-          </a:bodyPr>
-          <a:lstStyle/>
-          <a:p>
-            <a:pPr algn="l"/>
-            <a:r>
-              <a:rPr sz="1400" b="1">
-                <a:solidFill>
-                  <a:srgbClr val="1F4E79"/>
-                </a:solidFill>
-                <a:latin typeface="Calibri"/>
-              </a:rPr>
-              <a:t>Recommendation for citizen-data workload</a:t>
-            </a:r>
-          </a:p>
-        </p:txBody>
-      </p:sp>
-      <p:sp>
-        <p:nvSpPr>
-          <p:cNvPr id="8" name="TextBox 7"/>
-          <p:cNvSpPr txBox="1"/>
-          <p:nvPr/>
-        </p:nvSpPr>
-        <p:spPr>
-          <a:xfrm>
-            <a:off x="457200" y="4114800"/>
-            <a:ext cx="11338560" cy="502920"/>
-          </a:xfrm>
-          <a:prstGeom prst="rect">
-            <a:avLst/>
-          </a:prstGeom>
-          <a:noFill/>
-        </p:spPr>
-        <p:txBody>
-          <a:bodyPr wrap="square" lIns="45720" rIns="45720" tIns="18288" bIns="18288" anchor="t">
-            <a:spAutoFit/>
-          </a:bodyPr>
-          <a:lstStyle/>
-          <a:p>
-            <a:pPr algn="l"/>
-            <a:r>
-              <a:rPr sz="1200" b="0">
-                <a:solidFill>
-                  <a:srgbClr val="333333"/>
-                </a:solidFill>
-                <a:latin typeface="Calibri"/>
-              </a:rPr>
-              <a:t>Posture C — active/active across DC-1 and DC-2 within the same metro. RTO &lt; 60s with F5 GSLB + 30s DNS TTL is achievable and proven. Multi-region (D) only when geographic resilience is explicitly required.</a:t>
-            </a:r>
-          </a:p>
-        </p:txBody>
-      </p:sp>
-      <p:sp>
-        <p:nvSpPr>
-          <p:cNvPr id="9" name="TextBox 8"/>
-          <p:cNvSpPr txBox="1"/>
-          <p:nvPr/>
-        </p:nvSpPr>
-        <p:spPr>
-          <a:xfrm>
-            <a:off x="457200" y="4800600"/>
-            <a:ext cx="5486400" cy="320040"/>
-          </a:xfrm>
-          <a:prstGeom prst="rect">
-            <a:avLst/>
-          </a:prstGeom>
-          <a:noFill/>
-        </p:spPr>
-        <p:txBody>
-          <a:bodyPr wrap="square" lIns="45720" rIns="45720" tIns="18288" bIns="18288" anchor="t">
-            <a:spAutoFit/>
-          </a:bodyPr>
-          <a:lstStyle/>
-          <a:p>
-            <a:pPr algn="l"/>
-            <a:r>
-              <a:rPr sz="1300" b="1">
-                <a:solidFill>
-                  <a:srgbClr val="1F4E79"/>
-                </a:solidFill>
-                <a:latin typeface="Calibri"/>
-              </a:rPr>
-              <a:t>DNS failover math (Posture C)</a:t>
-            </a:r>
-          </a:p>
-        </p:txBody>
-      </p:sp>
-      <p:graphicFrame>
-        <p:nvGraphicFramePr>
-          <p:cNvPr id="10" name="Table 9"/>
-          <p:cNvGraphicFramePr>
-            <a:graphicFrameLocks noGrp="1"/>
-          </p:cNvGraphicFramePr>
-          <p:nvPr/>
-        </p:nvGraphicFramePr>
-        <p:xfrm>
-          <a:off x="457200" y="5166360"/>
-          <a:ext cx="5486400" cy="1371600"/>
-        </p:xfrm>
-        <a:graphic>
-          <a:graphicData uri="http://schemas.openxmlformats.org/drawingml/2006/table">
-            <a:tbl>
-              <a:tblPr firstRow="1" bandRow="1">
-                <a:tableStyleId>{5C22544A-7EE6-4342-B048-85BDC9FD1C3A}</a:tableStyleId>
-              </a:tblPr>
-              <a:tblGrid>
-                <a:gridCol w="3657600"/>
-                <a:gridCol w="1828800"/>
-              </a:tblGrid>
-              <a:tr h="274320">
-                <a:tc>
-                  <a:txBody>
-                    <a:bodyPr wrap="square"/>
-                    <a:lstStyle/>
-                    <a:p>
-                      <a:pPr algn="l"/>
-                      <a:r>
-                        <a:rPr sz="1100" b="1">
-                          <a:solidFill>
-                            <a:srgbClr val="FFFFFF"/>
-                          </a:solidFill>
-                          <a:latin typeface="Calibri"/>
-                        </a:rPr>
-                        <a:t>Component</a:t>
-                      </a:r>
-                    </a:p>
-                  </a:txBody>
-                  <a:tcPr marL="73152" marR="73152" marT="36576" marB="36576">
-                    <a:solidFill>
-                      <a:srgbClr val="2E75B6"/>
-                    </a:solidFill>
-                  </a:tcPr>
-                </a:tc>
-                <a:tc>
-                  <a:txBody>
-                    <a:bodyPr wrap="square"/>
-                    <a:lstStyle/>
-                    <a:p>
-                      <a:pPr algn="l"/>
-                      <a:r>
-                        <a:rPr sz="1100" b="1">
-                          <a:solidFill>
-                            <a:srgbClr val="FFFFFF"/>
-                          </a:solidFill>
-                          <a:latin typeface="Calibri"/>
-                        </a:rPr>
-                        <a:t>Time</a:t>
-                      </a:r>
-                    </a:p>
-                  </a:txBody>
-                  <a:tcPr marL="73152" marR="73152" marT="36576" marB="36576">
-                    <a:solidFill>
-                      <a:srgbClr val="2E75B6"/>
-                    </a:solidFill>
-                  </a:tcPr>
-                </a:tc>
-              </a:tr>
-              <a:tr h="274320">
-                <a:tc>
-                  <a:txBody>
-                    <a:bodyPr wrap="square"/>
-                    <a:lstStyle/>
-                    <a:p>
-                      <a:pPr algn="l"/>
-                      <a:r>
-                        <a:rPr sz="1100" b="0">
-                          <a:solidFill>
-                            <a:srgbClr val="333333"/>
-                          </a:solidFill>
-                          <a:latin typeface="Calibri"/>
-                        </a:rPr>
-                        <a:t>GSLB health check interval</a:t>
-                      </a:r>
-                    </a:p>
-                  </a:txBody>
-                  <a:tcPr marL="73152" marR="73152" marT="36576" marB="36576">
-                    <a:solidFill>
-                      <a:srgbClr val="FFFFFF"/>
-                    </a:solidFill>
-                  </a:tcPr>
-                </a:tc>
-                <a:tc>
-                  <a:txBody>
-                    <a:bodyPr wrap="square"/>
-                    <a:lstStyle/>
-                    <a:p>
-                      <a:pPr algn="l"/>
-                      <a:r>
-                        <a:rPr sz="1100" b="0">
-                          <a:solidFill>
-                            <a:srgbClr val="333333"/>
-                          </a:solidFill>
-                          <a:latin typeface="Calibri"/>
-                        </a:rPr>
-                        <a:t>5–15 s</a:t>
-                      </a:r>
-                    </a:p>
-                  </a:txBody>
-                  <a:tcPr marL="73152" marR="73152" marT="36576" marB="36576">
-                    <a:solidFill>
-                      <a:srgbClr val="FFFFFF"/>
-                    </a:solidFill>
-                  </a:tcPr>
-                </a:tc>
-              </a:tr>
-              <a:tr h="274320">
-                <a:tc>
-                  <a:txBody>
-                    <a:bodyPr wrap="square"/>
-                    <a:lstStyle/>
-                    <a:p>
-                      <a:pPr algn="l"/>
-                      <a:r>
-                        <a:rPr sz="1100" b="0">
-                          <a:solidFill>
-                            <a:srgbClr val="333333"/>
-                          </a:solidFill>
-                          <a:latin typeface="Calibri"/>
-                        </a:rPr>
-                        <a:t>Failure detection (3 consecutive misses)</a:t>
-                      </a:r>
-                    </a:p>
-                  </a:txBody>
-                  <a:tcPr marL="73152" marR="73152" marT="36576" marB="36576">
-                    <a:solidFill>
-                      <a:srgbClr val="F2F2F2"/>
-                    </a:solidFill>
-                  </a:tcPr>
-                </a:tc>
-                <a:tc>
-                  <a:txBody>
-                    <a:bodyPr wrap="square"/>
-                    <a:lstStyle/>
-                    <a:p>
-                      <a:pPr algn="l"/>
-                      <a:r>
-                        <a:rPr sz="1100" b="0">
-                          <a:solidFill>
-                            <a:srgbClr val="333333"/>
-                          </a:solidFill>
-                          <a:latin typeface="Calibri"/>
-                        </a:rPr>
-                        <a:t>15–45 s</a:t>
-                      </a:r>
-                    </a:p>
-                  </a:txBody>
-                  <a:tcPr marL="73152" marR="73152" marT="36576" marB="36576">
-                    <a:solidFill>
-                      <a:srgbClr val="F2F2F2"/>
-                    </a:solidFill>
-                  </a:tcPr>
-                </a:tc>
-              </a:tr>
-              <a:tr h="274320">
-                <a:tc>
-                  <a:txBody>
-                    <a:bodyPr wrap="square"/>
-                    <a:lstStyle/>
-                    <a:p>
-                      <a:pPr algn="l"/>
-                      <a:r>
-                        <a:rPr sz="1100" b="0">
-                          <a:solidFill>
-                            <a:srgbClr val="333333"/>
-                          </a:solidFill>
-                          <a:latin typeface="Calibri"/>
-                        </a:rPr>
-                        <a:t>DNS TTL expiry on clients</a:t>
-                      </a:r>
-                    </a:p>
-                  </a:txBody>
-                  <a:tcPr marL="73152" marR="73152" marT="36576" marB="36576">
-                    <a:solidFill>
-                      <a:srgbClr val="FFFFFF"/>
-                    </a:solidFill>
-                  </a:tcPr>
-                </a:tc>
-                <a:tc>
-                  <a:txBody>
-                    <a:bodyPr wrap="square"/>
-                    <a:lstStyle/>
-                    <a:p>
-                      <a:pPr algn="l"/>
-                      <a:r>
-                        <a:rPr sz="1100" b="0">
-                          <a:solidFill>
-                            <a:srgbClr val="333333"/>
-                          </a:solidFill>
-                          <a:latin typeface="Calibri"/>
-                        </a:rPr>
-                        <a:t>≤ 30 s</a:t>
-                      </a:r>
-                    </a:p>
-                  </a:txBody>
-                  <a:tcPr marL="73152" marR="73152" marT="36576" marB="36576">
-                    <a:solidFill>
-                      <a:srgbClr val="FFFFFF"/>
-                    </a:solidFill>
-                  </a:tcPr>
-                </a:tc>
-              </a:tr>
-              <a:tr h="274320">
-                <a:tc>
-                  <a:txBody>
-                    <a:bodyPr wrap="square"/>
-                    <a:lstStyle/>
-                    <a:p>
-                      <a:pPr algn="l"/>
-                      <a:r>
-                        <a:rPr sz="1100" b="0">
-                          <a:solidFill>
-                            <a:srgbClr val="333333"/>
-                          </a:solidFill>
-                          <a:latin typeface="Calibri"/>
-                        </a:rPr>
-                        <a:t>TOTAL worst-case RTO</a:t>
-                      </a:r>
-                    </a:p>
-                  </a:txBody>
-                  <a:tcPr marL="73152" marR="73152" marT="36576" marB="36576">
-                    <a:solidFill>
-                      <a:srgbClr val="F2F2F2"/>
-                    </a:solidFill>
-                  </a:tcPr>
-                </a:tc>
-                <a:tc>
-                  <a:txBody>
-                    <a:bodyPr wrap="square"/>
-                    <a:lstStyle/>
-                    <a:p>
-                      <a:pPr algn="l"/>
-                      <a:r>
-                        <a:rPr sz="1100" b="0">
-                          <a:solidFill>
-                            <a:srgbClr val="333333"/>
-                          </a:solidFill>
-                          <a:latin typeface="Calibri"/>
-                        </a:rPr>
-                        <a:t>≈ 60 s</a:t>
-                      </a:r>
-                    </a:p>
-                  </a:txBody>
-                  <a:tcPr marL="73152" marR="73152" marT="36576" marB="36576">
-                    <a:solidFill>
-                      <a:srgbClr val="F2F2F2"/>
-                    </a:solidFill>
-                  </a:tcPr>
-                </a:tc>
-              </a:tr>
-            </a:tbl>
-          </a:graphicData>
-        </a:graphic>
-      </p:graphicFrame>
-      <p:sp>
-        <p:nvSpPr>
-          <p:cNvPr id="11" name="TextBox 10"/>
-          <p:cNvSpPr txBox="1"/>
-          <p:nvPr/>
-        </p:nvSpPr>
-        <p:spPr>
-          <a:xfrm>
-            <a:off x="6217920" y="4800600"/>
-            <a:ext cx="5486400" cy="320040"/>
-          </a:xfrm>
-          <a:prstGeom prst="rect">
-            <a:avLst/>
-          </a:prstGeom>
-          <a:noFill/>
-        </p:spPr>
-        <p:txBody>
-          <a:bodyPr wrap="square" lIns="45720" rIns="45720" tIns="18288" bIns="18288" anchor="t">
-            <a:spAutoFit/>
-          </a:bodyPr>
-          <a:lstStyle/>
-          <a:p>
-            <a:pPr algn="l"/>
-            <a:r>
-              <a:rPr sz="1300" b="1">
-                <a:solidFill>
-                  <a:srgbClr val="1F4E79"/>
-                </a:solidFill>
-                <a:latin typeface="Calibri"/>
-              </a:rPr>
-              <a:t>Note on persistent connections</a:t>
-            </a:r>
-          </a:p>
-        </p:txBody>
-      </p:sp>
-      <p:sp>
-        <p:nvSpPr>
-          <p:cNvPr id="12" name="TextBox 11"/>
-          <p:cNvSpPr txBox="1"/>
-          <p:nvPr/>
-        </p:nvSpPr>
-        <p:spPr>
-          <a:xfrm>
-            <a:off x="6217920" y="5138928"/>
-            <a:ext cx="5669280" cy="1371600"/>
-          </a:xfrm>
-          <a:prstGeom prst="rect">
-            <a:avLst/>
-          </a:prstGeom>
-          <a:noFill/>
-        </p:spPr>
-        <p:txBody>
-          <a:bodyPr wrap="square" lIns="45720" rIns="45720" tIns="18288" bIns="18288" anchor="t">
-            <a:spAutoFit/>
-          </a:bodyPr>
-          <a:lstStyle/>
-          <a:p>
-            <a:pPr algn="l"/>
-            <a:r>
-              <a:rPr sz="1100" b="0">
-                <a:solidFill>
-                  <a:srgbClr val="333333"/>
-                </a:solidFill>
-                <a:latin typeface="Calibri"/>
-              </a:rPr>
-              <a:t>Long-lived TLS / gRPC streams won't reconnect on DNS-only failover.</a:t>
-            </a:r>
-          </a:p>
-          <a:p>
-            <a:pPr algn="l"/>
-            <a:r>
-              <a:rPr sz="1100" b="0">
-                <a:solidFill>
-                  <a:srgbClr val="333333"/>
-                </a:solidFill>
-                <a:latin typeface="Calibri"/>
-              </a:rPr>
-              <a:t>Mitigations: TCP RST from the LB to force reconnect; connection-draining timers on the LTM; short max-connection-age limits set by the gateway. Document this in the DR runbook for affected clients.</a:t>
-            </a:r>
-          </a:p>
-        </p:txBody>
-      </p:sp>
-      <p:sp>
-        <p:nvSpPr>
-          <p:cNvPr id="13" name="Rectangle 12"/>
           <p:cNvSpPr/>
           <p:nvPr/>
         </p:nvSpPr>
@@ -12102,7 +14565,7 @@
       </p:sp>
       <p:sp>
         <p:nvSpPr>
-          <p:cNvPr id="14" name="TextBox 13"/>
+          <p:cNvPr id="7" name="TextBox 6"/>
           <p:cNvSpPr txBox="1"/>
           <p:nvPr/>
         </p:nvSpPr>
@@ -12137,7 +14600,7 @@
       </p:sp>
       <p:sp>
         <p:nvSpPr>
-          <p:cNvPr id="15" name="TextBox 14"/>
+          <p:cNvPr id="8" name="TextBox 7"/>
           <p:cNvSpPr txBox="1"/>
           <p:nvPr/>
         </p:nvSpPr>
@@ -12165,7 +14628,7 @@
                 </a:solidFill>
                 <a:latin typeface="Calibri"/>
               </a:rPr>
-              <a:t>8 / 10</a:t>
+              <a:t>8 / 11</a:t>
             </a:r>
           </a:p>
         </p:txBody>
@@ -12261,7 +14724,7 @@
                 </a:solidFill>
                 <a:latin typeface="Calibri"/>
               </a:rPr>
-              <a:t>Config replication — Connected vs Local mode</a:t>
+              <a:t>Disaster recovery — posture options</a:t>
             </a:r>
           </a:p>
         </p:txBody>
@@ -12296,21 +14759,635 @@
                 </a:solidFill>
                 <a:latin typeface="Calibri"/>
               </a:rPr>
-              <a:t>How declarative state stays in lockstep across replicas and DCs in real time</a:t>
+              <a:t>Pick the RTO/RPO point that matches your business continuity requirement and budget</a:t>
             </a:r>
           </a:p>
         </p:txBody>
       </p:sp>
+      <p:graphicFrame>
+        <p:nvGraphicFramePr>
+          <p:cNvPr id="5" name="Table 4"/>
+          <p:cNvGraphicFramePr>
+            <a:graphicFrameLocks noGrp="1"/>
+          </p:cNvGraphicFramePr>
+          <p:nvPr/>
+        </p:nvGraphicFramePr>
+        <p:xfrm>
+          <a:off x="274320" y="1417320"/>
+          <a:ext cx="11612880" cy="2194560"/>
+        </p:xfrm>
+        <a:graphic>
+          <a:graphicData uri="http://schemas.openxmlformats.org/drawingml/2006/table">
+            <a:tbl>
+              <a:tblPr firstRow="1" bandRow="1">
+                <a:tableStyleId>{5C22544A-7EE6-4342-B048-85BDC9FD1C3A}</a:tableStyleId>
+              </a:tblPr>
+              <a:tblGrid>
+                <a:gridCol w="2743200"/>
+                <a:gridCol w="4114800"/>
+                <a:gridCol w="1280160"/>
+                <a:gridCol w="2194560"/>
+                <a:gridCol w="1280160"/>
+              </a:tblGrid>
+              <a:tr h="438912">
+                <a:tc>
+                  <a:txBody>
+                    <a:bodyPr wrap="square"/>
+                    <a:lstStyle/>
+                    <a:p>
+                      <a:pPr algn="l"/>
+                      <a:r>
+                        <a:rPr sz="1200" b="1">
+                          <a:solidFill>
+                            <a:srgbClr val="FFFFFF"/>
+                          </a:solidFill>
+                          <a:latin typeface="Calibri"/>
+                        </a:rPr>
+                        <a:t>Posture</a:t>
+                      </a:r>
+                    </a:p>
+                  </a:txBody>
+                  <a:tcPr marL="73152" marR="73152" marT="36576" marB="36576">
+                    <a:solidFill>
+                      <a:srgbClr val="1F4E79"/>
+                    </a:solidFill>
+                  </a:tcPr>
+                </a:tc>
+                <a:tc>
+                  <a:txBody>
+                    <a:bodyPr wrap="square"/>
+                    <a:lstStyle/>
+                    <a:p>
+                      <a:pPr algn="l"/>
+                      <a:r>
+                        <a:rPr sz="1200" b="1">
+                          <a:solidFill>
+                            <a:srgbClr val="FFFFFF"/>
+                          </a:solidFill>
+                          <a:latin typeface="Calibri"/>
+                        </a:rPr>
+                        <a:t>Description</a:t>
+                      </a:r>
+                    </a:p>
+                  </a:txBody>
+                  <a:tcPr marL="73152" marR="73152" marT="36576" marB="36576">
+                    <a:solidFill>
+                      <a:srgbClr val="1F4E79"/>
+                    </a:solidFill>
+                  </a:tcPr>
+                </a:tc>
+                <a:tc>
+                  <a:txBody>
+                    <a:bodyPr wrap="square"/>
+                    <a:lstStyle/>
+                    <a:p>
+                      <a:pPr algn="l"/>
+                      <a:r>
+                        <a:rPr sz="1200" b="1">
+                          <a:solidFill>
+                            <a:srgbClr val="FFFFFF"/>
+                          </a:solidFill>
+                          <a:latin typeface="Calibri"/>
+                        </a:rPr>
+                        <a:t>RTO</a:t>
+                      </a:r>
+                    </a:p>
+                  </a:txBody>
+                  <a:tcPr marL="73152" marR="73152" marT="36576" marB="36576">
+                    <a:solidFill>
+                      <a:srgbClr val="1F4E79"/>
+                    </a:solidFill>
+                  </a:tcPr>
+                </a:tc>
+                <a:tc>
+                  <a:txBody>
+                    <a:bodyPr wrap="square"/>
+                    <a:lstStyle/>
+                    <a:p>
+                      <a:pPr algn="l"/>
+                      <a:r>
+                        <a:rPr sz="1200" b="1">
+                          <a:solidFill>
+                            <a:srgbClr val="FFFFFF"/>
+                          </a:solidFill>
+                          <a:latin typeface="Calibri"/>
+                        </a:rPr>
+                        <a:t>RPO</a:t>
+                      </a:r>
+                    </a:p>
+                  </a:txBody>
+                  <a:tcPr marL="73152" marR="73152" marT="36576" marB="36576">
+                    <a:solidFill>
+                      <a:srgbClr val="1F4E79"/>
+                    </a:solidFill>
+                  </a:tcPr>
+                </a:tc>
+                <a:tc>
+                  <a:txBody>
+                    <a:bodyPr wrap="square"/>
+                    <a:lstStyle/>
+                    <a:p>
+                      <a:pPr algn="l"/>
+                      <a:r>
+                        <a:rPr sz="1200" b="1">
+                          <a:solidFill>
+                            <a:srgbClr val="FFFFFF"/>
+                          </a:solidFill>
+                          <a:latin typeface="Calibri"/>
+                        </a:rPr>
+                        <a:t>Cost (vs single DC)</a:t>
+                      </a:r>
+                    </a:p>
+                  </a:txBody>
+                  <a:tcPr marL="73152" marR="73152" marT="36576" marB="36576">
+                    <a:solidFill>
+                      <a:srgbClr val="1F4E79"/>
+                    </a:solidFill>
+                  </a:tcPr>
+                </a:tc>
+              </a:tr>
+              <a:tr h="438912">
+                <a:tc>
+                  <a:txBody>
+                    <a:bodyPr wrap="square"/>
+                    <a:lstStyle/>
+                    <a:p>
+                      <a:pPr algn="l"/>
+                      <a:r>
+                        <a:rPr sz="1100" b="0">
+                          <a:solidFill>
+                            <a:srgbClr val="333333"/>
+                          </a:solidFill>
+                          <a:latin typeface="Calibri"/>
+                        </a:rPr>
+                        <a:t>A. Cold standby</a:t>
+                      </a:r>
+                    </a:p>
+                  </a:txBody>
+                  <a:tcPr marL="73152" marR="73152" marT="36576" marB="36576">
+                    <a:solidFill>
+                      <a:srgbClr val="FFFFFF"/>
+                    </a:solidFill>
+                  </a:tcPr>
+                </a:tc>
+                <a:tc>
+                  <a:txBody>
+                    <a:bodyPr wrap="square"/>
+                    <a:lstStyle/>
+                    <a:p>
+                      <a:pPr algn="l"/>
+                      <a:r>
+                        <a:rPr sz="1100" b="0">
+                          <a:solidFill>
+                            <a:srgbClr val="333333"/>
+                          </a:solidFill>
+                          <a:latin typeface="Calibri"/>
+                        </a:rPr>
+                        <a:t>DR site provisioned but stopped; manual power-on + DNS flip on failure</a:t>
+                      </a:r>
+                    </a:p>
+                  </a:txBody>
+                  <a:tcPr marL="73152" marR="73152" marT="36576" marB="36576">
+                    <a:solidFill>
+                      <a:srgbClr val="FFFFFF"/>
+                    </a:solidFill>
+                  </a:tcPr>
+                </a:tc>
+                <a:tc>
+                  <a:txBody>
+                    <a:bodyPr wrap="square"/>
+                    <a:lstStyle/>
+                    <a:p>
+                      <a:pPr algn="l"/>
+                      <a:r>
+                        <a:rPr sz="1100" b="0">
+                          <a:solidFill>
+                            <a:srgbClr val="333333"/>
+                          </a:solidFill>
+                          <a:latin typeface="Calibri"/>
+                        </a:rPr>
+                        <a:t>30–60 min</a:t>
+                      </a:r>
+                    </a:p>
+                  </a:txBody>
+                  <a:tcPr marL="73152" marR="73152" marT="36576" marB="36576">
+                    <a:solidFill>
+                      <a:srgbClr val="FFFFFF"/>
+                    </a:solidFill>
+                  </a:tcPr>
+                </a:tc>
+                <a:tc>
+                  <a:txBody>
+                    <a:bodyPr wrap="square"/>
+                    <a:lstStyle/>
+                    <a:p>
+                      <a:pPr algn="l"/>
+                      <a:r>
+                        <a:rPr sz="1100" b="0">
+                          <a:solidFill>
+                            <a:srgbClr val="333333"/>
+                          </a:solidFill>
+                          <a:latin typeface="Calibri"/>
+                        </a:rPr>
+                        <a:t>Zero for config (declarative)</a:t>
+                      </a:r>
+                    </a:p>
+                  </a:txBody>
+                  <a:tcPr marL="73152" marR="73152" marT="36576" marB="36576">
+                    <a:solidFill>
+                      <a:srgbClr val="FFFFFF"/>
+                    </a:solidFill>
+                  </a:tcPr>
+                </a:tc>
+                <a:tc>
+                  <a:txBody>
+                    <a:bodyPr wrap="square"/>
+                    <a:lstStyle/>
+                    <a:p>
+                      <a:pPr algn="l"/>
+                      <a:r>
+                        <a:rPr sz="1100" b="0">
+                          <a:solidFill>
+                            <a:srgbClr val="333333"/>
+                          </a:solidFill>
+                          <a:latin typeface="Calibri"/>
+                        </a:rPr>
+                        <a:t>1.1×</a:t>
+                      </a:r>
+                    </a:p>
+                  </a:txBody>
+                  <a:tcPr marL="73152" marR="73152" marT="36576" marB="36576">
+                    <a:solidFill>
+                      <a:srgbClr val="FFFFFF"/>
+                    </a:solidFill>
+                  </a:tcPr>
+                </a:tc>
+              </a:tr>
+              <a:tr h="438912">
+                <a:tc>
+                  <a:txBody>
+                    <a:bodyPr wrap="square"/>
+                    <a:lstStyle/>
+                    <a:p>
+                      <a:pPr algn="l"/>
+                      <a:r>
+                        <a:rPr sz="1100" b="0">
+                          <a:solidFill>
+                            <a:srgbClr val="333333"/>
+                          </a:solidFill>
+                          <a:latin typeface="Calibri"/>
+                        </a:rPr>
+                        <a:t>B. Warm standby (active/passive)</a:t>
+                      </a:r>
+                    </a:p>
+                  </a:txBody>
+                  <a:tcPr marL="73152" marR="73152" marT="36576" marB="36576">
+                    <a:solidFill>
+                      <a:srgbClr val="F2F2F2"/>
+                    </a:solidFill>
+                  </a:tcPr>
+                </a:tc>
+                <a:tc>
+                  <a:txBody>
+                    <a:bodyPr wrap="square"/>
+                    <a:lstStyle/>
+                    <a:p>
+                      <a:pPr algn="l"/>
+                      <a:r>
+                        <a:rPr sz="1100" b="0">
+                          <a:solidFill>
+                            <a:srgbClr val="333333"/>
+                          </a:solidFill>
+                          <a:latin typeface="Calibri"/>
+                        </a:rPr>
+                        <a:t>DR site running but idle; GSLB sends 100% to primary; on failure flips to DR</a:t>
+                      </a:r>
+                    </a:p>
+                  </a:txBody>
+                  <a:tcPr marL="73152" marR="73152" marT="36576" marB="36576">
+                    <a:solidFill>
+                      <a:srgbClr val="F2F2F2"/>
+                    </a:solidFill>
+                  </a:tcPr>
+                </a:tc>
+                <a:tc>
+                  <a:txBody>
+                    <a:bodyPr wrap="square"/>
+                    <a:lstStyle/>
+                    <a:p>
+                      <a:pPr algn="l"/>
+                      <a:r>
+                        <a:rPr sz="1100" b="0">
+                          <a:solidFill>
+                            <a:srgbClr val="333333"/>
+                          </a:solidFill>
+                          <a:latin typeface="Calibri"/>
+                        </a:rPr>
+                        <a:t>1–5 min</a:t>
+                      </a:r>
+                    </a:p>
+                  </a:txBody>
+                  <a:tcPr marL="73152" marR="73152" marT="36576" marB="36576">
+                    <a:solidFill>
+                      <a:srgbClr val="F2F2F2"/>
+                    </a:solidFill>
+                  </a:tcPr>
+                </a:tc>
+                <a:tc>
+                  <a:txBody>
+                    <a:bodyPr wrap="square"/>
+                    <a:lstStyle/>
+                    <a:p>
+                      <a:pPr algn="l"/>
+                      <a:r>
+                        <a:rPr sz="1100" b="0">
+                          <a:solidFill>
+                            <a:srgbClr val="333333"/>
+                          </a:solidFill>
+                          <a:latin typeface="Calibri"/>
+                        </a:rPr>
+                        <a:t>Zero</a:t>
+                      </a:r>
+                    </a:p>
+                  </a:txBody>
+                  <a:tcPr marL="73152" marR="73152" marT="36576" marB="36576">
+                    <a:solidFill>
+                      <a:srgbClr val="F2F2F2"/>
+                    </a:solidFill>
+                  </a:tcPr>
+                </a:tc>
+                <a:tc>
+                  <a:txBody>
+                    <a:bodyPr wrap="square"/>
+                    <a:lstStyle/>
+                    <a:p>
+                      <a:pPr algn="l"/>
+                      <a:r>
+                        <a:rPr sz="1100" b="0">
+                          <a:solidFill>
+                            <a:srgbClr val="333333"/>
+                          </a:solidFill>
+                          <a:latin typeface="Calibri"/>
+                        </a:rPr>
+                        <a:t>1.8×</a:t>
+                      </a:r>
+                    </a:p>
+                  </a:txBody>
+                  <a:tcPr marL="73152" marR="73152" marT="36576" marB="36576">
+                    <a:solidFill>
+                      <a:srgbClr val="F2F2F2"/>
+                    </a:solidFill>
+                  </a:tcPr>
+                </a:tc>
+              </a:tr>
+              <a:tr h="438912">
+                <a:tc>
+                  <a:txBody>
+                    <a:bodyPr wrap="square"/>
+                    <a:lstStyle/>
+                    <a:p>
+                      <a:pPr algn="l"/>
+                      <a:r>
+                        <a:rPr sz="1100" b="0">
+                          <a:solidFill>
+                            <a:srgbClr val="333333"/>
+                          </a:solidFill>
+                          <a:latin typeface="Calibri"/>
+                        </a:rPr>
+                        <a:t>C. Active/active across DCs in same metro  (recommended)</a:t>
+                      </a:r>
+                    </a:p>
+                  </a:txBody>
+                  <a:tcPr marL="73152" marR="73152" marT="36576" marB="36576">
+                    <a:solidFill>
+                      <a:srgbClr val="FFFFFF"/>
+                    </a:solidFill>
+                  </a:tcPr>
+                </a:tc>
+                <a:tc>
+                  <a:txBody>
+                    <a:bodyPr wrap="square"/>
+                    <a:lstStyle/>
+                    <a:p>
+                      <a:pPr algn="l"/>
+                      <a:r>
+                        <a:rPr sz="1100" b="0">
+                          <a:solidFill>
+                            <a:srgbClr val="333333"/>
+                          </a:solidFill>
+                          <a:latin typeface="Calibri"/>
+                        </a:rPr>
+                        <a:t>Both DCs serve traffic; GSLB weighted round-robin; DC failure = GSLB removes node</a:t>
+                      </a:r>
+                    </a:p>
+                  </a:txBody>
+                  <a:tcPr marL="73152" marR="73152" marT="36576" marB="36576">
+                    <a:solidFill>
+                      <a:srgbClr val="FFFFFF"/>
+                    </a:solidFill>
+                  </a:tcPr>
+                </a:tc>
+                <a:tc>
+                  <a:txBody>
+                    <a:bodyPr wrap="square"/>
+                    <a:lstStyle/>
+                    <a:p>
+                      <a:pPr algn="l"/>
+                      <a:r>
+                        <a:rPr sz="1100" b="0">
+                          <a:solidFill>
+                            <a:srgbClr val="333333"/>
+                          </a:solidFill>
+                          <a:latin typeface="Calibri"/>
+                        </a:rPr>
+                        <a:t>&lt; 60 s</a:t>
+                      </a:r>
+                    </a:p>
+                  </a:txBody>
+                  <a:tcPr marL="73152" marR="73152" marT="36576" marB="36576">
+                    <a:solidFill>
+                      <a:srgbClr val="FFFFFF"/>
+                    </a:solidFill>
+                  </a:tcPr>
+                </a:tc>
+                <a:tc>
+                  <a:txBody>
+                    <a:bodyPr wrap="square"/>
+                    <a:lstStyle/>
+                    <a:p>
+                      <a:pPr algn="l"/>
+                      <a:r>
+                        <a:rPr sz="1100" b="0">
+                          <a:solidFill>
+                            <a:srgbClr val="333333"/>
+                          </a:solidFill>
+                          <a:latin typeface="Calibri"/>
+                        </a:rPr>
+                        <a:t>Zero</a:t>
+                      </a:r>
+                    </a:p>
+                  </a:txBody>
+                  <a:tcPr marL="73152" marR="73152" marT="36576" marB="36576">
+                    <a:solidFill>
+                      <a:srgbClr val="FFFFFF"/>
+                    </a:solidFill>
+                  </a:tcPr>
+                </a:tc>
+                <a:tc>
+                  <a:txBody>
+                    <a:bodyPr wrap="square"/>
+                    <a:lstStyle/>
+                    <a:p>
+                      <a:pPr algn="l"/>
+                      <a:r>
+                        <a:rPr sz="1100" b="0">
+                          <a:solidFill>
+                            <a:srgbClr val="333333"/>
+                          </a:solidFill>
+                          <a:latin typeface="Calibri"/>
+                        </a:rPr>
+                        <a:t>2.0×</a:t>
+                      </a:r>
+                    </a:p>
+                  </a:txBody>
+                  <a:tcPr marL="73152" marR="73152" marT="36576" marB="36576">
+                    <a:solidFill>
+                      <a:srgbClr val="FFFFFF"/>
+                    </a:solidFill>
+                  </a:tcPr>
+                </a:tc>
+              </a:tr>
+              <a:tr h="438912">
+                <a:tc>
+                  <a:txBody>
+                    <a:bodyPr wrap="square"/>
+                    <a:lstStyle/>
+                    <a:p>
+                      <a:pPr algn="l"/>
+                      <a:r>
+                        <a:rPr sz="1100" b="0">
+                          <a:solidFill>
+                            <a:srgbClr val="333333"/>
+                          </a:solidFill>
+                          <a:latin typeface="Calibri"/>
+                        </a:rPr>
+                        <a:t>D. Multi-region active/active</a:t>
+                      </a:r>
+                    </a:p>
+                  </a:txBody>
+                  <a:tcPr marL="73152" marR="73152" marT="36576" marB="36576">
+                    <a:solidFill>
+                      <a:srgbClr val="F2F2F2"/>
+                    </a:solidFill>
+                  </a:tcPr>
+                </a:tc>
+                <a:tc>
+                  <a:txBody>
+                    <a:bodyPr wrap="square"/>
+                    <a:lstStyle/>
+                    <a:p>
+                      <a:pPr algn="l"/>
+                      <a:r>
+                        <a:rPr sz="1100" b="0">
+                          <a:solidFill>
+                            <a:srgbClr val="333333"/>
+                          </a:solidFill>
+                          <a:latin typeface="Calibri"/>
+                        </a:rPr>
+                        <a:t>DCs in different cities/regions (latency &gt; 50ms apart); geo-affinity routing</a:t>
+                      </a:r>
+                    </a:p>
+                  </a:txBody>
+                  <a:tcPr marL="73152" marR="73152" marT="36576" marB="36576">
+                    <a:solidFill>
+                      <a:srgbClr val="F2F2F2"/>
+                    </a:solidFill>
+                  </a:tcPr>
+                </a:tc>
+                <a:tc>
+                  <a:txBody>
+                    <a:bodyPr wrap="square"/>
+                    <a:lstStyle/>
+                    <a:p>
+                      <a:pPr algn="l"/>
+                      <a:r>
+                        <a:rPr sz="1100" b="0">
+                          <a:solidFill>
+                            <a:srgbClr val="333333"/>
+                          </a:solidFill>
+                          <a:latin typeface="Calibri"/>
+                        </a:rPr>
+                        <a:t>&lt; 60 s</a:t>
+                      </a:r>
+                    </a:p>
+                  </a:txBody>
+                  <a:tcPr marL="73152" marR="73152" marT="36576" marB="36576">
+                    <a:solidFill>
+                      <a:srgbClr val="F2F2F2"/>
+                    </a:solidFill>
+                  </a:tcPr>
+                </a:tc>
+                <a:tc>
+                  <a:txBody>
+                    <a:bodyPr wrap="square"/>
+                    <a:lstStyle/>
+                    <a:p>
+                      <a:pPr algn="l"/>
+                      <a:r>
+                        <a:rPr sz="1100" b="0">
+                          <a:solidFill>
+                            <a:srgbClr val="333333"/>
+                          </a:solidFill>
+                          <a:latin typeface="Calibri"/>
+                        </a:rPr>
+                        <a:t>Near-zero (config) / backend-dependent (data)</a:t>
+                      </a:r>
+                    </a:p>
+                  </a:txBody>
+                  <a:tcPr marL="73152" marR="73152" marT="36576" marB="36576">
+                    <a:solidFill>
+                      <a:srgbClr val="F2F2F2"/>
+                    </a:solidFill>
+                  </a:tcPr>
+                </a:tc>
+                <a:tc>
+                  <a:txBody>
+                    <a:bodyPr wrap="square"/>
+                    <a:lstStyle/>
+                    <a:p>
+                      <a:pPr algn="l"/>
+                      <a:r>
+                        <a:rPr sz="1100" b="0">
+                          <a:solidFill>
+                            <a:srgbClr val="333333"/>
+                          </a:solidFill>
+                          <a:latin typeface="Calibri"/>
+                        </a:rPr>
+                        <a:t>2.2×</a:t>
+                      </a:r>
+                    </a:p>
+                  </a:txBody>
+                  <a:tcPr marL="73152" marR="73152" marT="36576" marB="36576">
+                    <a:solidFill>
+                      <a:srgbClr val="F2F2F2"/>
+                    </a:solidFill>
+                  </a:tcPr>
+                </a:tc>
+              </a:tr>
+            </a:tbl>
+          </a:graphicData>
+        </a:graphic>
+      </p:graphicFrame>
       <p:sp>
         <p:nvSpPr>
-          <p:cNvPr id="5" name="Rectangle 4"/>
+          <p:cNvPr id="6" name="Rectangle 5"/>
           <p:cNvSpPr/>
           <p:nvPr/>
         </p:nvSpPr>
         <p:spPr>
           <a:xfrm>
-            <a:off x="365760" y="1417320"/>
-            <a:ext cx="5669280" cy="4937760"/>
+            <a:off x="274320" y="3749039"/>
+            <a:ext cx="11612880" cy="914400"/>
           </a:xfrm>
           <a:prstGeom prst="rect">
             <a:avLst/>
@@ -12346,14 +15423,14 @@
       </p:sp>
       <p:sp>
         <p:nvSpPr>
-          <p:cNvPr id="6" name="TextBox 5"/>
+          <p:cNvPr id="7" name="TextBox 6"/>
           <p:cNvSpPr txBox="1"/>
           <p:nvPr/>
         </p:nvSpPr>
         <p:spPr>
           <a:xfrm>
-            <a:off x="502920" y="1508760"/>
-            <a:ext cx="5486400" cy="365760"/>
+            <a:off x="457200" y="3822191"/>
+            <a:ext cx="7315200" cy="320040"/>
           </a:xfrm>
           <a:prstGeom prst="rect">
             <a:avLst/>
@@ -12368,27 +15445,27 @@
           <a:p>
             <a:pPr algn="l"/>
             <a:r>
-              <a:rPr sz="1500" b="1">
+              <a:rPr sz="1400" b="1">
                 <a:solidFill>
                   <a:srgbClr val="1F4E79"/>
                 </a:solidFill>
                 <a:latin typeface="Calibri"/>
               </a:rPr>
-              <a:t>Connected mode — Anypoint as source of truth</a:t>
+              <a:t>Recommendation for citizen-data workload</a:t>
             </a:r>
           </a:p>
         </p:txBody>
       </p:sp>
       <p:sp>
         <p:nvSpPr>
-          <p:cNvPr id="7" name="TextBox 6"/>
+          <p:cNvPr id="8" name="TextBox 7"/>
           <p:cNvSpPr txBox="1"/>
           <p:nvPr/>
         </p:nvSpPr>
         <p:spPr>
           <a:xfrm>
-            <a:off x="502920" y="1920240"/>
-            <a:ext cx="5486400" cy="1463040"/>
+            <a:off x="457200" y="4114800"/>
+            <a:ext cx="11338560" cy="502920"/>
           </a:xfrm>
           <a:prstGeom prst="rect">
             <a:avLst/>
@@ -12403,432 +15480,27 @@
           <a:p>
             <a:pPr algn="l"/>
             <a:r>
-              <a:rPr sz="1100" b="0">
+              <a:rPr sz="1200" b="0">
                 <a:solidFill>
                   <a:srgbClr val="333333"/>
                 </a:solidFill>
                 <a:latin typeface="Calibri"/>
               </a:rPr>
-              <a:t>Every replica maintains an outbound long-polled HTTPS connection to anypoint.mulesoft.com. Policy changes in API Manager push to all connected replicas globally within seconds. Each replica caches policy locally so brief Anypoint outages don't drop traffic.</a:t>
+              <a:t>Posture C — active/active across DC-1 and DC-2 within the same metro. RTO &lt; 60s with F5 GSLB + 30s DNS TTL is achievable and proven. Multi-region (D) only when geographic resilience is explicitly required.</a:t>
             </a:r>
-          </a:p>
-        </p:txBody>
-      </p:sp>
-      <p:graphicFrame>
-        <p:nvGraphicFramePr>
-          <p:cNvPr id="8" name="Table 7"/>
-          <p:cNvGraphicFramePr>
-            <a:graphicFrameLocks noGrp="1"/>
-          </p:cNvGraphicFramePr>
-          <p:nvPr/>
-        </p:nvGraphicFramePr>
-        <p:xfrm>
-          <a:off x="502920" y="3657600"/>
-          <a:ext cx="5394960" cy="2606040"/>
-        </p:xfrm>
-        <a:graphic>
-          <a:graphicData uri="http://schemas.openxmlformats.org/drawingml/2006/table">
-            <a:tbl>
-              <a:tblPr firstRow="1" bandRow="1">
-                <a:tableStyleId>{5C22544A-7EE6-4342-B048-85BDC9FD1C3A}</a:tableStyleId>
-              </a:tblPr>
-              <a:tblGrid>
-                <a:gridCol w="2743200"/>
-                <a:gridCol w="2651760"/>
-              </a:tblGrid>
-              <a:tr h="372291">
-                <a:tc>
-                  <a:txBody>
-                    <a:bodyPr wrap="square"/>
-                    <a:lstStyle/>
-                    <a:p>
-                      <a:pPr algn="l"/>
-                      <a:r>
-                        <a:rPr sz="1100" b="1">
-                          <a:solidFill>
-                            <a:srgbClr val="FFFFFF"/>
-                          </a:solidFill>
-                          <a:latin typeface="Calibri"/>
-                        </a:rPr>
-                        <a:t>Property</a:t>
-                      </a:r>
-                    </a:p>
-                  </a:txBody>
-                  <a:tcPr marL="73152" marR="73152" marT="36576" marB="36576">
-                    <a:solidFill>
-                      <a:srgbClr val="2E75B6"/>
-                    </a:solidFill>
-                  </a:tcPr>
-                </a:tc>
-                <a:tc>
-                  <a:txBody>
-                    <a:bodyPr wrap="square"/>
-                    <a:lstStyle/>
-                    <a:p>
-                      <a:pPr algn="l"/>
-                      <a:r>
-                        <a:rPr sz="1100" b="1">
-                          <a:solidFill>
-                            <a:srgbClr val="FFFFFF"/>
-                          </a:solidFill>
-                          <a:latin typeface="Calibri"/>
-                        </a:rPr>
-                        <a:t>Value</a:t>
-                      </a:r>
-                    </a:p>
-                  </a:txBody>
-                  <a:tcPr marL="73152" marR="73152" marT="36576" marB="36576">
-                    <a:solidFill>
-                      <a:srgbClr val="2E75B6"/>
-                    </a:solidFill>
-                  </a:tcPr>
-                </a:tc>
-              </a:tr>
-              <a:tr h="372291">
-                <a:tc>
-                  <a:txBody>
-                    <a:bodyPr wrap="square"/>
-                    <a:lstStyle/>
-                    <a:p>
-                      <a:pPr algn="l"/>
-                      <a:r>
-                        <a:rPr sz="1000" b="0">
-                          <a:solidFill>
-                            <a:srgbClr val="333333"/>
-                          </a:solidFill>
-                          <a:latin typeface="Calibri"/>
-                        </a:rPr>
-                        <a:t>Replication mechanism</a:t>
-                      </a:r>
-                    </a:p>
-                  </a:txBody>
-                  <a:tcPr marL="73152" marR="73152" marT="36576" marB="36576">
-                    <a:solidFill>
-                      <a:srgbClr val="FFFFFF"/>
-                    </a:solidFill>
-                  </a:tcPr>
-                </a:tc>
-                <a:tc>
-                  <a:txBody>
-                    <a:bodyPr wrap="square"/>
-                    <a:lstStyle/>
-                    <a:p>
-                      <a:pPr algn="l"/>
-                      <a:r>
-                        <a:rPr sz="1000" b="0">
-                          <a:solidFill>
-                            <a:srgbClr val="333333"/>
-                          </a:solidFill>
-                          <a:latin typeface="Calibri"/>
-                        </a:rPr>
-                        <a:t>Anypoint Control Plane push</a:t>
-                      </a:r>
-                    </a:p>
-                  </a:txBody>
-                  <a:tcPr marL="73152" marR="73152" marT="36576" marB="36576">
-                    <a:solidFill>
-                      <a:srgbClr val="FFFFFF"/>
-                    </a:solidFill>
-                  </a:tcPr>
-                </a:tc>
-              </a:tr>
-              <a:tr h="372291">
-                <a:tc>
-                  <a:txBody>
-                    <a:bodyPr wrap="square"/>
-                    <a:lstStyle/>
-                    <a:p>
-                      <a:pPr algn="l"/>
-                      <a:r>
-                        <a:rPr sz="1000" b="0">
-                          <a:solidFill>
-                            <a:srgbClr val="333333"/>
-                          </a:solidFill>
-                          <a:latin typeface="Calibri"/>
-                        </a:rPr>
-                        <a:t>Push latency (change → live)</a:t>
-                      </a:r>
-                    </a:p>
-                  </a:txBody>
-                  <a:tcPr marL="73152" marR="73152" marT="36576" marB="36576">
-                    <a:solidFill>
-                      <a:srgbClr val="F2F2F2"/>
-                    </a:solidFill>
-                  </a:tcPr>
-                </a:tc>
-                <a:tc>
-                  <a:txBody>
-                    <a:bodyPr wrap="square"/>
-                    <a:lstStyle/>
-                    <a:p>
-                      <a:pPr algn="l"/>
-                      <a:r>
-                        <a:rPr sz="1000" b="0">
-                          <a:solidFill>
-                            <a:srgbClr val="333333"/>
-                          </a:solidFill>
-                          <a:latin typeface="Calibri"/>
-                        </a:rPr>
-                        <a:t>2–10 s end-to-end</a:t>
-                      </a:r>
-                    </a:p>
-                  </a:txBody>
-                  <a:tcPr marL="73152" marR="73152" marT="36576" marB="36576">
-                    <a:solidFill>
-                      <a:srgbClr val="F2F2F2"/>
-                    </a:solidFill>
-                  </a:tcPr>
-                </a:tc>
-              </a:tr>
-              <a:tr h="372291">
-                <a:tc>
-                  <a:txBody>
-                    <a:bodyPr wrap="square"/>
-                    <a:lstStyle/>
-                    <a:p>
-                      <a:pPr algn="l"/>
-                      <a:r>
-                        <a:rPr sz="1000" b="0">
-                          <a:solidFill>
-                            <a:srgbClr val="333333"/>
-                          </a:solidFill>
-                          <a:latin typeface="Calibri"/>
-                        </a:rPr>
-                        <a:t>RPO for config</a:t>
-                      </a:r>
-                    </a:p>
-                  </a:txBody>
-                  <a:tcPr marL="73152" marR="73152" marT="36576" marB="36576">
-                    <a:solidFill>
-                      <a:srgbClr val="FFFFFF"/>
-                    </a:solidFill>
-                  </a:tcPr>
-                </a:tc>
-                <a:tc>
-                  <a:txBody>
-                    <a:bodyPr wrap="square"/>
-                    <a:lstStyle/>
-                    <a:p>
-                      <a:pPr algn="l"/>
-                      <a:r>
-                        <a:rPr sz="1000" b="0">
-                          <a:solidFill>
-                            <a:srgbClr val="333333"/>
-                          </a:solidFill>
-                          <a:latin typeface="Calibri"/>
-                        </a:rPr>
-                        <a:t>Zero</a:t>
-                      </a:r>
-                    </a:p>
-                  </a:txBody>
-                  <a:tcPr marL="73152" marR="73152" marT="36576" marB="36576">
-                    <a:solidFill>
-                      <a:srgbClr val="FFFFFF"/>
-                    </a:solidFill>
-                  </a:tcPr>
-                </a:tc>
-              </a:tr>
-              <a:tr h="372291">
-                <a:tc>
-                  <a:txBody>
-                    <a:bodyPr wrap="square"/>
-                    <a:lstStyle/>
-                    <a:p>
-                      <a:pPr algn="l"/>
-                      <a:r>
-                        <a:rPr sz="1000" b="0">
-                          <a:solidFill>
-                            <a:srgbClr val="333333"/>
-                          </a:solidFill>
-                          <a:latin typeface="Calibri"/>
-                        </a:rPr>
-                        <a:t>Customer infrastructure needed</a:t>
-                      </a:r>
-                    </a:p>
-                  </a:txBody>
-                  <a:tcPr marL="73152" marR="73152" marT="36576" marB="36576">
-                    <a:solidFill>
-                      <a:srgbClr val="F2F2F2"/>
-                    </a:solidFill>
-                  </a:tcPr>
-                </a:tc>
-                <a:tc>
-                  <a:txBody>
-                    <a:bodyPr wrap="square"/>
-                    <a:lstStyle/>
-                    <a:p>
-                      <a:pPr algn="l"/>
-                      <a:r>
-                        <a:rPr sz="1000" b="0">
-                          <a:solidFill>
-                            <a:srgbClr val="333333"/>
-                          </a:solidFill>
-                          <a:latin typeface="Calibri"/>
-                        </a:rPr>
-                        <a:t>None</a:t>
-                      </a:r>
-                    </a:p>
-                  </a:txBody>
-                  <a:tcPr marL="73152" marR="73152" marT="36576" marB="36576">
-                    <a:solidFill>
-                      <a:srgbClr val="F2F2F2"/>
-                    </a:solidFill>
-                  </a:tcPr>
-                </a:tc>
-              </a:tr>
-              <a:tr h="372291">
-                <a:tc>
-                  <a:txBody>
-                    <a:bodyPr wrap="square"/>
-                    <a:lstStyle/>
-                    <a:p>
-                      <a:pPr algn="l"/>
-                      <a:r>
-                        <a:rPr sz="1000" b="0">
-                          <a:solidFill>
-                            <a:srgbClr val="333333"/>
-                          </a:solidFill>
-                          <a:latin typeface="Calibri"/>
-                        </a:rPr>
-                        <a:t>Resilience to Anypoint outage</a:t>
-                      </a:r>
-                    </a:p>
-                  </a:txBody>
-                  <a:tcPr marL="73152" marR="73152" marT="36576" marB="36576">
-                    <a:solidFill>
-                      <a:srgbClr val="FFFFFF"/>
-                    </a:solidFill>
-                  </a:tcPr>
-                </a:tc>
-                <a:tc>
-                  <a:txBody>
-                    <a:bodyPr wrap="square"/>
-                    <a:lstStyle/>
-                    <a:p>
-                      <a:pPr algn="l"/>
-                      <a:r>
-                        <a:rPr sz="1000" b="0">
-                          <a:solidFill>
-                            <a:srgbClr val="333333"/>
-                          </a:solidFill>
-                          <a:latin typeface="Calibri"/>
-                        </a:rPr>
-                        <a:t>Local cache ~24 h</a:t>
-                      </a:r>
-                    </a:p>
-                  </a:txBody>
-                  <a:tcPr marL="73152" marR="73152" marT="36576" marB="36576">
-                    <a:solidFill>
-                      <a:srgbClr val="FFFFFF"/>
-                    </a:solidFill>
-                  </a:tcPr>
-                </a:tc>
-              </a:tr>
-              <a:tr h="372294">
-                <a:tc>
-                  <a:txBody>
-                    <a:bodyPr wrap="square"/>
-                    <a:lstStyle/>
-                    <a:p>
-                      <a:pPr algn="l"/>
-                      <a:r>
-                        <a:rPr sz="1000" b="0">
-                          <a:solidFill>
-                            <a:srgbClr val="333333"/>
-                          </a:solidFill>
-                          <a:latin typeface="Calibri"/>
-                        </a:rPr>
-                        <a:t>Network requirement</a:t>
-                      </a:r>
-                    </a:p>
-                  </a:txBody>
-                  <a:tcPr marL="73152" marR="73152" marT="36576" marB="36576">
-                    <a:solidFill>
-                      <a:srgbClr val="F2F2F2"/>
-                    </a:solidFill>
-                  </a:tcPr>
-                </a:tc>
-                <a:tc>
-                  <a:txBody>
-                    <a:bodyPr wrap="square"/>
-                    <a:lstStyle/>
-                    <a:p>
-                      <a:pPr algn="l"/>
-                      <a:r>
-                        <a:rPr sz="1000" b="0">
-                          <a:solidFill>
-                            <a:srgbClr val="333333"/>
-                          </a:solidFill>
-                          <a:latin typeface="Calibri"/>
-                        </a:rPr>
-                        <a:t>Outbound 443 to anypoint.mulesoft.com</a:t>
-                      </a:r>
-                    </a:p>
-                  </a:txBody>
-                  <a:tcPr marL="73152" marR="73152" marT="36576" marB="36576">
-                    <a:solidFill>
-                      <a:srgbClr val="F2F2F2"/>
-                    </a:solidFill>
-                  </a:tcPr>
-                </a:tc>
-              </a:tr>
-            </a:tbl>
-          </a:graphicData>
-        </a:graphic>
-      </p:graphicFrame>
-      <p:sp>
-        <p:nvSpPr>
-          <p:cNvPr id="9" name="Rectangle 8"/>
-          <p:cNvSpPr/>
-          <p:nvPr/>
-        </p:nvSpPr>
-        <p:spPr>
-          <a:xfrm>
-            <a:off x="6263640" y="1417320"/>
-            <a:ext cx="5669280" cy="4937760"/>
-          </a:xfrm>
-          <a:prstGeom prst="rect">
-            <a:avLst/>
-          </a:prstGeom>
-          <a:solidFill>
-            <a:srgbClr val="F2F2F2"/>
-          </a:solidFill>
-          <a:ln>
-            <a:noFill/>
-          </a:ln>
-        </p:spPr>
-        <p:style>
-          <a:lnRef idx="1">
-            <a:schemeClr val="accent1"/>
-          </a:lnRef>
-          <a:fillRef idx="3">
-            <a:schemeClr val="accent1"/>
-          </a:fillRef>
-          <a:effectRef idx="2">
-            <a:schemeClr val="accent1"/>
-          </a:effectRef>
-          <a:fontRef idx="minor">
-            <a:schemeClr val="lt1"/>
-          </a:fontRef>
-        </p:style>
-        <p:txBody>
-          <a:bodyPr rtlCol="0" anchor="ctr"/>
-          <a:lstStyle/>
-          <a:p>
-            <a:pPr algn="ctr"/>
           </a:p>
         </p:txBody>
       </p:sp>
       <p:sp>
         <p:nvSpPr>
-          <p:cNvPr id="10" name="TextBox 9"/>
+          <p:cNvPr id="9" name="TextBox 8"/>
           <p:cNvSpPr txBox="1"/>
           <p:nvPr/>
         </p:nvSpPr>
         <p:spPr>
           <a:xfrm>
-            <a:off x="6400800" y="1508760"/>
-            <a:ext cx="5486400" cy="365760"/>
+            <a:off x="457200" y="4800600"/>
+            <a:ext cx="5486400" cy="320040"/>
           </a:xfrm>
           <a:prstGeom prst="rect">
             <a:avLst/>
@@ -12843,17 +15515,283 @@
           <a:p>
             <a:pPr algn="l"/>
             <a:r>
-              <a:rPr sz="1500" b="1">
+              <a:rPr sz="1300" b="1">
                 <a:solidFill>
                   <a:srgbClr val="1F4E79"/>
                 </a:solidFill>
                 <a:latin typeface="Calibri"/>
               </a:rPr>
-              <a:t>Local mode — Git + Ansible AWX</a:t>
+              <a:t>DNS failover math (Posture C)</a:t>
             </a:r>
           </a:p>
         </p:txBody>
       </p:sp>
+      <p:graphicFrame>
+        <p:nvGraphicFramePr>
+          <p:cNvPr id="10" name="Table 9"/>
+          <p:cNvGraphicFramePr>
+            <a:graphicFrameLocks noGrp="1"/>
+          </p:cNvGraphicFramePr>
+          <p:nvPr/>
+        </p:nvGraphicFramePr>
+        <p:xfrm>
+          <a:off x="457200" y="5166360"/>
+          <a:ext cx="5486400" cy="1371600"/>
+        </p:xfrm>
+        <a:graphic>
+          <a:graphicData uri="http://schemas.openxmlformats.org/drawingml/2006/table">
+            <a:tbl>
+              <a:tblPr firstRow="1" bandRow="1">
+                <a:tableStyleId>{5C22544A-7EE6-4342-B048-85BDC9FD1C3A}</a:tableStyleId>
+              </a:tblPr>
+              <a:tblGrid>
+                <a:gridCol w="3657600"/>
+                <a:gridCol w="1828800"/>
+              </a:tblGrid>
+              <a:tr h="274320">
+                <a:tc>
+                  <a:txBody>
+                    <a:bodyPr wrap="square"/>
+                    <a:lstStyle/>
+                    <a:p>
+                      <a:pPr algn="l"/>
+                      <a:r>
+                        <a:rPr sz="1100" b="1">
+                          <a:solidFill>
+                            <a:srgbClr val="FFFFFF"/>
+                          </a:solidFill>
+                          <a:latin typeface="Calibri"/>
+                        </a:rPr>
+                        <a:t>Component</a:t>
+                      </a:r>
+                    </a:p>
+                  </a:txBody>
+                  <a:tcPr marL="73152" marR="73152" marT="36576" marB="36576">
+                    <a:solidFill>
+                      <a:srgbClr val="2E75B6"/>
+                    </a:solidFill>
+                  </a:tcPr>
+                </a:tc>
+                <a:tc>
+                  <a:txBody>
+                    <a:bodyPr wrap="square"/>
+                    <a:lstStyle/>
+                    <a:p>
+                      <a:pPr algn="l"/>
+                      <a:r>
+                        <a:rPr sz="1100" b="1">
+                          <a:solidFill>
+                            <a:srgbClr val="FFFFFF"/>
+                          </a:solidFill>
+                          <a:latin typeface="Calibri"/>
+                        </a:rPr>
+                        <a:t>Time</a:t>
+                      </a:r>
+                    </a:p>
+                  </a:txBody>
+                  <a:tcPr marL="73152" marR="73152" marT="36576" marB="36576">
+                    <a:solidFill>
+                      <a:srgbClr val="2E75B6"/>
+                    </a:solidFill>
+                  </a:tcPr>
+                </a:tc>
+              </a:tr>
+              <a:tr h="274320">
+                <a:tc>
+                  <a:txBody>
+                    <a:bodyPr wrap="square"/>
+                    <a:lstStyle/>
+                    <a:p>
+                      <a:pPr algn="l"/>
+                      <a:r>
+                        <a:rPr sz="1100" b="0">
+                          <a:solidFill>
+                            <a:srgbClr val="333333"/>
+                          </a:solidFill>
+                          <a:latin typeface="Calibri"/>
+                        </a:rPr>
+                        <a:t>GSLB health check interval</a:t>
+                      </a:r>
+                    </a:p>
+                  </a:txBody>
+                  <a:tcPr marL="73152" marR="73152" marT="36576" marB="36576">
+                    <a:solidFill>
+                      <a:srgbClr val="FFFFFF"/>
+                    </a:solidFill>
+                  </a:tcPr>
+                </a:tc>
+                <a:tc>
+                  <a:txBody>
+                    <a:bodyPr wrap="square"/>
+                    <a:lstStyle/>
+                    <a:p>
+                      <a:pPr algn="l"/>
+                      <a:r>
+                        <a:rPr sz="1100" b="0">
+                          <a:solidFill>
+                            <a:srgbClr val="333333"/>
+                          </a:solidFill>
+                          <a:latin typeface="Calibri"/>
+                        </a:rPr>
+                        <a:t>5–15 s</a:t>
+                      </a:r>
+                    </a:p>
+                  </a:txBody>
+                  <a:tcPr marL="73152" marR="73152" marT="36576" marB="36576">
+                    <a:solidFill>
+                      <a:srgbClr val="FFFFFF"/>
+                    </a:solidFill>
+                  </a:tcPr>
+                </a:tc>
+              </a:tr>
+              <a:tr h="274320">
+                <a:tc>
+                  <a:txBody>
+                    <a:bodyPr wrap="square"/>
+                    <a:lstStyle/>
+                    <a:p>
+                      <a:pPr algn="l"/>
+                      <a:r>
+                        <a:rPr sz="1100" b="0">
+                          <a:solidFill>
+                            <a:srgbClr val="333333"/>
+                          </a:solidFill>
+                          <a:latin typeface="Calibri"/>
+                        </a:rPr>
+                        <a:t>Failure detection (3 consecutive misses)</a:t>
+                      </a:r>
+                    </a:p>
+                  </a:txBody>
+                  <a:tcPr marL="73152" marR="73152" marT="36576" marB="36576">
+                    <a:solidFill>
+                      <a:srgbClr val="F2F2F2"/>
+                    </a:solidFill>
+                  </a:tcPr>
+                </a:tc>
+                <a:tc>
+                  <a:txBody>
+                    <a:bodyPr wrap="square"/>
+                    <a:lstStyle/>
+                    <a:p>
+                      <a:pPr algn="l"/>
+                      <a:r>
+                        <a:rPr sz="1100" b="0">
+                          <a:solidFill>
+                            <a:srgbClr val="333333"/>
+                          </a:solidFill>
+                          <a:latin typeface="Calibri"/>
+                        </a:rPr>
+                        <a:t>15–45 s</a:t>
+                      </a:r>
+                    </a:p>
+                  </a:txBody>
+                  <a:tcPr marL="73152" marR="73152" marT="36576" marB="36576">
+                    <a:solidFill>
+                      <a:srgbClr val="F2F2F2"/>
+                    </a:solidFill>
+                  </a:tcPr>
+                </a:tc>
+              </a:tr>
+              <a:tr h="274320">
+                <a:tc>
+                  <a:txBody>
+                    <a:bodyPr wrap="square"/>
+                    <a:lstStyle/>
+                    <a:p>
+                      <a:pPr algn="l"/>
+                      <a:r>
+                        <a:rPr sz="1100" b="0">
+                          <a:solidFill>
+                            <a:srgbClr val="333333"/>
+                          </a:solidFill>
+                          <a:latin typeface="Calibri"/>
+                        </a:rPr>
+                        <a:t>DNS TTL expiry on clients</a:t>
+                      </a:r>
+                    </a:p>
+                  </a:txBody>
+                  <a:tcPr marL="73152" marR="73152" marT="36576" marB="36576">
+                    <a:solidFill>
+                      <a:srgbClr val="FFFFFF"/>
+                    </a:solidFill>
+                  </a:tcPr>
+                </a:tc>
+                <a:tc>
+                  <a:txBody>
+                    <a:bodyPr wrap="square"/>
+                    <a:lstStyle/>
+                    <a:p>
+                      <a:pPr algn="l"/>
+                      <a:r>
+                        <a:rPr sz="1100" b="0">
+                          <a:solidFill>
+                            <a:srgbClr val="333333"/>
+                          </a:solidFill>
+                          <a:latin typeface="Calibri"/>
+                        </a:rPr>
+                        <a:t>≤ 30 s</a:t>
+                      </a:r>
+                    </a:p>
+                  </a:txBody>
+                  <a:tcPr marL="73152" marR="73152" marT="36576" marB="36576">
+                    <a:solidFill>
+                      <a:srgbClr val="FFFFFF"/>
+                    </a:solidFill>
+                  </a:tcPr>
+                </a:tc>
+              </a:tr>
+              <a:tr h="274320">
+                <a:tc>
+                  <a:txBody>
+                    <a:bodyPr wrap="square"/>
+                    <a:lstStyle/>
+                    <a:p>
+                      <a:pPr algn="l"/>
+                      <a:r>
+                        <a:rPr sz="1100" b="0">
+                          <a:solidFill>
+                            <a:srgbClr val="333333"/>
+                          </a:solidFill>
+                          <a:latin typeface="Calibri"/>
+                        </a:rPr>
+                        <a:t>TOTAL worst-case RTO</a:t>
+                      </a:r>
+                    </a:p>
+                  </a:txBody>
+                  <a:tcPr marL="73152" marR="73152" marT="36576" marB="36576">
+                    <a:solidFill>
+                      <a:srgbClr val="F2F2F2"/>
+                    </a:solidFill>
+                  </a:tcPr>
+                </a:tc>
+                <a:tc>
+                  <a:txBody>
+                    <a:bodyPr wrap="square"/>
+                    <a:lstStyle/>
+                    <a:p>
+                      <a:pPr algn="l"/>
+                      <a:r>
+                        <a:rPr sz="1100" b="0">
+                          <a:solidFill>
+                            <a:srgbClr val="333333"/>
+                          </a:solidFill>
+                          <a:latin typeface="Calibri"/>
+                        </a:rPr>
+                        <a:t>≈ 60 s</a:t>
+                      </a:r>
+                    </a:p>
+                  </a:txBody>
+                  <a:tcPr marL="73152" marR="73152" marT="36576" marB="36576">
+                    <a:solidFill>
+                      <a:srgbClr val="F2F2F2"/>
+                    </a:solidFill>
+                  </a:tcPr>
+                </a:tc>
+              </a:tr>
+            </a:tbl>
+          </a:graphicData>
+        </a:graphic>
+      </p:graphicFrame>
       <p:sp>
         <p:nvSpPr>
           <p:cNvPr id="11" name="TextBox 10"/>
@@ -12862,8 +15800,8 @@
         </p:nvSpPr>
         <p:spPr>
           <a:xfrm>
-            <a:off x="6400800" y="1920240"/>
-            <a:ext cx="5486400" cy="1463040"/>
+            <a:off x="6217920" y="4800600"/>
+            <a:ext cx="5486400" cy="320040"/>
           </a:xfrm>
           <a:prstGeom prst="rect">
             <a:avLst/>
@@ -12878,379 +15816,64 @@
           <a:p>
             <a:pPr algn="l"/>
             <a:r>
+              <a:rPr sz="1300" b="1">
+                <a:solidFill>
+                  <a:srgbClr val="1F4E79"/>
+                </a:solidFill>
+                <a:latin typeface="Calibri"/>
+              </a:rPr>
+              <a:t>Note on persistent connections</a:t>
+            </a:r>
+          </a:p>
+        </p:txBody>
+      </p:sp>
+      <p:sp>
+        <p:nvSpPr>
+          <p:cNvPr id="12" name="TextBox 11"/>
+          <p:cNvSpPr txBox="1"/>
+          <p:nvPr/>
+        </p:nvSpPr>
+        <p:spPr>
+          <a:xfrm>
+            <a:off x="6217920" y="5138928"/>
+            <a:ext cx="5669280" cy="1371600"/>
+          </a:xfrm>
+          <a:prstGeom prst="rect">
+            <a:avLst/>
+          </a:prstGeom>
+          <a:noFill/>
+        </p:spPr>
+        <p:txBody>
+          <a:bodyPr wrap="square" lIns="45720" rIns="45720" tIns="18288" bIns="18288" anchor="t">
+            <a:spAutoFit/>
+          </a:bodyPr>
+          <a:lstStyle/>
+          <a:p>
+            <a:pPr algn="l"/>
+            <a:r>
               <a:rPr sz="1100" b="0">
                 <a:solidFill>
                   <a:srgbClr val="333333"/>
                 </a:solidFill>
                 <a:latin typeface="Calibri"/>
               </a:rPr>
-              <a:t>Config (declarative YAML) lives in a Git repo — single source of truth. CI pipeline pushes to BOTH DCs in parallel on merge to main. Per-DC Ansible Tower / AWX runs the file deploy + SIGHUP hot reload. Daily reconciliation drift-detects and corrects.</a:t>
+              <a:t>Long-lived TLS / gRPC streams won't reconnect on DNS-only failover.</a:t>
+            </a:r>
+          </a:p>
+          <a:p>
+            <a:pPr algn="l"/>
+            <a:r>
+              <a:rPr sz="1100" b="0">
+                <a:solidFill>
+                  <a:srgbClr val="333333"/>
+                </a:solidFill>
+                <a:latin typeface="Calibri"/>
+              </a:rPr>
+              <a:t>Mitigations: TCP RST from the LB to force reconnect; connection-draining timers on the LTM; short max-connection-age limits set by the gateway. Document this in the DR runbook for affected clients.</a:t>
             </a:r>
           </a:p>
         </p:txBody>
       </p:sp>
-      <p:graphicFrame>
-        <p:nvGraphicFramePr>
-          <p:cNvPr id="12" name="Table 11"/>
-          <p:cNvGraphicFramePr>
-            <a:graphicFrameLocks noGrp="1"/>
-          </p:cNvGraphicFramePr>
-          <p:nvPr/>
-        </p:nvGraphicFramePr>
-        <p:xfrm>
-          <a:off x="6400800" y="3657600"/>
-          <a:ext cx="5440680" cy="2606040"/>
-        </p:xfrm>
-        <a:graphic>
-          <a:graphicData uri="http://schemas.openxmlformats.org/drawingml/2006/table">
-            <a:tbl>
-              <a:tblPr firstRow="1" bandRow="1">
-                <a:tableStyleId>{5C22544A-7EE6-4342-B048-85BDC9FD1C3A}</a:tableStyleId>
-              </a:tblPr>
-              <a:tblGrid>
-                <a:gridCol w="2743200"/>
-                <a:gridCol w="2697480"/>
-              </a:tblGrid>
-              <a:tr h="372291">
-                <a:tc>
-                  <a:txBody>
-                    <a:bodyPr wrap="square"/>
-                    <a:lstStyle/>
-                    <a:p>
-                      <a:pPr algn="l"/>
-                      <a:r>
-                        <a:rPr sz="1100" b="1">
-                          <a:solidFill>
-                            <a:srgbClr val="FFFFFF"/>
-                          </a:solidFill>
-                          <a:latin typeface="Calibri"/>
-                        </a:rPr>
-                        <a:t>Property</a:t>
-                      </a:r>
-                    </a:p>
-                  </a:txBody>
-                  <a:tcPr marL="73152" marR="73152" marT="36576" marB="36576">
-                    <a:solidFill>
-                      <a:srgbClr val="2E75B6"/>
-                    </a:solidFill>
-                  </a:tcPr>
-                </a:tc>
-                <a:tc>
-                  <a:txBody>
-                    <a:bodyPr wrap="square"/>
-                    <a:lstStyle/>
-                    <a:p>
-                      <a:pPr algn="l"/>
-                      <a:r>
-                        <a:rPr sz="1100" b="1">
-                          <a:solidFill>
-                            <a:srgbClr val="FFFFFF"/>
-                          </a:solidFill>
-                          <a:latin typeface="Calibri"/>
-                        </a:rPr>
-                        <a:t>Value</a:t>
-                      </a:r>
-                    </a:p>
-                  </a:txBody>
-                  <a:tcPr marL="73152" marR="73152" marT="36576" marB="36576">
-                    <a:solidFill>
-                      <a:srgbClr val="2E75B6"/>
-                    </a:solidFill>
-                  </a:tcPr>
-                </a:tc>
-              </a:tr>
-              <a:tr h="372291">
-                <a:tc>
-                  <a:txBody>
-                    <a:bodyPr wrap="square"/>
-                    <a:lstStyle/>
-                    <a:p>
-                      <a:pPr algn="l"/>
-                      <a:r>
-                        <a:rPr sz="1000" b="0">
-                          <a:solidFill>
-                            <a:srgbClr val="333333"/>
-                          </a:solidFill>
-                          <a:latin typeface="Calibri"/>
-                        </a:rPr>
-                        <a:t>Replication mechanism</a:t>
-                      </a:r>
-                    </a:p>
-                  </a:txBody>
-                  <a:tcPr marL="73152" marR="73152" marT="36576" marB="36576">
-                    <a:solidFill>
-                      <a:srgbClr val="FFFFFF"/>
-                    </a:solidFill>
-                  </a:tcPr>
-                </a:tc>
-                <a:tc>
-                  <a:txBody>
-                    <a:bodyPr wrap="square"/>
-                    <a:lstStyle/>
-                    <a:p>
-                      <a:pPr algn="l"/>
-                      <a:r>
-                        <a:rPr sz="1000" b="0">
-                          <a:solidFill>
-                            <a:srgbClr val="333333"/>
-                          </a:solidFill>
-                          <a:latin typeface="Calibri"/>
-                        </a:rPr>
-                        <a:t>GitOps + Ansible AWX (parallel push)</a:t>
-                      </a:r>
-                    </a:p>
-                  </a:txBody>
-                  <a:tcPr marL="73152" marR="73152" marT="36576" marB="36576">
-                    <a:solidFill>
-                      <a:srgbClr val="FFFFFF"/>
-                    </a:solidFill>
-                  </a:tcPr>
-                </a:tc>
-              </a:tr>
-              <a:tr h="372291">
-                <a:tc>
-                  <a:txBody>
-                    <a:bodyPr wrap="square"/>
-                    <a:lstStyle/>
-                    <a:p>
-                      <a:pPr algn="l"/>
-                      <a:r>
-                        <a:rPr sz="1000" b="0">
-                          <a:solidFill>
-                            <a:srgbClr val="333333"/>
-                          </a:solidFill>
-                          <a:latin typeface="Calibri"/>
-                        </a:rPr>
-                        <a:t>Push latency (merge → live)</a:t>
-                      </a:r>
-                    </a:p>
-                  </a:txBody>
-                  <a:tcPr marL="73152" marR="73152" marT="36576" marB="36576">
-                    <a:solidFill>
-                      <a:srgbClr val="F2F2F2"/>
-                    </a:solidFill>
-                  </a:tcPr>
-                </a:tc>
-                <a:tc>
-                  <a:txBody>
-                    <a:bodyPr wrap="square"/>
-                    <a:lstStyle/>
-                    <a:p>
-                      <a:pPr algn="l"/>
-                      <a:r>
-                        <a:rPr sz="1000" b="0">
-                          <a:solidFill>
-                            <a:srgbClr val="333333"/>
-                          </a:solidFill>
-                          <a:latin typeface="Calibri"/>
-                        </a:rPr>
-                        <a:t>&lt; 30 s typical</a:t>
-                      </a:r>
-                    </a:p>
-                  </a:txBody>
-                  <a:tcPr marL="73152" marR="73152" marT="36576" marB="36576">
-                    <a:solidFill>
-                      <a:srgbClr val="F2F2F2"/>
-                    </a:solidFill>
-                  </a:tcPr>
-                </a:tc>
-              </a:tr>
-              <a:tr h="372291">
-                <a:tc>
-                  <a:txBody>
-                    <a:bodyPr wrap="square"/>
-                    <a:lstStyle/>
-                    <a:p>
-                      <a:pPr algn="l"/>
-                      <a:r>
-                        <a:rPr sz="1000" b="0">
-                          <a:solidFill>
-                            <a:srgbClr val="333333"/>
-                          </a:solidFill>
-                          <a:latin typeface="Calibri"/>
-                        </a:rPr>
-                        <a:t>RPO for config</a:t>
-                      </a:r>
-                    </a:p>
-                  </a:txBody>
-                  <a:tcPr marL="73152" marR="73152" marT="36576" marB="36576">
-                    <a:solidFill>
-                      <a:srgbClr val="FFFFFF"/>
-                    </a:solidFill>
-                  </a:tcPr>
-                </a:tc>
-                <a:tc>
-                  <a:txBody>
-                    <a:bodyPr wrap="square"/>
-                    <a:lstStyle/>
-                    <a:p>
-                      <a:pPr algn="l"/>
-                      <a:r>
-                        <a:rPr sz="1000" b="0">
-                          <a:solidFill>
-                            <a:srgbClr val="333333"/>
-                          </a:solidFill>
-                          <a:latin typeface="Calibri"/>
-                        </a:rPr>
-                        <a:t>Zero (Git is authoritative)</a:t>
-                      </a:r>
-                    </a:p>
-                  </a:txBody>
-                  <a:tcPr marL="73152" marR="73152" marT="36576" marB="36576">
-                    <a:solidFill>
-                      <a:srgbClr val="FFFFFF"/>
-                    </a:solidFill>
-                  </a:tcPr>
-                </a:tc>
-              </a:tr>
-              <a:tr h="372291">
-                <a:tc>
-                  <a:txBody>
-                    <a:bodyPr wrap="square"/>
-                    <a:lstStyle/>
-                    <a:p>
-                      <a:pPr algn="l"/>
-                      <a:r>
-                        <a:rPr sz="1000" b="0">
-                          <a:solidFill>
-                            <a:srgbClr val="333333"/>
-                          </a:solidFill>
-                          <a:latin typeface="Calibri"/>
-                        </a:rPr>
-                        <a:t>Customer infrastructure needed</a:t>
-                      </a:r>
-                    </a:p>
-                  </a:txBody>
-                  <a:tcPr marL="73152" marR="73152" marT="36576" marB="36576">
-                    <a:solidFill>
-                      <a:srgbClr val="F2F2F2"/>
-                    </a:solidFill>
-                  </a:tcPr>
-                </a:tc>
-                <a:tc>
-                  <a:txBody>
-                    <a:bodyPr wrap="square"/>
-                    <a:lstStyle/>
-                    <a:p>
-                      <a:pPr algn="l"/>
-                      <a:r>
-                        <a:rPr sz="1000" b="0">
-                          <a:solidFill>
-                            <a:srgbClr val="333333"/>
-                          </a:solidFill>
-                          <a:latin typeface="Calibri"/>
-                        </a:rPr>
-                        <a:t>Git + CI + AWX per DC + Vault for secrets</a:t>
-                      </a:r>
-                    </a:p>
-                  </a:txBody>
-                  <a:tcPr marL="73152" marR="73152" marT="36576" marB="36576">
-                    <a:solidFill>
-                      <a:srgbClr val="F2F2F2"/>
-                    </a:solidFill>
-                  </a:tcPr>
-                </a:tc>
-              </a:tr>
-              <a:tr h="372291">
-                <a:tc>
-                  <a:txBody>
-                    <a:bodyPr wrap="square"/>
-                    <a:lstStyle/>
-                    <a:p>
-                      <a:pPr algn="l"/>
-                      <a:r>
-                        <a:rPr sz="1000" b="0">
-                          <a:solidFill>
-                            <a:srgbClr val="333333"/>
-                          </a:solidFill>
-                          <a:latin typeface="Calibri"/>
-                        </a:rPr>
-                        <a:t>Resilience to GitOps outage</a:t>
-                      </a:r>
-                    </a:p>
-                  </a:txBody>
-                  <a:tcPr marL="73152" marR="73152" marT="36576" marB="36576">
-                    <a:solidFill>
-                      <a:srgbClr val="FFFFFF"/>
-                    </a:solidFill>
-                  </a:tcPr>
-                </a:tc>
-                <a:tc>
-                  <a:txBody>
-                    <a:bodyPr wrap="square"/>
-                    <a:lstStyle/>
-                    <a:p>
-                      <a:pPr algn="l"/>
-                      <a:r>
-                        <a:rPr sz="1000" b="0">
-                          <a:solidFill>
-                            <a:srgbClr val="333333"/>
-                          </a:solidFill>
-                          <a:latin typeface="Calibri"/>
-                        </a:rPr>
-                        <a:t>Existing config keeps serving</a:t>
-                      </a:r>
-                    </a:p>
-                  </a:txBody>
-                  <a:tcPr marL="73152" marR="73152" marT="36576" marB="36576">
-                    <a:solidFill>
-                      <a:srgbClr val="FFFFFF"/>
-                    </a:solidFill>
-                  </a:tcPr>
-                </a:tc>
-              </a:tr>
-              <a:tr h="372294">
-                <a:tc>
-                  <a:txBody>
-                    <a:bodyPr wrap="square"/>
-                    <a:lstStyle/>
-                    <a:p>
-                      <a:pPr algn="l"/>
-                      <a:r>
-                        <a:rPr sz="1000" b="0">
-                          <a:solidFill>
-                            <a:srgbClr val="333333"/>
-                          </a:solidFill>
-                          <a:latin typeface="Calibri"/>
-                        </a:rPr>
-                        <a:t>Network requirement</a:t>
-                      </a:r>
-                    </a:p>
-                  </a:txBody>
-                  <a:tcPr marL="73152" marR="73152" marT="36576" marB="36576">
-                    <a:solidFill>
-                      <a:srgbClr val="F2F2F2"/>
-                    </a:solidFill>
-                  </a:tcPr>
-                </a:tc>
-                <a:tc>
-                  <a:txBody>
-                    <a:bodyPr wrap="square"/>
-                    <a:lstStyle/>
-                    <a:p>
-                      <a:pPr algn="l"/>
-                      <a:r>
-                        <a:rPr sz="1000" b="0">
-                          <a:solidFill>
-                            <a:srgbClr val="333333"/>
-                          </a:solidFill>
-                          <a:latin typeface="Calibri"/>
-                        </a:rPr>
-                        <a:t>None outbound — fully air-gappable</a:t>
-                      </a:r>
-                    </a:p>
-                  </a:txBody>
-                  <a:tcPr marL="73152" marR="73152" marT="36576" marB="36576">
-                    <a:solidFill>
-                      <a:srgbClr val="F2F2F2"/>
-                    </a:solidFill>
-                  </a:tcPr>
-                </a:tc>
-              </a:tr>
-            </a:tbl>
-          </a:graphicData>
-        </a:graphic>
-      </p:graphicFrame>
       <p:sp>
         <p:nvSpPr>
           <p:cNvPr id="13" name="Rectangle 12"/>
@@ -13359,7 +15982,7 @@
                 </a:solidFill>
                 <a:latin typeface="Calibri"/>
               </a:rPr>
-              <a:t>9 / 10</a:t>
+              <a:t>9 / 11</a:t>
             </a:r>
           </a:p>
         </p:txBody>
